--- a/content/05-teaching-resources/slides/core/03-engineering-past-present-and-future.pptx
+++ b/content/05-teaching-resources/slides/core/03-engineering-past-present-and-future.pptx
@@ -14,6 +14,10 @@
     <p:sldId id="262" r:id="rId14"/>
     <p:sldId id="263" r:id="rId15"/>
     <p:sldId id="264" r:id="rId16"/>
+    <p:sldId id="265" r:id="rId17"/>
+    <p:sldId id="266" r:id="rId18"/>
+    <p:sldId id="267" r:id="rId19"/>
+    <p:sldId id="268" r:id="rId20"/>
   </p:sldIdLst>
   <p:sldSz cx="12191695" cy="6858000" type="screen4x3"/>
   <p:notesSz cx="6858000" cy="9144000"/>
@@ -510,7 +514,22 @@
           <a:lstStyle/>
           <a:p>
             <a:r>
-              <a:t>Give students a few minutes to answer on mini whiteboards or paper, then reveal the answers on the next slide.</a:t>
+              <a:t>Answers:</a:t>
+            </a:r>
+          </a:p>
+          <a:p>
+            <a:r>
+              <a:t>1. They enabled mass production and easy repair.</a:t>
+            </a:r>
+          </a:p>
+          <a:p>
+            <a:r>
+              <a:t>2. E.g. internal combustion engine, electric motor.</a:t>
+            </a:r>
+          </a:p>
+          <a:p>
+            <a:r>
+              <a:t>3. They enabled automation and precise control.</a:t>
             </a:r>
           </a:p>
         </p:txBody>
@@ -580,7 +599,22 @@
           <a:lstStyle/>
           <a:p>
             <a:r>
-              <a:t>Talk through any answers the class found difficult.</a:t>
+              <a:t>Answers:</a:t>
+            </a:r>
+          </a:p>
+          <a:p>
+            <a:r>
+              <a:t>1. Physical equipment tightly controlled by software and networks.</a:t>
+            </a:r>
+          </a:p>
+          <a:p>
+            <a:r>
+              <a:t>2. Keeping materials in use through reuse, repair and recycling.</a:t>
+            </a:r>
+          </a:p>
+          <a:p>
+            <a:r>
+              <a:t>3. E.g. overlaying instructions for training and maintenance.</a:t>
             </a:r>
           </a:p>
         </p:txBody>
@@ -606,6 +640,146 @@
 </file>
 
 <file path=ppt/notesSlides/notesSlide3.xml><?xml version="1.0" encoding="utf-8"?>
+<p:notes xmlns:a="http://schemas.openxmlformats.org/drawingml/2006/main" xmlns:p="http://schemas.openxmlformats.org/presentationml/2006/main" xmlns:r="http://schemas.openxmlformats.org/officeDocument/2006/relationships">
+  <p:cSld>
+    <p:spTree>
+      <p:nvGrpSpPr>
+        <p:cNvPr id="1" name=""/>
+        <p:cNvGrpSpPr/>
+        <p:nvPr/>
+      </p:nvGrpSpPr>
+      <p:grpSpPr>
+        <a:xfrm>
+          <a:off x="0" y="0"/>
+          <a:ext cx="0" cy="0"/>
+          <a:chOff x="0" y="0"/>
+          <a:chExt cx="0" cy="0"/>
+        </a:xfrm>
+      </p:grpSpPr>
+      <p:sp>
+        <p:nvSpPr>
+          <p:cNvPr id="2" name="Slide Image Placeholder 1"/>
+          <p:cNvSpPr>
+            <a:spLocks noGrp="1"/>
+          </p:cNvSpPr>
+          <p:nvPr>
+            <p:ph type="sldImg" idx="2"/>
+          </p:nvPr>
+        </p:nvSpPr>
+        <p:spPr/>
+      </p:sp>
+      <p:sp>
+        <p:nvSpPr>
+          <p:cNvPr id="3" name="Notes Placeholder 2"/>
+          <p:cNvSpPr>
+            <a:spLocks noGrp="1"/>
+          </p:cNvSpPr>
+          <p:nvPr>
+            <p:ph type="body" idx="3" sz="quarter"/>
+          </p:nvPr>
+        </p:nvSpPr>
+        <p:spPr/>
+        <p:txBody>
+          <a:bodyPr/>
+          <a:lstStyle/>
+          <a:p>
+            <a:r>
+              <a:t>Give students a few minutes to answer on mini whiteboards or paper, then reveal the answers on the next slide.</a:t>
+            </a:r>
+          </a:p>
+        </p:txBody>
+      </p:sp>
+      <p:sp>
+        <p:nvSpPr>
+          <p:cNvPr id="4" name="Slide Number Placeholder 3"/>
+          <p:cNvSpPr>
+            <a:spLocks noGrp="1"/>
+          </p:cNvSpPr>
+          <p:nvPr>
+            <p:ph type="sldNum" idx="5" sz="quarter"/>
+          </p:nvPr>
+        </p:nvSpPr>
+        <p:spPr/>
+      </p:sp>
+    </p:spTree>
+  </p:cSld>
+  <p:clrMapOvr>
+    <a:masterClrMapping/>
+  </p:clrMapOvr>
+</p:notes>
+</file>
+
+<file path=ppt/notesSlides/notesSlide4.xml><?xml version="1.0" encoding="utf-8"?>
+<p:notes xmlns:a="http://schemas.openxmlformats.org/drawingml/2006/main" xmlns:p="http://schemas.openxmlformats.org/presentationml/2006/main" xmlns:r="http://schemas.openxmlformats.org/officeDocument/2006/relationships">
+  <p:cSld>
+    <p:spTree>
+      <p:nvGrpSpPr>
+        <p:cNvPr id="1" name=""/>
+        <p:cNvGrpSpPr/>
+        <p:nvPr/>
+      </p:nvGrpSpPr>
+      <p:grpSpPr>
+        <a:xfrm>
+          <a:off x="0" y="0"/>
+          <a:ext cx="0" cy="0"/>
+          <a:chOff x="0" y="0"/>
+          <a:chExt cx="0" cy="0"/>
+        </a:xfrm>
+      </p:grpSpPr>
+      <p:sp>
+        <p:nvSpPr>
+          <p:cNvPr id="2" name="Slide Image Placeholder 1"/>
+          <p:cNvSpPr>
+            <a:spLocks noGrp="1"/>
+          </p:cNvSpPr>
+          <p:nvPr>
+            <p:ph type="sldImg" idx="2"/>
+          </p:nvPr>
+        </p:nvSpPr>
+        <p:spPr/>
+      </p:sp>
+      <p:sp>
+        <p:nvSpPr>
+          <p:cNvPr id="3" name="Notes Placeholder 2"/>
+          <p:cNvSpPr>
+            <a:spLocks noGrp="1"/>
+          </p:cNvSpPr>
+          <p:nvPr>
+            <p:ph type="body" idx="3" sz="quarter"/>
+          </p:nvPr>
+        </p:nvSpPr>
+        <p:spPr/>
+        <p:txBody>
+          <a:bodyPr/>
+          <a:lstStyle/>
+          <a:p>
+            <a:r>
+              <a:t>Talk through any answers the class found difficult.</a:t>
+            </a:r>
+          </a:p>
+        </p:txBody>
+      </p:sp>
+      <p:sp>
+        <p:nvSpPr>
+          <p:cNvPr id="4" name="Slide Number Placeholder 3"/>
+          <p:cNvSpPr>
+            <a:spLocks noGrp="1"/>
+          </p:cNvSpPr>
+          <p:nvPr>
+            <p:ph type="sldNum" idx="5" sz="quarter"/>
+          </p:nvPr>
+        </p:nvSpPr>
+        <p:spPr/>
+      </p:sp>
+    </p:spTree>
+  </p:cSld>
+  <p:clrMapOvr>
+    <a:masterClrMapping/>
+  </p:clrMapOvr>
+</p:notes>
+</file>
+
+<file path=ppt/notesSlides/notesSlide5.xml><?xml version="1.0" encoding="utf-8"?>
 <p:notes xmlns:a="http://schemas.openxmlformats.org/drawingml/2006/main" xmlns:p="http://schemas.openxmlformats.org/presentationml/2006/main" xmlns:r="http://schemas.openxmlformats.org/officeDocument/2006/relationships">
   <p:cSld>
     <p:spTree>
@@ -3975,6 +4149,2355 @@
 </p:sld>
 </file>
 
+<file path=ppt/slides/slide10.xml><?xml version="1.0" encoding="utf-8"?>
+<p:sld xmlns:a="http://schemas.openxmlformats.org/drawingml/2006/main" xmlns:p="http://schemas.openxmlformats.org/presentationml/2006/main" xmlns:r="http://schemas.openxmlformats.org/officeDocument/2006/relationships">
+  <p:cSld>
+    <p:bg>
+      <p:bgPr>
+        <a:solidFill>
+          <a:srgbClr val="FFFFFF"/>
+        </a:solidFill>
+        <a:effectLst/>
+      </p:bgPr>
+    </p:bg>
+    <p:spTree>
+      <p:nvGrpSpPr>
+        <p:cNvPr id="1" name=""/>
+        <p:cNvGrpSpPr/>
+        <p:nvPr/>
+      </p:nvGrpSpPr>
+      <p:grpSpPr/>
+      <p:sp>
+        <p:nvSpPr>
+          <p:cNvPr id="2" name="TextBox 1"/>
+          <p:cNvSpPr txBox="1"/>
+          <p:nvPr/>
+        </p:nvSpPr>
+        <p:spPr>
+          <a:xfrm>
+            <a:off x="548640" y="320040"/>
+            <a:ext cx="11094415" cy="274320"/>
+          </a:xfrm>
+          <a:prstGeom prst="rect">
+            <a:avLst/>
+          </a:prstGeom>
+          <a:noFill/>
+        </p:spPr>
+        <p:txBody>
+          <a:bodyPr wrap="square" anchor="t" lIns="0" rIns="0" tIns="0" bIns="0"/>
+          <a:lstStyle/>
+          <a:p>
+            <a:pPr algn="l"/>
+            <a:r>
+              <a:rPr sz="1100" b="1" i="0">
+                <a:solidFill>
+                  <a:srgbClr val="54595D"/>
+                </a:solidFill>
+                <a:latin typeface="Calibri"/>
+              </a:rPr>
+              <a:t>ENGINEERING CORE  ·  Core topic 2</a:t>
+            </a:r>
+          </a:p>
+        </p:txBody>
+      </p:sp>
+      <p:sp>
+        <p:nvSpPr>
+          <p:cNvPr id="3" name="TextBox 2"/>
+          <p:cNvSpPr txBox="1"/>
+          <p:nvPr/>
+        </p:nvSpPr>
+        <p:spPr>
+          <a:xfrm>
+            <a:off x="548640" y="566928"/>
+            <a:ext cx="11094415" cy="822960"/>
+          </a:xfrm>
+          <a:prstGeom prst="rect">
+            <a:avLst/>
+          </a:prstGeom>
+          <a:noFill/>
+        </p:spPr>
+        <p:txBody>
+          <a:bodyPr wrap="square" anchor="ctr" lIns="0" rIns="0" tIns="0" bIns="0"/>
+          <a:lstStyle/>
+          <a:p>
+            <a:pPr algn="l"/>
+            <a:r>
+              <a:rPr sz="3200" b="1" i="0">
+                <a:solidFill>
+                  <a:srgbClr val="03306E"/>
+                </a:solidFill>
+                <a:latin typeface="Cambria"/>
+              </a:rPr>
+              <a:t>Check your understanding</a:t>
+            </a:r>
+          </a:p>
+        </p:txBody>
+      </p:sp>
+      <p:sp>
+        <p:nvSpPr>
+          <p:cNvPr id="4" name="TextBox 3"/>
+          <p:cNvSpPr txBox="1"/>
+          <p:nvPr/>
+        </p:nvSpPr>
+        <p:spPr>
+          <a:xfrm>
+            <a:off x="548640" y="6446520"/>
+            <a:ext cx="8229600" cy="274320"/>
+          </a:xfrm>
+          <a:prstGeom prst="rect">
+            <a:avLst/>
+          </a:prstGeom>
+          <a:noFill/>
+        </p:spPr>
+        <p:txBody>
+          <a:bodyPr wrap="square" anchor="t" lIns="0" rIns="0" tIns="0" bIns="0"/>
+          <a:lstStyle/>
+          <a:p>
+            <a:pPr algn="l"/>
+            <a:r>
+              <a:rPr sz="1000" b="0" i="0">
+                <a:solidFill>
+                  <a:srgbClr val="54595D"/>
+                </a:solidFill>
+                <a:latin typeface="Calibri"/>
+              </a:rPr>
+              <a:t>Design and Development for Engineering and Manufacturing T Level  ·  Engineering Past, Present and Future</a:t>
+            </a:r>
+          </a:p>
+        </p:txBody>
+      </p:sp>
+      <p:sp>
+        <p:nvSpPr>
+          <p:cNvPr id="5" name="TextBox 4"/>
+          <p:cNvSpPr txBox="1"/>
+          <p:nvPr/>
+        </p:nvSpPr>
+        <p:spPr>
+          <a:xfrm>
+            <a:off x="10728655" y="6446520"/>
+            <a:ext cx="914400" cy="274320"/>
+          </a:xfrm>
+          <a:prstGeom prst="rect">
+            <a:avLst/>
+          </a:prstGeom>
+          <a:noFill/>
+        </p:spPr>
+        <p:txBody>
+          <a:bodyPr wrap="square" anchor="t" lIns="0" rIns="0" tIns="0" bIns="0"/>
+          <a:lstStyle/>
+          <a:p>
+            <a:pPr algn="r"/>
+            <a:r>
+              <a:rPr sz="1000" b="0" i="0">
+                <a:solidFill>
+                  <a:srgbClr val="54595D"/>
+                </a:solidFill>
+                <a:latin typeface="Calibri"/>
+              </a:rPr>
+              <a:t>10</a:t>
+            </a:r>
+          </a:p>
+        </p:txBody>
+      </p:sp>
+      <p:sp>
+        <p:nvSpPr>
+          <p:cNvPr id="6" name="Oval 5"/>
+          <p:cNvSpPr/>
+          <p:nvPr/>
+        </p:nvSpPr>
+        <p:spPr>
+          <a:xfrm>
+            <a:off x="548640" y="1618488"/>
+            <a:ext cx="411480" cy="411480"/>
+          </a:xfrm>
+          <a:prstGeom prst="ellipse">
+            <a:avLst/>
+          </a:prstGeom>
+          <a:solidFill>
+            <a:srgbClr val="F2B705"/>
+          </a:solidFill>
+          <a:ln>
+            <a:noFill/>
+          </a:ln>
+          <a:effectLst/>
+        </p:spPr>
+        <p:style>
+          <a:lnRef idx="1">
+            <a:schemeClr val="accent1"/>
+          </a:lnRef>
+          <a:fillRef idx="3">
+            <a:schemeClr val="accent1"/>
+          </a:fillRef>
+          <a:effectRef idx="2">
+            <a:schemeClr val="accent1"/>
+          </a:effectRef>
+          <a:fontRef idx="minor">
+            <a:schemeClr val="lt1"/>
+          </a:fontRef>
+        </p:style>
+        <p:txBody>
+          <a:bodyPr rtlCol="0" anchor="ctr" lIns="0" rIns="0" tIns="0" bIns="0"/>
+          <a:lstStyle/>
+          <a:p>
+            <a:pPr algn="ctr"/>
+            <a:r>
+              <a:rPr sz="1400" b="1">
+                <a:solidFill>
+                  <a:srgbClr val="202122"/>
+                </a:solidFill>
+                <a:latin typeface="Calibri"/>
+              </a:rPr>
+              <a:t>1</a:t>
+            </a:r>
+          </a:p>
+        </p:txBody>
+      </p:sp>
+      <p:sp>
+        <p:nvSpPr>
+          <p:cNvPr id="7" name="TextBox 6"/>
+          <p:cNvSpPr txBox="1"/>
+          <p:nvPr/>
+        </p:nvSpPr>
+        <p:spPr>
+          <a:xfrm>
+            <a:off x="1234440" y="1600200"/>
+            <a:ext cx="10408615" cy="1030986"/>
+          </a:xfrm>
+          <a:prstGeom prst="rect">
+            <a:avLst/>
+          </a:prstGeom>
+          <a:noFill/>
+        </p:spPr>
+        <p:txBody>
+          <a:bodyPr wrap="square" anchor="t" lIns="0" rIns="0" tIns="0" bIns="0"/>
+          <a:lstStyle/>
+          <a:p>
+            <a:pPr algn="l"/>
+            <a:r>
+              <a:rPr sz="2200" b="0" i="0">
+                <a:solidFill>
+                  <a:srgbClr val="202122"/>
+                </a:solidFill>
+                <a:latin typeface="Calibri"/>
+              </a:rPr>
+              <a:t>Name three engineering sectors.</a:t>
+            </a:r>
+          </a:p>
+        </p:txBody>
+      </p:sp>
+      <p:sp>
+        <p:nvSpPr>
+          <p:cNvPr id="8" name="Oval 7"/>
+          <p:cNvSpPr/>
+          <p:nvPr/>
+        </p:nvSpPr>
+        <p:spPr>
+          <a:xfrm>
+            <a:off x="548640" y="2814066"/>
+            <a:ext cx="411480" cy="411480"/>
+          </a:xfrm>
+          <a:prstGeom prst="ellipse">
+            <a:avLst/>
+          </a:prstGeom>
+          <a:solidFill>
+            <a:srgbClr val="F2B705"/>
+          </a:solidFill>
+          <a:ln>
+            <a:noFill/>
+          </a:ln>
+          <a:effectLst/>
+        </p:spPr>
+        <p:style>
+          <a:lnRef idx="1">
+            <a:schemeClr val="accent1"/>
+          </a:lnRef>
+          <a:fillRef idx="3">
+            <a:schemeClr val="accent1"/>
+          </a:fillRef>
+          <a:effectRef idx="2">
+            <a:schemeClr val="accent1"/>
+          </a:effectRef>
+          <a:fontRef idx="minor">
+            <a:schemeClr val="lt1"/>
+          </a:fontRef>
+        </p:style>
+        <p:txBody>
+          <a:bodyPr rtlCol="0" anchor="ctr" lIns="0" rIns="0" tIns="0" bIns="0"/>
+          <a:lstStyle/>
+          <a:p>
+            <a:pPr algn="ctr"/>
+            <a:r>
+              <a:rPr sz="1400" b="1">
+                <a:solidFill>
+                  <a:srgbClr val="202122"/>
+                </a:solidFill>
+                <a:latin typeface="Calibri"/>
+              </a:rPr>
+              <a:t>2</a:t>
+            </a:r>
+          </a:p>
+        </p:txBody>
+      </p:sp>
+      <p:sp>
+        <p:nvSpPr>
+          <p:cNvPr id="9" name="TextBox 8"/>
+          <p:cNvSpPr txBox="1"/>
+          <p:nvPr/>
+        </p:nvSpPr>
+        <p:spPr>
+          <a:xfrm>
+            <a:off x="1234440" y="2795778"/>
+            <a:ext cx="10408615" cy="1030986"/>
+          </a:xfrm>
+          <a:prstGeom prst="rect">
+            <a:avLst/>
+          </a:prstGeom>
+          <a:noFill/>
+        </p:spPr>
+        <p:txBody>
+          <a:bodyPr wrap="square" anchor="t" lIns="0" rIns="0" tIns="0" bIns="0"/>
+          <a:lstStyle/>
+          <a:p>
+            <a:pPr algn="l"/>
+            <a:r>
+              <a:rPr sz="2200" b="0" i="0">
+                <a:solidFill>
+                  <a:srgbClr val="202122"/>
+                </a:solidFill>
+                <a:latin typeface="Calibri"/>
+              </a:rPr>
+              <a:t>How did replaceable parts change manufacturing?</a:t>
+            </a:r>
+          </a:p>
+        </p:txBody>
+      </p:sp>
+      <p:sp>
+        <p:nvSpPr>
+          <p:cNvPr id="10" name="Oval 9"/>
+          <p:cNvSpPr/>
+          <p:nvPr/>
+        </p:nvSpPr>
+        <p:spPr>
+          <a:xfrm>
+            <a:off x="548640" y="4009644"/>
+            <a:ext cx="411480" cy="411480"/>
+          </a:xfrm>
+          <a:prstGeom prst="ellipse">
+            <a:avLst/>
+          </a:prstGeom>
+          <a:solidFill>
+            <a:srgbClr val="F2B705"/>
+          </a:solidFill>
+          <a:ln>
+            <a:noFill/>
+          </a:ln>
+          <a:effectLst/>
+        </p:spPr>
+        <p:style>
+          <a:lnRef idx="1">
+            <a:schemeClr val="accent1"/>
+          </a:lnRef>
+          <a:fillRef idx="3">
+            <a:schemeClr val="accent1"/>
+          </a:fillRef>
+          <a:effectRef idx="2">
+            <a:schemeClr val="accent1"/>
+          </a:effectRef>
+          <a:fontRef idx="minor">
+            <a:schemeClr val="lt1"/>
+          </a:fontRef>
+        </p:style>
+        <p:txBody>
+          <a:bodyPr rtlCol="0" anchor="ctr" lIns="0" rIns="0" tIns="0" bIns="0"/>
+          <a:lstStyle/>
+          <a:p>
+            <a:pPr algn="ctr"/>
+            <a:r>
+              <a:rPr sz="1400" b="1">
+                <a:solidFill>
+                  <a:srgbClr val="202122"/>
+                </a:solidFill>
+                <a:latin typeface="Calibri"/>
+              </a:rPr>
+              <a:t>3</a:t>
+            </a:r>
+          </a:p>
+        </p:txBody>
+      </p:sp>
+      <p:sp>
+        <p:nvSpPr>
+          <p:cNvPr id="11" name="TextBox 10"/>
+          <p:cNvSpPr txBox="1"/>
+          <p:nvPr/>
+        </p:nvSpPr>
+        <p:spPr>
+          <a:xfrm>
+            <a:off x="1234440" y="3991356"/>
+            <a:ext cx="10408615" cy="1030986"/>
+          </a:xfrm>
+          <a:prstGeom prst="rect">
+            <a:avLst/>
+          </a:prstGeom>
+          <a:noFill/>
+        </p:spPr>
+        <p:txBody>
+          <a:bodyPr wrap="square" anchor="t" lIns="0" rIns="0" tIns="0" bIns="0"/>
+          <a:lstStyle/>
+          <a:p>
+            <a:pPr algn="l"/>
+            <a:r>
+              <a:rPr sz="2200" b="0" i="0">
+                <a:solidFill>
+                  <a:srgbClr val="202122"/>
+                </a:solidFill>
+                <a:latin typeface="Calibri"/>
+              </a:rPr>
+              <a:t>What is a cyber-physical system?</a:t>
+            </a:r>
+          </a:p>
+        </p:txBody>
+      </p:sp>
+      <p:sp>
+        <p:nvSpPr>
+          <p:cNvPr id="12" name="Oval 11"/>
+          <p:cNvSpPr/>
+          <p:nvPr/>
+        </p:nvSpPr>
+        <p:spPr>
+          <a:xfrm>
+            <a:off x="548640" y="5205221"/>
+            <a:ext cx="411480" cy="411480"/>
+          </a:xfrm>
+          <a:prstGeom prst="ellipse">
+            <a:avLst/>
+          </a:prstGeom>
+          <a:solidFill>
+            <a:srgbClr val="F2B705"/>
+          </a:solidFill>
+          <a:ln>
+            <a:noFill/>
+          </a:ln>
+          <a:effectLst/>
+        </p:spPr>
+        <p:style>
+          <a:lnRef idx="1">
+            <a:schemeClr val="accent1"/>
+          </a:lnRef>
+          <a:fillRef idx="3">
+            <a:schemeClr val="accent1"/>
+          </a:fillRef>
+          <a:effectRef idx="2">
+            <a:schemeClr val="accent1"/>
+          </a:effectRef>
+          <a:fontRef idx="minor">
+            <a:schemeClr val="lt1"/>
+          </a:fontRef>
+        </p:style>
+        <p:txBody>
+          <a:bodyPr rtlCol="0" anchor="ctr" lIns="0" rIns="0" tIns="0" bIns="0"/>
+          <a:lstStyle/>
+          <a:p>
+            <a:pPr algn="ctr"/>
+            <a:r>
+              <a:rPr sz="1400" b="1">
+                <a:solidFill>
+                  <a:srgbClr val="202122"/>
+                </a:solidFill>
+                <a:latin typeface="Calibri"/>
+              </a:rPr>
+              <a:t>4</a:t>
+            </a:r>
+          </a:p>
+        </p:txBody>
+      </p:sp>
+      <p:sp>
+        <p:nvSpPr>
+          <p:cNvPr id="13" name="TextBox 12"/>
+          <p:cNvSpPr txBox="1"/>
+          <p:nvPr/>
+        </p:nvSpPr>
+        <p:spPr>
+          <a:xfrm>
+            <a:off x="1234440" y="5186933"/>
+            <a:ext cx="10408615" cy="1030986"/>
+          </a:xfrm>
+          <a:prstGeom prst="rect">
+            <a:avLst/>
+          </a:prstGeom>
+          <a:noFill/>
+        </p:spPr>
+        <p:txBody>
+          <a:bodyPr wrap="square" anchor="t" lIns="0" rIns="0" tIns="0" bIns="0"/>
+          <a:lstStyle/>
+          <a:p>
+            <a:pPr algn="l"/>
+            <a:r>
+              <a:rPr sz="2200" b="0" i="0">
+                <a:solidFill>
+                  <a:srgbClr val="202122"/>
+                </a:solidFill>
+                <a:latin typeface="Calibri"/>
+              </a:rPr>
+              <a:t>What is the circular economy?</a:t>
+            </a:r>
+          </a:p>
+        </p:txBody>
+      </p:sp>
+    </p:spTree>
+  </p:cSld>
+  <p:clrMapOvr>
+    <a:masterClrMapping/>
+  </p:clrMapOvr>
+</p:sld>
+</file>
+
+<file path=ppt/slides/slide11.xml><?xml version="1.0" encoding="utf-8"?>
+<p:sld xmlns:a="http://schemas.openxmlformats.org/drawingml/2006/main" xmlns:p="http://schemas.openxmlformats.org/presentationml/2006/main" xmlns:r="http://schemas.openxmlformats.org/officeDocument/2006/relationships">
+  <p:cSld>
+    <p:bg>
+      <p:bgPr>
+        <a:solidFill>
+          <a:srgbClr val="FFFFFF"/>
+        </a:solidFill>
+        <a:effectLst/>
+      </p:bgPr>
+    </p:bg>
+    <p:spTree>
+      <p:nvGrpSpPr>
+        <p:cNvPr id="1" name=""/>
+        <p:cNvGrpSpPr/>
+        <p:nvPr/>
+      </p:nvGrpSpPr>
+      <p:grpSpPr/>
+      <p:sp>
+        <p:nvSpPr>
+          <p:cNvPr id="2" name="TextBox 1"/>
+          <p:cNvSpPr txBox="1"/>
+          <p:nvPr/>
+        </p:nvSpPr>
+        <p:spPr>
+          <a:xfrm>
+            <a:off x="548640" y="320040"/>
+            <a:ext cx="11094415" cy="274320"/>
+          </a:xfrm>
+          <a:prstGeom prst="rect">
+            <a:avLst/>
+          </a:prstGeom>
+          <a:noFill/>
+        </p:spPr>
+        <p:txBody>
+          <a:bodyPr wrap="square" anchor="t" lIns="0" rIns="0" tIns="0" bIns="0"/>
+          <a:lstStyle/>
+          <a:p>
+            <a:pPr algn="l"/>
+            <a:r>
+              <a:rPr sz="1100" b="1" i="0">
+                <a:solidFill>
+                  <a:srgbClr val="54595D"/>
+                </a:solidFill>
+                <a:latin typeface="Calibri"/>
+              </a:rPr>
+              <a:t>ENGINEERING CORE  ·  Core topic 2</a:t>
+            </a:r>
+          </a:p>
+        </p:txBody>
+      </p:sp>
+      <p:sp>
+        <p:nvSpPr>
+          <p:cNvPr id="3" name="TextBox 2"/>
+          <p:cNvSpPr txBox="1"/>
+          <p:nvPr/>
+        </p:nvSpPr>
+        <p:spPr>
+          <a:xfrm>
+            <a:off x="548640" y="566928"/>
+            <a:ext cx="11094415" cy="822960"/>
+          </a:xfrm>
+          <a:prstGeom prst="rect">
+            <a:avLst/>
+          </a:prstGeom>
+          <a:noFill/>
+        </p:spPr>
+        <p:txBody>
+          <a:bodyPr wrap="square" anchor="ctr" lIns="0" rIns="0" tIns="0" bIns="0"/>
+          <a:lstStyle/>
+          <a:p>
+            <a:pPr algn="l"/>
+            <a:r>
+              <a:rPr sz="3200" b="1" i="0">
+                <a:solidFill>
+                  <a:srgbClr val="03306E"/>
+                </a:solidFill>
+                <a:latin typeface="Cambria"/>
+              </a:rPr>
+              <a:t>Answers</a:t>
+            </a:r>
+          </a:p>
+        </p:txBody>
+      </p:sp>
+      <p:sp>
+        <p:nvSpPr>
+          <p:cNvPr id="4" name="TextBox 3"/>
+          <p:cNvSpPr txBox="1"/>
+          <p:nvPr/>
+        </p:nvSpPr>
+        <p:spPr>
+          <a:xfrm>
+            <a:off x="548640" y="6446520"/>
+            <a:ext cx="8229600" cy="274320"/>
+          </a:xfrm>
+          <a:prstGeom prst="rect">
+            <a:avLst/>
+          </a:prstGeom>
+          <a:noFill/>
+        </p:spPr>
+        <p:txBody>
+          <a:bodyPr wrap="square" anchor="t" lIns="0" rIns="0" tIns="0" bIns="0"/>
+          <a:lstStyle/>
+          <a:p>
+            <a:pPr algn="l"/>
+            <a:r>
+              <a:rPr sz="1000" b="0" i="0">
+                <a:solidFill>
+                  <a:srgbClr val="54595D"/>
+                </a:solidFill>
+                <a:latin typeface="Calibri"/>
+              </a:rPr>
+              <a:t>Design and Development for Engineering and Manufacturing T Level  ·  Engineering Past, Present and Future</a:t>
+            </a:r>
+          </a:p>
+        </p:txBody>
+      </p:sp>
+      <p:sp>
+        <p:nvSpPr>
+          <p:cNvPr id="5" name="TextBox 4"/>
+          <p:cNvSpPr txBox="1"/>
+          <p:nvPr/>
+        </p:nvSpPr>
+        <p:spPr>
+          <a:xfrm>
+            <a:off x="10728655" y="6446520"/>
+            <a:ext cx="914400" cy="274320"/>
+          </a:xfrm>
+          <a:prstGeom prst="rect">
+            <a:avLst/>
+          </a:prstGeom>
+          <a:noFill/>
+        </p:spPr>
+        <p:txBody>
+          <a:bodyPr wrap="square" anchor="t" lIns="0" rIns="0" tIns="0" bIns="0"/>
+          <a:lstStyle/>
+          <a:p>
+            <a:pPr algn="r"/>
+            <a:r>
+              <a:rPr sz="1000" b="0" i="0">
+                <a:solidFill>
+                  <a:srgbClr val="54595D"/>
+                </a:solidFill>
+                <a:latin typeface="Calibri"/>
+              </a:rPr>
+              <a:t>11</a:t>
+            </a:r>
+          </a:p>
+        </p:txBody>
+      </p:sp>
+      <p:sp>
+        <p:nvSpPr>
+          <p:cNvPr id="6" name="Oval 5"/>
+          <p:cNvSpPr/>
+          <p:nvPr/>
+        </p:nvSpPr>
+        <p:spPr>
+          <a:xfrm>
+            <a:off x="548640" y="1618488"/>
+            <a:ext cx="411480" cy="411480"/>
+          </a:xfrm>
+          <a:prstGeom prst="ellipse">
+            <a:avLst/>
+          </a:prstGeom>
+          <a:solidFill>
+            <a:srgbClr val="F2B705"/>
+          </a:solidFill>
+          <a:ln>
+            <a:noFill/>
+          </a:ln>
+          <a:effectLst/>
+        </p:spPr>
+        <p:style>
+          <a:lnRef idx="1">
+            <a:schemeClr val="accent1"/>
+          </a:lnRef>
+          <a:fillRef idx="3">
+            <a:schemeClr val="accent1"/>
+          </a:fillRef>
+          <a:effectRef idx="2">
+            <a:schemeClr val="accent1"/>
+          </a:effectRef>
+          <a:fontRef idx="minor">
+            <a:schemeClr val="lt1"/>
+          </a:fontRef>
+        </p:style>
+        <p:txBody>
+          <a:bodyPr rtlCol="0" anchor="ctr" lIns="0" rIns="0" tIns="0" bIns="0"/>
+          <a:lstStyle/>
+          <a:p>
+            <a:pPr algn="ctr"/>
+            <a:r>
+              <a:rPr sz="1400" b="1">
+                <a:solidFill>
+                  <a:srgbClr val="202122"/>
+                </a:solidFill>
+                <a:latin typeface="Calibri"/>
+              </a:rPr>
+              <a:t>1</a:t>
+            </a:r>
+          </a:p>
+        </p:txBody>
+      </p:sp>
+      <p:sp>
+        <p:nvSpPr>
+          <p:cNvPr id="7" name="TextBox 6"/>
+          <p:cNvSpPr txBox="1"/>
+          <p:nvPr/>
+        </p:nvSpPr>
+        <p:spPr>
+          <a:xfrm>
+            <a:off x="1234440" y="1600200"/>
+            <a:ext cx="10408615" cy="1030986"/>
+          </a:xfrm>
+          <a:prstGeom prst="rect">
+            <a:avLst/>
+          </a:prstGeom>
+          <a:noFill/>
+        </p:spPr>
+        <p:txBody>
+          <a:bodyPr wrap="square" anchor="t" lIns="0" rIns="0" tIns="0" bIns="0"/>
+          <a:lstStyle/>
+          <a:p>
+            <a:pPr algn="l"/>
+            <a:r>
+              <a:rPr sz="1800" b="0" i="0">
+                <a:solidFill>
+                  <a:srgbClr val="54595D"/>
+                </a:solidFill>
+                <a:latin typeface="Calibri"/>
+              </a:rPr>
+              <a:t>Name three engineering sectors.</a:t>
+            </a:r>
+          </a:p>
+          <a:p>
+            <a:r>
+              <a:rPr sz="1800" b="1">
+                <a:solidFill>
+                  <a:srgbClr val="03306E"/>
+                </a:solidFill>
+                <a:latin typeface="Calibri"/>
+              </a:rPr>
+              <a:t>Any three, e.g. aerospace, automotive, marine.</a:t>
+            </a:r>
+          </a:p>
+        </p:txBody>
+      </p:sp>
+      <p:sp>
+        <p:nvSpPr>
+          <p:cNvPr id="8" name="Oval 7"/>
+          <p:cNvSpPr/>
+          <p:nvPr/>
+        </p:nvSpPr>
+        <p:spPr>
+          <a:xfrm>
+            <a:off x="548640" y="2814066"/>
+            <a:ext cx="411480" cy="411480"/>
+          </a:xfrm>
+          <a:prstGeom prst="ellipse">
+            <a:avLst/>
+          </a:prstGeom>
+          <a:solidFill>
+            <a:srgbClr val="F2B705"/>
+          </a:solidFill>
+          <a:ln>
+            <a:noFill/>
+          </a:ln>
+          <a:effectLst/>
+        </p:spPr>
+        <p:style>
+          <a:lnRef idx="1">
+            <a:schemeClr val="accent1"/>
+          </a:lnRef>
+          <a:fillRef idx="3">
+            <a:schemeClr val="accent1"/>
+          </a:fillRef>
+          <a:effectRef idx="2">
+            <a:schemeClr val="accent1"/>
+          </a:effectRef>
+          <a:fontRef idx="minor">
+            <a:schemeClr val="lt1"/>
+          </a:fontRef>
+        </p:style>
+        <p:txBody>
+          <a:bodyPr rtlCol="0" anchor="ctr" lIns="0" rIns="0" tIns="0" bIns="0"/>
+          <a:lstStyle/>
+          <a:p>
+            <a:pPr algn="ctr"/>
+            <a:r>
+              <a:rPr sz="1400" b="1">
+                <a:solidFill>
+                  <a:srgbClr val="202122"/>
+                </a:solidFill>
+                <a:latin typeface="Calibri"/>
+              </a:rPr>
+              <a:t>2</a:t>
+            </a:r>
+          </a:p>
+        </p:txBody>
+      </p:sp>
+      <p:sp>
+        <p:nvSpPr>
+          <p:cNvPr id="9" name="TextBox 8"/>
+          <p:cNvSpPr txBox="1"/>
+          <p:nvPr/>
+        </p:nvSpPr>
+        <p:spPr>
+          <a:xfrm>
+            <a:off x="1234440" y="2795778"/>
+            <a:ext cx="10408615" cy="1030986"/>
+          </a:xfrm>
+          <a:prstGeom prst="rect">
+            <a:avLst/>
+          </a:prstGeom>
+          <a:noFill/>
+        </p:spPr>
+        <p:txBody>
+          <a:bodyPr wrap="square" anchor="t" lIns="0" rIns="0" tIns="0" bIns="0"/>
+          <a:lstStyle/>
+          <a:p>
+            <a:pPr algn="l"/>
+            <a:r>
+              <a:rPr sz="1800" b="0" i="0">
+                <a:solidFill>
+                  <a:srgbClr val="54595D"/>
+                </a:solidFill>
+                <a:latin typeface="Calibri"/>
+              </a:rPr>
+              <a:t>How did replaceable parts change manufacturing?</a:t>
+            </a:r>
+          </a:p>
+          <a:p>
+            <a:r>
+              <a:rPr sz="1800" b="1">
+                <a:solidFill>
+                  <a:srgbClr val="03306E"/>
+                </a:solidFill>
+                <a:latin typeface="Calibri"/>
+              </a:rPr>
+              <a:t>They enabled mass production and easy repair.</a:t>
+            </a:r>
+          </a:p>
+        </p:txBody>
+      </p:sp>
+      <p:sp>
+        <p:nvSpPr>
+          <p:cNvPr id="10" name="Oval 9"/>
+          <p:cNvSpPr/>
+          <p:nvPr/>
+        </p:nvSpPr>
+        <p:spPr>
+          <a:xfrm>
+            <a:off x="548640" y="4009644"/>
+            <a:ext cx="411480" cy="411480"/>
+          </a:xfrm>
+          <a:prstGeom prst="ellipse">
+            <a:avLst/>
+          </a:prstGeom>
+          <a:solidFill>
+            <a:srgbClr val="F2B705"/>
+          </a:solidFill>
+          <a:ln>
+            <a:noFill/>
+          </a:ln>
+          <a:effectLst/>
+        </p:spPr>
+        <p:style>
+          <a:lnRef idx="1">
+            <a:schemeClr val="accent1"/>
+          </a:lnRef>
+          <a:fillRef idx="3">
+            <a:schemeClr val="accent1"/>
+          </a:fillRef>
+          <a:effectRef idx="2">
+            <a:schemeClr val="accent1"/>
+          </a:effectRef>
+          <a:fontRef idx="minor">
+            <a:schemeClr val="lt1"/>
+          </a:fontRef>
+        </p:style>
+        <p:txBody>
+          <a:bodyPr rtlCol="0" anchor="ctr" lIns="0" rIns="0" tIns="0" bIns="0"/>
+          <a:lstStyle/>
+          <a:p>
+            <a:pPr algn="ctr"/>
+            <a:r>
+              <a:rPr sz="1400" b="1">
+                <a:solidFill>
+                  <a:srgbClr val="202122"/>
+                </a:solidFill>
+                <a:latin typeface="Calibri"/>
+              </a:rPr>
+              <a:t>3</a:t>
+            </a:r>
+          </a:p>
+        </p:txBody>
+      </p:sp>
+      <p:sp>
+        <p:nvSpPr>
+          <p:cNvPr id="11" name="TextBox 10"/>
+          <p:cNvSpPr txBox="1"/>
+          <p:nvPr/>
+        </p:nvSpPr>
+        <p:spPr>
+          <a:xfrm>
+            <a:off x="1234440" y="3991356"/>
+            <a:ext cx="10408615" cy="1030986"/>
+          </a:xfrm>
+          <a:prstGeom prst="rect">
+            <a:avLst/>
+          </a:prstGeom>
+          <a:noFill/>
+        </p:spPr>
+        <p:txBody>
+          <a:bodyPr wrap="square" anchor="t" lIns="0" rIns="0" tIns="0" bIns="0"/>
+          <a:lstStyle/>
+          <a:p>
+            <a:pPr algn="l"/>
+            <a:r>
+              <a:rPr sz="1800" b="0" i="0">
+                <a:solidFill>
+                  <a:srgbClr val="54595D"/>
+                </a:solidFill>
+                <a:latin typeface="Calibri"/>
+              </a:rPr>
+              <a:t>What is a cyber-physical system?</a:t>
+            </a:r>
+          </a:p>
+          <a:p>
+            <a:r>
+              <a:rPr sz="1800" b="1">
+                <a:solidFill>
+                  <a:srgbClr val="03306E"/>
+                </a:solidFill>
+                <a:latin typeface="Calibri"/>
+              </a:rPr>
+              <a:t>Physical machinery tightly controlled by software and networks.</a:t>
+            </a:r>
+          </a:p>
+        </p:txBody>
+      </p:sp>
+      <p:sp>
+        <p:nvSpPr>
+          <p:cNvPr id="12" name="Oval 11"/>
+          <p:cNvSpPr/>
+          <p:nvPr/>
+        </p:nvSpPr>
+        <p:spPr>
+          <a:xfrm>
+            <a:off x="548640" y="5205221"/>
+            <a:ext cx="411480" cy="411480"/>
+          </a:xfrm>
+          <a:prstGeom prst="ellipse">
+            <a:avLst/>
+          </a:prstGeom>
+          <a:solidFill>
+            <a:srgbClr val="F2B705"/>
+          </a:solidFill>
+          <a:ln>
+            <a:noFill/>
+          </a:ln>
+          <a:effectLst/>
+        </p:spPr>
+        <p:style>
+          <a:lnRef idx="1">
+            <a:schemeClr val="accent1"/>
+          </a:lnRef>
+          <a:fillRef idx="3">
+            <a:schemeClr val="accent1"/>
+          </a:fillRef>
+          <a:effectRef idx="2">
+            <a:schemeClr val="accent1"/>
+          </a:effectRef>
+          <a:fontRef idx="minor">
+            <a:schemeClr val="lt1"/>
+          </a:fontRef>
+        </p:style>
+        <p:txBody>
+          <a:bodyPr rtlCol="0" anchor="ctr" lIns="0" rIns="0" tIns="0" bIns="0"/>
+          <a:lstStyle/>
+          <a:p>
+            <a:pPr algn="ctr"/>
+            <a:r>
+              <a:rPr sz="1400" b="1">
+                <a:solidFill>
+                  <a:srgbClr val="202122"/>
+                </a:solidFill>
+                <a:latin typeface="Calibri"/>
+              </a:rPr>
+              <a:t>4</a:t>
+            </a:r>
+          </a:p>
+        </p:txBody>
+      </p:sp>
+      <p:sp>
+        <p:nvSpPr>
+          <p:cNvPr id="13" name="TextBox 12"/>
+          <p:cNvSpPr txBox="1"/>
+          <p:nvPr/>
+        </p:nvSpPr>
+        <p:spPr>
+          <a:xfrm>
+            <a:off x="1234440" y="5186933"/>
+            <a:ext cx="10408615" cy="1030986"/>
+          </a:xfrm>
+          <a:prstGeom prst="rect">
+            <a:avLst/>
+          </a:prstGeom>
+          <a:noFill/>
+        </p:spPr>
+        <p:txBody>
+          <a:bodyPr wrap="square" anchor="t" lIns="0" rIns="0" tIns="0" bIns="0"/>
+          <a:lstStyle/>
+          <a:p>
+            <a:pPr algn="l"/>
+            <a:r>
+              <a:rPr sz="1800" b="0" i="0">
+                <a:solidFill>
+                  <a:srgbClr val="54595D"/>
+                </a:solidFill>
+                <a:latin typeface="Calibri"/>
+              </a:rPr>
+              <a:t>What is the circular economy?</a:t>
+            </a:r>
+          </a:p>
+          <a:p>
+            <a:r>
+              <a:rPr sz="1800" b="1">
+                <a:solidFill>
+                  <a:srgbClr val="03306E"/>
+                </a:solidFill>
+                <a:latin typeface="Calibri"/>
+              </a:rPr>
+              <a:t>Keeping materials in use through reuse, repair and recycling.</a:t>
+            </a:r>
+          </a:p>
+        </p:txBody>
+      </p:sp>
+    </p:spTree>
+  </p:cSld>
+  <p:clrMapOvr>
+    <a:masterClrMapping/>
+  </p:clrMapOvr>
+</p:sld>
+</file>
+
+<file path=ppt/slides/slide12.xml><?xml version="1.0" encoding="utf-8"?>
+<p:sld xmlns:a="http://schemas.openxmlformats.org/drawingml/2006/main" xmlns:p="http://schemas.openxmlformats.org/presentationml/2006/main" xmlns:r="http://schemas.openxmlformats.org/officeDocument/2006/relationships">
+  <p:cSld>
+    <p:bg>
+      <p:bgPr>
+        <a:solidFill>
+          <a:srgbClr val="FFFFFF"/>
+        </a:solidFill>
+        <a:effectLst/>
+      </p:bgPr>
+    </p:bg>
+    <p:spTree>
+      <p:nvGrpSpPr>
+        <p:cNvPr id="1" name=""/>
+        <p:cNvGrpSpPr/>
+        <p:nvPr/>
+      </p:nvGrpSpPr>
+      <p:grpSpPr/>
+      <p:sp>
+        <p:nvSpPr>
+          <p:cNvPr id="2" name="TextBox 1"/>
+          <p:cNvSpPr txBox="1"/>
+          <p:nvPr/>
+        </p:nvSpPr>
+        <p:spPr>
+          <a:xfrm>
+            <a:off x="548640" y="320040"/>
+            <a:ext cx="11094415" cy="274320"/>
+          </a:xfrm>
+          <a:prstGeom prst="rect">
+            <a:avLst/>
+          </a:prstGeom>
+          <a:noFill/>
+        </p:spPr>
+        <p:txBody>
+          <a:bodyPr wrap="square" anchor="t" lIns="0" rIns="0" tIns="0" bIns="0"/>
+          <a:lstStyle/>
+          <a:p>
+            <a:pPr algn="l"/>
+            <a:r>
+              <a:rPr sz="1100" b="1" i="0">
+                <a:solidFill>
+                  <a:srgbClr val="54595D"/>
+                </a:solidFill>
+                <a:latin typeface="Calibri"/>
+              </a:rPr>
+              <a:t>ENGINEERING CORE  ·  Core topic 2</a:t>
+            </a:r>
+          </a:p>
+        </p:txBody>
+      </p:sp>
+      <p:sp>
+        <p:nvSpPr>
+          <p:cNvPr id="3" name="TextBox 2"/>
+          <p:cNvSpPr txBox="1"/>
+          <p:nvPr/>
+        </p:nvSpPr>
+        <p:spPr>
+          <a:xfrm>
+            <a:off x="548640" y="566928"/>
+            <a:ext cx="11094415" cy="822960"/>
+          </a:xfrm>
+          <a:prstGeom prst="rect">
+            <a:avLst/>
+          </a:prstGeom>
+          <a:noFill/>
+        </p:spPr>
+        <p:txBody>
+          <a:bodyPr wrap="square" anchor="ctr" lIns="0" rIns="0" tIns="0" bIns="0"/>
+          <a:lstStyle/>
+          <a:p>
+            <a:pPr algn="l"/>
+            <a:r>
+              <a:rPr sz="3200" b="1" i="0">
+                <a:solidFill>
+                  <a:srgbClr val="03306E"/>
+                </a:solidFill>
+                <a:latin typeface="Cambria"/>
+              </a:rPr>
+              <a:t>Activity: Timeline and forecast</a:t>
+            </a:r>
+          </a:p>
+        </p:txBody>
+      </p:sp>
+      <p:sp>
+        <p:nvSpPr>
+          <p:cNvPr id="4" name="TextBox 3"/>
+          <p:cNvSpPr txBox="1"/>
+          <p:nvPr/>
+        </p:nvSpPr>
+        <p:spPr>
+          <a:xfrm>
+            <a:off x="548640" y="6446520"/>
+            <a:ext cx="8229600" cy="274320"/>
+          </a:xfrm>
+          <a:prstGeom prst="rect">
+            <a:avLst/>
+          </a:prstGeom>
+          <a:noFill/>
+        </p:spPr>
+        <p:txBody>
+          <a:bodyPr wrap="square" anchor="t" lIns="0" rIns="0" tIns="0" bIns="0"/>
+          <a:lstStyle/>
+          <a:p>
+            <a:pPr algn="l"/>
+            <a:r>
+              <a:rPr sz="1000" b="0" i="0">
+                <a:solidFill>
+                  <a:srgbClr val="54595D"/>
+                </a:solidFill>
+                <a:latin typeface="Calibri"/>
+              </a:rPr>
+              <a:t>Design and Development for Engineering and Manufacturing T Level  ·  Engineering Past, Present and Future</a:t>
+            </a:r>
+          </a:p>
+        </p:txBody>
+      </p:sp>
+      <p:sp>
+        <p:nvSpPr>
+          <p:cNvPr id="5" name="TextBox 4"/>
+          <p:cNvSpPr txBox="1"/>
+          <p:nvPr/>
+        </p:nvSpPr>
+        <p:spPr>
+          <a:xfrm>
+            <a:off x="10728655" y="6446520"/>
+            <a:ext cx="914400" cy="274320"/>
+          </a:xfrm>
+          <a:prstGeom prst="rect">
+            <a:avLst/>
+          </a:prstGeom>
+          <a:noFill/>
+        </p:spPr>
+        <p:txBody>
+          <a:bodyPr wrap="square" anchor="t" lIns="0" rIns="0" tIns="0" bIns="0"/>
+          <a:lstStyle/>
+          <a:p>
+            <a:pPr algn="r"/>
+            <a:r>
+              <a:rPr sz="1000" b="0" i="0">
+                <a:solidFill>
+                  <a:srgbClr val="54595D"/>
+                </a:solidFill>
+                <a:latin typeface="Calibri"/>
+              </a:rPr>
+              <a:t>12</a:t>
+            </a:r>
+          </a:p>
+        </p:txBody>
+      </p:sp>
+      <p:sp>
+        <p:nvSpPr>
+          <p:cNvPr id="6" name="Rounded Rectangle 5"/>
+          <p:cNvSpPr/>
+          <p:nvPr/>
+        </p:nvSpPr>
+        <p:spPr>
+          <a:xfrm>
+            <a:off x="548640" y="1508760"/>
+            <a:ext cx="2011680" cy="457200"/>
+          </a:xfrm>
+          <a:prstGeom prst="roundRect">
+            <a:avLst>
+              <a:gd name="adj" fmla="val 50000"/>
+            </a:avLst>
+          </a:prstGeom>
+          <a:solidFill>
+            <a:srgbClr val="F2B705"/>
+          </a:solidFill>
+          <a:ln>
+            <a:noFill/>
+          </a:ln>
+          <a:effectLst/>
+        </p:spPr>
+        <p:style>
+          <a:lnRef idx="1">
+            <a:schemeClr val="accent1"/>
+          </a:lnRef>
+          <a:fillRef idx="3">
+            <a:schemeClr val="accent1"/>
+          </a:fillRef>
+          <a:effectRef idx="2">
+            <a:schemeClr val="accent1"/>
+          </a:effectRef>
+          <a:fontRef idx="minor">
+            <a:schemeClr val="lt1"/>
+          </a:fontRef>
+        </p:style>
+        <p:txBody>
+          <a:bodyPr rtlCol="0" anchor="ctr"/>
+          <a:lstStyle/>
+          <a:p/>
+        </p:txBody>
+      </p:sp>
+      <p:sp>
+        <p:nvSpPr>
+          <p:cNvPr id="7" name="TextBox 6"/>
+          <p:cNvSpPr txBox="1"/>
+          <p:nvPr/>
+        </p:nvSpPr>
+        <p:spPr>
+          <a:xfrm>
+            <a:off x="548640" y="1508760"/>
+            <a:ext cx="2011680" cy="457200"/>
+          </a:xfrm>
+          <a:prstGeom prst="rect">
+            <a:avLst/>
+          </a:prstGeom>
+          <a:noFill/>
+        </p:spPr>
+        <p:txBody>
+          <a:bodyPr wrap="square" anchor="ctr" lIns="0" rIns="0" tIns="0" bIns="0"/>
+          <a:lstStyle/>
+          <a:p>
+            <a:pPr algn="ctr"/>
+            <a:r>
+              <a:rPr sz="1400" b="1" i="0">
+                <a:solidFill>
+                  <a:srgbClr val="202122"/>
+                </a:solidFill>
+                <a:latin typeface="Calibri"/>
+              </a:rPr>
+              <a:t>25 minutes</a:t>
+            </a:r>
+          </a:p>
+        </p:txBody>
+      </p:sp>
+      <p:sp>
+        <p:nvSpPr>
+          <p:cNvPr id="8" name="TextBox 7"/>
+          <p:cNvSpPr txBox="1"/>
+          <p:nvPr/>
+        </p:nvSpPr>
+        <p:spPr>
+          <a:xfrm>
+            <a:off x="2743200" y="1508760"/>
+            <a:ext cx="4754880" cy="457200"/>
+          </a:xfrm>
+          <a:prstGeom prst="rect">
+            <a:avLst/>
+          </a:prstGeom>
+          <a:noFill/>
+        </p:spPr>
+        <p:txBody>
+          <a:bodyPr wrap="square" anchor="ctr" lIns="0" rIns="0" tIns="0" bIns="0"/>
+          <a:lstStyle/>
+          <a:p>
+            <a:pPr algn="l"/>
+            <a:r>
+              <a:rPr sz="1400" b="0" i="1">
+                <a:solidFill>
+                  <a:srgbClr val="54595D"/>
+                </a:solidFill>
+                <a:latin typeface="Calibri"/>
+              </a:rPr>
+              <a:t>Small groups</a:t>
+            </a:r>
+          </a:p>
+        </p:txBody>
+      </p:sp>
+      <p:sp>
+        <p:nvSpPr>
+          <p:cNvPr id="9" name="Oval 8"/>
+          <p:cNvSpPr/>
+          <p:nvPr/>
+        </p:nvSpPr>
+        <p:spPr>
+          <a:xfrm>
+            <a:off x="548640" y="2482596"/>
+            <a:ext cx="384048" cy="384048"/>
+          </a:xfrm>
+          <a:prstGeom prst="ellipse">
+            <a:avLst/>
+          </a:prstGeom>
+          <a:solidFill>
+            <a:srgbClr val="0645AD"/>
+          </a:solidFill>
+          <a:ln>
+            <a:noFill/>
+          </a:ln>
+          <a:effectLst/>
+        </p:spPr>
+        <p:style>
+          <a:lnRef idx="1">
+            <a:schemeClr val="accent1"/>
+          </a:lnRef>
+          <a:fillRef idx="3">
+            <a:schemeClr val="accent1"/>
+          </a:fillRef>
+          <a:effectRef idx="2">
+            <a:schemeClr val="accent1"/>
+          </a:effectRef>
+          <a:fontRef idx="minor">
+            <a:schemeClr val="lt1"/>
+          </a:fontRef>
+        </p:style>
+        <p:txBody>
+          <a:bodyPr rtlCol="0" anchor="ctr" lIns="0" rIns="0" tIns="0" bIns="0"/>
+          <a:lstStyle/>
+          <a:p>
+            <a:pPr algn="ctr"/>
+            <a:r>
+              <a:rPr sz="1300" b="1">
+                <a:solidFill>
+                  <a:srgbClr val="FFFFFF"/>
+                </a:solidFill>
+                <a:latin typeface="Calibri"/>
+              </a:rPr>
+              <a:t>1</a:t>
+            </a:r>
+          </a:p>
+        </p:txBody>
+      </p:sp>
+      <p:sp>
+        <p:nvSpPr>
+          <p:cNvPr id="10" name="TextBox 9"/>
+          <p:cNvSpPr txBox="1"/>
+          <p:nvPr/>
+        </p:nvSpPr>
+        <p:spPr>
+          <a:xfrm>
+            <a:off x="1143000" y="2240280"/>
+            <a:ext cx="5943600" cy="868680"/>
+          </a:xfrm>
+          <a:prstGeom prst="rect">
+            <a:avLst/>
+          </a:prstGeom>
+          <a:noFill/>
+        </p:spPr>
+        <p:txBody>
+          <a:bodyPr wrap="square" anchor="ctr" lIns="0" rIns="0" tIns="0" bIns="0"/>
+          <a:lstStyle/>
+          <a:p>
+            <a:pPr algn="l"/>
+            <a:r>
+              <a:rPr sz="1700" b="0" i="0">
+                <a:solidFill>
+                  <a:srgbClr val="202122"/>
+                </a:solidFill>
+                <a:latin typeface="Calibri"/>
+              </a:rPr>
+              <a:t>Pick one sector.</a:t>
+            </a:r>
+          </a:p>
+        </p:txBody>
+      </p:sp>
+      <p:sp>
+        <p:nvSpPr>
+          <p:cNvPr id="11" name="Oval 10"/>
+          <p:cNvSpPr/>
+          <p:nvPr/>
+        </p:nvSpPr>
+        <p:spPr>
+          <a:xfrm>
+            <a:off x="548640" y="3461004"/>
+            <a:ext cx="384048" cy="384048"/>
+          </a:xfrm>
+          <a:prstGeom prst="ellipse">
+            <a:avLst/>
+          </a:prstGeom>
+          <a:solidFill>
+            <a:srgbClr val="0645AD"/>
+          </a:solidFill>
+          <a:ln>
+            <a:noFill/>
+          </a:ln>
+          <a:effectLst/>
+        </p:spPr>
+        <p:style>
+          <a:lnRef idx="1">
+            <a:schemeClr val="accent1"/>
+          </a:lnRef>
+          <a:fillRef idx="3">
+            <a:schemeClr val="accent1"/>
+          </a:fillRef>
+          <a:effectRef idx="2">
+            <a:schemeClr val="accent1"/>
+          </a:effectRef>
+          <a:fontRef idx="minor">
+            <a:schemeClr val="lt1"/>
+          </a:fontRef>
+        </p:style>
+        <p:txBody>
+          <a:bodyPr rtlCol="0" anchor="ctr" lIns="0" rIns="0" tIns="0" bIns="0"/>
+          <a:lstStyle/>
+          <a:p>
+            <a:pPr algn="ctr"/>
+            <a:r>
+              <a:rPr sz="1300" b="1">
+                <a:solidFill>
+                  <a:srgbClr val="FFFFFF"/>
+                </a:solidFill>
+                <a:latin typeface="Calibri"/>
+              </a:rPr>
+              <a:t>2</a:t>
+            </a:r>
+          </a:p>
+        </p:txBody>
+      </p:sp>
+      <p:sp>
+        <p:nvSpPr>
+          <p:cNvPr id="12" name="TextBox 11"/>
+          <p:cNvSpPr txBox="1"/>
+          <p:nvPr/>
+        </p:nvSpPr>
+        <p:spPr>
+          <a:xfrm>
+            <a:off x="1143000" y="3218688"/>
+            <a:ext cx="5943600" cy="868680"/>
+          </a:xfrm>
+          <a:prstGeom prst="rect">
+            <a:avLst/>
+          </a:prstGeom>
+          <a:noFill/>
+        </p:spPr>
+        <p:txBody>
+          <a:bodyPr wrap="square" anchor="ctr" lIns="0" rIns="0" tIns="0" bIns="0"/>
+          <a:lstStyle/>
+          <a:p>
+            <a:pPr algn="l"/>
+            <a:r>
+              <a:rPr sz="1700" b="0" i="0">
+                <a:solidFill>
+                  <a:srgbClr val="202122"/>
+                </a:solidFill>
+                <a:latin typeface="Calibri"/>
+              </a:rPr>
+              <a:t>Build a timeline of four key advances in that sector.</a:t>
+            </a:r>
+          </a:p>
+        </p:txBody>
+      </p:sp>
+      <p:sp>
+        <p:nvSpPr>
+          <p:cNvPr id="13" name="Oval 12"/>
+          <p:cNvSpPr/>
+          <p:nvPr/>
+        </p:nvSpPr>
+        <p:spPr>
+          <a:xfrm>
+            <a:off x="548640" y="4439412"/>
+            <a:ext cx="384048" cy="384048"/>
+          </a:xfrm>
+          <a:prstGeom prst="ellipse">
+            <a:avLst/>
+          </a:prstGeom>
+          <a:solidFill>
+            <a:srgbClr val="0645AD"/>
+          </a:solidFill>
+          <a:ln>
+            <a:noFill/>
+          </a:ln>
+          <a:effectLst/>
+        </p:spPr>
+        <p:style>
+          <a:lnRef idx="1">
+            <a:schemeClr val="accent1"/>
+          </a:lnRef>
+          <a:fillRef idx="3">
+            <a:schemeClr val="accent1"/>
+          </a:fillRef>
+          <a:effectRef idx="2">
+            <a:schemeClr val="accent1"/>
+          </a:effectRef>
+          <a:fontRef idx="minor">
+            <a:schemeClr val="lt1"/>
+          </a:fontRef>
+        </p:style>
+        <p:txBody>
+          <a:bodyPr rtlCol="0" anchor="ctr" lIns="0" rIns="0" tIns="0" bIns="0"/>
+          <a:lstStyle/>
+          <a:p>
+            <a:pPr algn="ctr"/>
+            <a:r>
+              <a:rPr sz="1300" b="1">
+                <a:solidFill>
+                  <a:srgbClr val="FFFFFF"/>
+                </a:solidFill>
+                <a:latin typeface="Calibri"/>
+              </a:rPr>
+              <a:t>3</a:t>
+            </a:r>
+          </a:p>
+        </p:txBody>
+      </p:sp>
+      <p:sp>
+        <p:nvSpPr>
+          <p:cNvPr id="14" name="TextBox 13"/>
+          <p:cNvSpPr txBox="1"/>
+          <p:nvPr/>
+        </p:nvSpPr>
+        <p:spPr>
+          <a:xfrm>
+            <a:off x="1143000" y="4197096"/>
+            <a:ext cx="5943600" cy="868680"/>
+          </a:xfrm>
+          <a:prstGeom prst="rect">
+            <a:avLst/>
+          </a:prstGeom>
+          <a:noFill/>
+        </p:spPr>
+        <p:txBody>
+          <a:bodyPr wrap="square" anchor="ctr" lIns="0" rIns="0" tIns="0" bIns="0"/>
+          <a:lstStyle/>
+          <a:p>
+            <a:pPr algn="l"/>
+            <a:r>
+              <a:rPr sz="1700" b="0" i="0">
+                <a:solidFill>
+                  <a:srgbClr val="202122"/>
+                </a:solidFill>
+                <a:latin typeface="Calibri"/>
+              </a:rPr>
+              <a:t>Predict how two emerging technologies will change it by 2040.</a:t>
+            </a:r>
+          </a:p>
+        </p:txBody>
+      </p:sp>
+      <p:sp>
+        <p:nvSpPr>
+          <p:cNvPr id="15" name="Oval 14"/>
+          <p:cNvSpPr/>
+          <p:nvPr/>
+        </p:nvSpPr>
+        <p:spPr>
+          <a:xfrm>
+            <a:off x="548640" y="5417820"/>
+            <a:ext cx="384048" cy="384048"/>
+          </a:xfrm>
+          <a:prstGeom prst="ellipse">
+            <a:avLst/>
+          </a:prstGeom>
+          <a:solidFill>
+            <a:srgbClr val="0645AD"/>
+          </a:solidFill>
+          <a:ln>
+            <a:noFill/>
+          </a:ln>
+          <a:effectLst/>
+        </p:spPr>
+        <p:style>
+          <a:lnRef idx="1">
+            <a:schemeClr val="accent1"/>
+          </a:lnRef>
+          <a:fillRef idx="3">
+            <a:schemeClr val="accent1"/>
+          </a:fillRef>
+          <a:effectRef idx="2">
+            <a:schemeClr val="accent1"/>
+          </a:effectRef>
+          <a:fontRef idx="minor">
+            <a:schemeClr val="lt1"/>
+          </a:fontRef>
+        </p:style>
+        <p:txBody>
+          <a:bodyPr rtlCol="0" anchor="ctr" lIns="0" rIns="0" tIns="0" bIns="0"/>
+          <a:lstStyle/>
+          <a:p>
+            <a:pPr algn="ctr"/>
+            <a:r>
+              <a:rPr sz="1300" b="1">
+                <a:solidFill>
+                  <a:srgbClr val="FFFFFF"/>
+                </a:solidFill>
+                <a:latin typeface="Calibri"/>
+              </a:rPr>
+              <a:t>4</a:t>
+            </a:r>
+          </a:p>
+        </p:txBody>
+      </p:sp>
+      <p:sp>
+        <p:nvSpPr>
+          <p:cNvPr id="16" name="TextBox 15"/>
+          <p:cNvSpPr txBox="1"/>
+          <p:nvPr/>
+        </p:nvSpPr>
+        <p:spPr>
+          <a:xfrm>
+            <a:off x="1143000" y="5175504"/>
+            <a:ext cx="5943600" cy="868680"/>
+          </a:xfrm>
+          <a:prstGeom prst="rect">
+            <a:avLst/>
+          </a:prstGeom>
+          <a:noFill/>
+        </p:spPr>
+        <p:txBody>
+          <a:bodyPr wrap="square" anchor="ctr" lIns="0" rIns="0" tIns="0" bIns="0"/>
+          <a:lstStyle/>
+          <a:p>
+            <a:pPr algn="l"/>
+            <a:r>
+              <a:rPr sz="1700" b="0" i="0">
+                <a:solidFill>
+                  <a:srgbClr val="202122"/>
+                </a:solidFill>
+                <a:latin typeface="Calibri"/>
+              </a:rPr>
+              <a:t>Present your forecast in two minutes.</a:t>
+            </a:r>
+          </a:p>
+        </p:txBody>
+      </p:sp>
+      <p:sp>
+        <p:nvSpPr>
+          <p:cNvPr id="17" name="Rounded Rectangle 16"/>
+          <p:cNvSpPr/>
+          <p:nvPr/>
+        </p:nvSpPr>
+        <p:spPr>
+          <a:xfrm>
+            <a:off x="7772400" y="1508760"/>
+            <a:ext cx="3867912" cy="4572000"/>
+          </a:xfrm>
+          <a:prstGeom prst="roundRect">
+            <a:avLst>
+              <a:gd name="adj" fmla="val 8000"/>
+            </a:avLst>
+          </a:prstGeom>
+          <a:solidFill>
+            <a:srgbClr val="EAF3FF"/>
+          </a:solidFill>
+          <a:ln>
+            <a:noFill/>
+          </a:ln>
+          <a:effectLst/>
+        </p:spPr>
+        <p:style>
+          <a:lnRef idx="1">
+            <a:schemeClr val="accent1"/>
+          </a:lnRef>
+          <a:fillRef idx="3">
+            <a:schemeClr val="accent1"/>
+          </a:fillRef>
+          <a:effectRef idx="2">
+            <a:schemeClr val="accent1"/>
+          </a:effectRef>
+          <a:fontRef idx="minor">
+            <a:schemeClr val="lt1"/>
+          </a:fontRef>
+        </p:style>
+        <p:txBody>
+          <a:bodyPr rtlCol="0" anchor="ctr"/>
+          <a:lstStyle/>
+          <a:p/>
+        </p:txBody>
+      </p:sp>
+      <p:sp>
+        <p:nvSpPr>
+          <p:cNvPr id="18" name="TextBox 17"/>
+          <p:cNvSpPr txBox="1"/>
+          <p:nvPr/>
+        </p:nvSpPr>
+        <p:spPr>
+          <a:xfrm>
+            <a:off x="8046720" y="1737360"/>
+            <a:ext cx="3291840" cy="365760"/>
+          </a:xfrm>
+          <a:prstGeom prst="rect">
+            <a:avLst/>
+          </a:prstGeom>
+          <a:noFill/>
+        </p:spPr>
+        <p:txBody>
+          <a:bodyPr wrap="square" anchor="t" lIns="0" rIns="0" tIns="0" bIns="0"/>
+          <a:lstStyle/>
+          <a:p>
+            <a:pPr algn="l"/>
+            <a:r>
+              <a:rPr sz="1300" b="1" i="0">
+                <a:solidFill>
+                  <a:srgbClr val="0645AD"/>
+                </a:solidFill>
+                <a:latin typeface="Calibri"/>
+              </a:rPr>
+              <a:t>SUCCESS CRITERIA</a:t>
+            </a:r>
+          </a:p>
+        </p:txBody>
+      </p:sp>
+      <p:sp>
+        <p:nvSpPr>
+          <p:cNvPr id="19" name="TextBox 18"/>
+          <p:cNvSpPr txBox="1"/>
+          <p:nvPr/>
+        </p:nvSpPr>
+        <p:spPr>
+          <a:xfrm>
+            <a:off x="8046720" y="2240280"/>
+            <a:ext cx="3337560" cy="3657600"/>
+          </a:xfrm>
+          <a:prstGeom prst="rect">
+            <a:avLst/>
+          </a:prstGeom>
+          <a:noFill/>
+        </p:spPr>
+        <p:txBody>
+          <a:bodyPr wrap="square" lIns="0" rIns="0" tIns="0" bIns="0">
+            <a:spAutoFit/>
+          </a:bodyPr>
+          <a:lstStyle/>
+          <a:p>
+            <a:pPr marL="274320" indent="-274320">
+              <a:spcAft>
+                <a:spcPts val="810"/>
+              </a:spcAft>
+              <a:buClr>
+                <a:srgbClr val="0645AD"/>
+              </a:buClr>
+              <a:buFont typeface="Arial"/>
+              <a:buChar char="•"/>
+            </a:pPr>
+            <a:r>
+              <a:rPr sz="1800" b="0">
+                <a:solidFill>
+                  <a:srgbClr val="202122"/>
+                </a:solidFill>
+                <a:latin typeface="Calibri"/>
+              </a:rPr>
+              <a:t>Advances in correct order</a:t>
+            </a:r>
+          </a:p>
+          <a:p>
+            <a:pPr marL="274320" indent="-274320">
+              <a:spcAft>
+                <a:spcPts val="810"/>
+              </a:spcAft>
+              <a:buClr>
+                <a:srgbClr val="0645AD"/>
+              </a:buClr>
+              <a:buFont typeface="Arial"/>
+              <a:buChar char="•"/>
+            </a:pPr>
+            <a:r>
+              <a:rPr sz="1800" b="0">
+                <a:solidFill>
+                  <a:srgbClr val="202122"/>
+                </a:solidFill>
+                <a:latin typeface="Calibri"/>
+              </a:rPr>
+              <a:t>Social and economic effects explained</a:t>
+            </a:r>
+          </a:p>
+          <a:p>
+            <a:pPr marL="274320" indent="-274320">
+              <a:spcAft>
+                <a:spcPts val="810"/>
+              </a:spcAft>
+              <a:buClr>
+                <a:srgbClr val="0645AD"/>
+              </a:buClr>
+              <a:buFont typeface="Arial"/>
+              <a:buChar char="•"/>
+            </a:pPr>
+            <a:r>
+              <a:rPr sz="1800" b="0">
+                <a:solidFill>
+                  <a:srgbClr val="202122"/>
+                </a:solidFill>
+                <a:latin typeface="Calibri"/>
+              </a:rPr>
+              <a:t>Forecast is reasoned</a:t>
+            </a:r>
+          </a:p>
+        </p:txBody>
+      </p:sp>
+    </p:spTree>
+  </p:cSld>
+  <p:clrMapOvr>
+    <a:masterClrMapping/>
+  </p:clrMapOvr>
+</p:sld>
+</file>
+
+<file path=ppt/slides/slide13.xml><?xml version="1.0" encoding="utf-8"?>
+<p:sld xmlns:a="http://schemas.openxmlformats.org/drawingml/2006/main" xmlns:p="http://schemas.openxmlformats.org/presentationml/2006/main" xmlns:r="http://schemas.openxmlformats.org/officeDocument/2006/relationships">
+  <p:cSld>
+    <p:bg>
+      <p:bgPr>
+        <a:solidFill>
+          <a:srgbClr val="03306E"/>
+        </a:solidFill>
+        <a:effectLst/>
+      </p:bgPr>
+    </p:bg>
+    <p:spTree>
+      <p:nvGrpSpPr>
+        <p:cNvPr id="1" name=""/>
+        <p:cNvGrpSpPr/>
+        <p:nvPr/>
+      </p:nvGrpSpPr>
+      <p:grpSpPr/>
+      <p:sp>
+        <p:nvSpPr>
+          <p:cNvPr id="2" name="TextBox 1"/>
+          <p:cNvSpPr txBox="1"/>
+          <p:nvPr/>
+        </p:nvSpPr>
+        <p:spPr>
+          <a:xfrm>
+            <a:off x="548640" y="320040"/>
+            <a:ext cx="11094415" cy="274320"/>
+          </a:xfrm>
+          <a:prstGeom prst="rect">
+            <a:avLst/>
+          </a:prstGeom>
+          <a:noFill/>
+        </p:spPr>
+        <p:txBody>
+          <a:bodyPr wrap="square" anchor="t" lIns="0" rIns="0" tIns="0" bIns="0"/>
+          <a:lstStyle/>
+          <a:p>
+            <a:pPr algn="l"/>
+            <a:r>
+              <a:rPr sz="1100" b="1" i="0">
+                <a:solidFill>
+                  <a:srgbClr val="A9C8F0"/>
+                </a:solidFill>
+                <a:latin typeface="Calibri"/>
+              </a:rPr>
+              <a:t>ENGINEERING CORE  ·  Core topic 2</a:t>
+            </a:r>
+          </a:p>
+        </p:txBody>
+      </p:sp>
+      <p:sp>
+        <p:nvSpPr>
+          <p:cNvPr id="3" name="TextBox 2"/>
+          <p:cNvSpPr txBox="1"/>
+          <p:nvPr/>
+        </p:nvSpPr>
+        <p:spPr>
+          <a:xfrm>
+            <a:off x="548640" y="566928"/>
+            <a:ext cx="11094415" cy="822960"/>
+          </a:xfrm>
+          <a:prstGeom prst="rect">
+            <a:avLst/>
+          </a:prstGeom>
+          <a:noFill/>
+        </p:spPr>
+        <p:txBody>
+          <a:bodyPr wrap="square" anchor="ctr" lIns="0" rIns="0" tIns="0" bIns="0"/>
+          <a:lstStyle/>
+          <a:p>
+            <a:pPr algn="l"/>
+            <a:r>
+              <a:rPr sz="3200" b="1" i="0">
+                <a:solidFill>
+                  <a:srgbClr val="FFFFFF"/>
+                </a:solidFill>
+                <a:latin typeface="Cambria"/>
+              </a:rPr>
+              <a:t>Exit ticket</a:t>
+            </a:r>
+          </a:p>
+        </p:txBody>
+      </p:sp>
+      <p:sp>
+        <p:nvSpPr>
+          <p:cNvPr id="4" name="Oval 3"/>
+          <p:cNvSpPr/>
+          <p:nvPr/>
+        </p:nvSpPr>
+        <p:spPr>
+          <a:xfrm>
+            <a:off x="548640" y="1737360"/>
+            <a:ext cx="502920" cy="502920"/>
+          </a:xfrm>
+          <a:prstGeom prst="ellipse">
+            <a:avLst/>
+          </a:prstGeom>
+          <a:solidFill>
+            <a:srgbClr val="F2B705"/>
+          </a:solidFill>
+          <a:ln>
+            <a:noFill/>
+          </a:ln>
+          <a:effectLst/>
+        </p:spPr>
+        <p:style>
+          <a:lnRef idx="1">
+            <a:schemeClr val="accent1"/>
+          </a:lnRef>
+          <a:fillRef idx="3">
+            <a:schemeClr val="accent1"/>
+          </a:fillRef>
+          <a:effectRef idx="2">
+            <a:schemeClr val="accent1"/>
+          </a:effectRef>
+          <a:fontRef idx="minor">
+            <a:schemeClr val="lt1"/>
+          </a:fontRef>
+        </p:style>
+        <p:txBody>
+          <a:bodyPr rtlCol="0" anchor="ctr" lIns="0" rIns="0" tIns="0" bIns="0"/>
+          <a:lstStyle/>
+          <a:p>
+            <a:pPr algn="ctr"/>
+            <a:r>
+              <a:rPr sz="1700" b="1">
+                <a:solidFill>
+                  <a:srgbClr val="202122"/>
+                </a:solidFill>
+                <a:latin typeface="Calibri"/>
+              </a:rPr>
+              <a:t>1</a:t>
+            </a:r>
+          </a:p>
+        </p:txBody>
+      </p:sp>
+      <p:sp>
+        <p:nvSpPr>
+          <p:cNvPr id="5" name="TextBox 4"/>
+          <p:cNvSpPr txBox="1"/>
+          <p:nvPr/>
+        </p:nvSpPr>
+        <p:spPr>
+          <a:xfrm>
+            <a:off x="1325880" y="1645920"/>
+            <a:ext cx="6583680" cy="822960"/>
+          </a:xfrm>
+          <a:prstGeom prst="rect">
+            <a:avLst/>
+          </a:prstGeom>
+          <a:noFill/>
+        </p:spPr>
+        <p:txBody>
+          <a:bodyPr wrap="square" anchor="ctr" lIns="0" rIns="0" tIns="0" bIns="0"/>
+          <a:lstStyle/>
+          <a:p>
+            <a:pPr algn="l"/>
+            <a:r>
+              <a:rPr sz="2000" b="0" i="0">
+                <a:solidFill>
+                  <a:srgbClr val="FFFFFF"/>
+                </a:solidFill>
+                <a:latin typeface="Calibri"/>
+              </a:rPr>
+              <a:t>Which sector would you most like to work in?</a:t>
+            </a:r>
+          </a:p>
+        </p:txBody>
+      </p:sp>
+      <p:sp>
+        <p:nvSpPr>
+          <p:cNvPr id="6" name="Oval 5"/>
+          <p:cNvSpPr/>
+          <p:nvPr/>
+        </p:nvSpPr>
+        <p:spPr>
+          <a:xfrm>
+            <a:off x="548640" y="2697480"/>
+            <a:ext cx="502920" cy="502920"/>
+          </a:xfrm>
+          <a:prstGeom prst="ellipse">
+            <a:avLst/>
+          </a:prstGeom>
+          <a:solidFill>
+            <a:srgbClr val="F2B705"/>
+          </a:solidFill>
+          <a:ln>
+            <a:noFill/>
+          </a:ln>
+          <a:effectLst/>
+        </p:spPr>
+        <p:style>
+          <a:lnRef idx="1">
+            <a:schemeClr val="accent1"/>
+          </a:lnRef>
+          <a:fillRef idx="3">
+            <a:schemeClr val="accent1"/>
+          </a:fillRef>
+          <a:effectRef idx="2">
+            <a:schemeClr val="accent1"/>
+          </a:effectRef>
+          <a:fontRef idx="minor">
+            <a:schemeClr val="lt1"/>
+          </a:fontRef>
+        </p:style>
+        <p:txBody>
+          <a:bodyPr rtlCol="0" anchor="ctr" lIns="0" rIns="0" tIns="0" bIns="0"/>
+          <a:lstStyle/>
+          <a:p>
+            <a:pPr algn="ctr"/>
+            <a:r>
+              <a:rPr sz="1700" b="1">
+                <a:solidFill>
+                  <a:srgbClr val="202122"/>
+                </a:solidFill>
+                <a:latin typeface="Calibri"/>
+              </a:rPr>
+              <a:t>2</a:t>
+            </a:r>
+          </a:p>
+        </p:txBody>
+      </p:sp>
+      <p:sp>
+        <p:nvSpPr>
+          <p:cNvPr id="7" name="TextBox 6"/>
+          <p:cNvSpPr txBox="1"/>
+          <p:nvPr/>
+        </p:nvSpPr>
+        <p:spPr>
+          <a:xfrm>
+            <a:off x="1325880" y="2606040"/>
+            <a:ext cx="6583680" cy="822960"/>
+          </a:xfrm>
+          <a:prstGeom prst="rect">
+            <a:avLst/>
+          </a:prstGeom>
+          <a:noFill/>
+        </p:spPr>
+        <p:txBody>
+          <a:bodyPr wrap="square" anchor="ctr" lIns="0" rIns="0" tIns="0" bIns="0"/>
+          <a:lstStyle/>
+          <a:p>
+            <a:pPr algn="l"/>
+            <a:r>
+              <a:rPr sz="2000" b="0" i="0">
+                <a:solidFill>
+                  <a:srgbClr val="FFFFFF"/>
+                </a:solidFill>
+                <a:latin typeface="Calibri"/>
+              </a:rPr>
+              <a:t>How did computers change manufacturing?</a:t>
+            </a:r>
+          </a:p>
+        </p:txBody>
+      </p:sp>
+      <p:sp>
+        <p:nvSpPr>
+          <p:cNvPr id="8" name="Oval 7"/>
+          <p:cNvSpPr/>
+          <p:nvPr/>
+        </p:nvSpPr>
+        <p:spPr>
+          <a:xfrm>
+            <a:off x="548640" y="3657600"/>
+            <a:ext cx="502920" cy="502920"/>
+          </a:xfrm>
+          <a:prstGeom prst="ellipse">
+            <a:avLst/>
+          </a:prstGeom>
+          <a:solidFill>
+            <a:srgbClr val="F2B705"/>
+          </a:solidFill>
+          <a:ln>
+            <a:noFill/>
+          </a:ln>
+          <a:effectLst/>
+        </p:spPr>
+        <p:style>
+          <a:lnRef idx="1">
+            <a:schemeClr val="accent1"/>
+          </a:lnRef>
+          <a:fillRef idx="3">
+            <a:schemeClr val="accent1"/>
+          </a:fillRef>
+          <a:effectRef idx="2">
+            <a:schemeClr val="accent1"/>
+          </a:effectRef>
+          <a:fontRef idx="minor">
+            <a:schemeClr val="lt1"/>
+          </a:fontRef>
+        </p:style>
+        <p:txBody>
+          <a:bodyPr rtlCol="0" anchor="ctr" lIns="0" rIns="0" tIns="0" bIns="0"/>
+          <a:lstStyle/>
+          <a:p>
+            <a:pPr algn="ctr"/>
+            <a:r>
+              <a:rPr sz="1700" b="1">
+                <a:solidFill>
+                  <a:srgbClr val="202122"/>
+                </a:solidFill>
+                <a:latin typeface="Calibri"/>
+              </a:rPr>
+              <a:t>3</a:t>
+            </a:r>
+          </a:p>
+        </p:txBody>
+      </p:sp>
+      <p:sp>
+        <p:nvSpPr>
+          <p:cNvPr id="9" name="TextBox 8"/>
+          <p:cNvSpPr txBox="1"/>
+          <p:nvPr/>
+        </p:nvSpPr>
+        <p:spPr>
+          <a:xfrm>
+            <a:off x="1325880" y="3566160"/>
+            <a:ext cx="6583680" cy="822960"/>
+          </a:xfrm>
+          <a:prstGeom prst="rect">
+            <a:avLst/>
+          </a:prstGeom>
+          <a:noFill/>
+        </p:spPr>
+        <p:txBody>
+          <a:bodyPr wrap="square" anchor="ctr" lIns="0" rIns="0" tIns="0" bIns="0"/>
+          <a:lstStyle/>
+          <a:p>
+            <a:pPr algn="l"/>
+            <a:r>
+              <a:rPr sz="2000" b="0" i="0">
+                <a:solidFill>
+                  <a:srgbClr val="FFFFFF"/>
+                </a:solidFill>
+                <a:latin typeface="Calibri"/>
+              </a:rPr>
+              <a:t>Which emerging trend will affect engineering jobs most?</a:t>
+            </a:r>
+          </a:p>
+        </p:txBody>
+      </p:sp>
+      <p:sp>
+        <p:nvSpPr>
+          <p:cNvPr id="10" name="Rounded Rectangle 9"/>
+          <p:cNvSpPr/>
+          <p:nvPr/>
+        </p:nvSpPr>
+        <p:spPr>
+          <a:xfrm>
+            <a:off x="8229600" y="1645920"/>
+            <a:ext cx="3410712" cy="2926080"/>
+          </a:xfrm>
+          <a:prstGeom prst="roundRect">
+            <a:avLst>
+              <a:gd name="adj" fmla="val 8000"/>
+            </a:avLst>
+          </a:prstGeom>
+          <a:solidFill>
+            <a:srgbClr val="0645AD"/>
+          </a:solidFill>
+          <a:ln>
+            <a:noFill/>
+          </a:ln>
+          <a:effectLst/>
+        </p:spPr>
+        <p:style>
+          <a:lnRef idx="1">
+            <a:schemeClr val="accent1"/>
+          </a:lnRef>
+          <a:fillRef idx="3">
+            <a:schemeClr val="accent1"/>
+          </a:fillRef>
+          <a:effectRef idx="2">
+            <a:schemeClr val="accent1"/>
+          </a:effectRef>
+          <a:fontRef idx="minor">
+            <a:schemeClr val="lt1"/>
+          </a:fontRef>
+        </p:style>
+        <p:txBody>
+          <a:bodyPr rtlCol="0" anchor="ctr"/>
+          <a:lstStyle/>
+          <a:p/>
+        </p:txBody>
+      </p:sp>
+      <p:sp>
+        <p:nvSpPr>
+          <p:cNvPr id="11" name="TextBox 10"/>
+          <p:cNvSpPr txBox="1"/>
+          <p:nvPr/>
+        </p:nvSpPr>
+        <p:spPr>
+          <a:xfrm>
+            <a:off x="8503920" y="1874519"/>
+            <a:ext cx="2926080" cy="365760"/>
+          </a:xfrm>
+          <a:prstGeom prst="rect">
+            <a:avLst/>
+          </a:prstGeom>
+          <a:noFill/>
+        </p:spPr>
+        <p:txBody>
+          <a:bodyPr wrap="square" anchor="t" lIns="0" rIns="0" tIns="0" bIns="0"/>
+          <a:lstStyle/>
+          <a:p>
+            <a:pPr algn="l"/>
+            <a:r>
+              <a:rPr sz="1300" b="1" i="0">
+                <a:solidFill>
+                  <a:srgbClr val="A9C8F0"/>
+                </a:solidFill>
+                <a:latin typeface="Calibri"/>
+              </a:rPr>
+              <a:t>REVISE THIS TOPIC</a:t>
+            </a:r>
+          </a:p>
+        </p:txBody>
+      </p:sp>
+      <p:sp>
+        <p:nvSpPr>
+          <p:cNvPr id="12" name="TextBox 11"/>
+          <p:cNvSpPr txBox="1"/>
+          <p:nvPr/>
+        </p:nvSpPr>
+        <p:spPr>
+          <a:xfrm>
+            <a:off x="8503920" y="2286000"/>
+            <a:ext cx="2926080" cy="548640"/>
+          </a:xfrm>
+          <a:prstGeom prst="rect">
+            <a:avLst/>
+          </a:prstGeom>
+          <a:noFill/>
+        </p:spPr>
+        <p:txBody>
+          <a:bodyPr wrap="square" anchor="t" lIns="0" rIns="0" tIns="0" bIns="0"/>
+          <a:lstStyle/>
+          <a:p>
+            <a:pPr algn="l"/>
+            <a:r>
+              <a:rPr sz="1400" b="0" i="0">
+                <a:solidFill>
+                  <a:srgbClr val="FFFFFF"/>
+                </a:solidFill>
+                <a:latin typeface="Calibri"/>
+              </a:rPr>
+              <a:t>Revision notes for this lesson are on the study wiki:</a:t>
+            </a:r>
+          </a:p>
+        </p:txBody>
+      </p:sp>
+      <p:sp>
+        <p:nvSpPr>
+          <p:cNvPr id="13" name="TextBox 12"/>
+          <p:cNvSpPr txBox="1"/>
+          <p:nvPr/>
+        </p:nvSpPr>
+        <p:spPr>
+          <a:xfrm>
+            <a:off x="8503920" y="2926080"/>
+            <a:ext cx="2926080" cy="1463040"/>
+          </a:xfrm>
+          <a:prstGeom prst="rect">
+            <a:avLst/>
+          </a:prstGeom>
+          <a:noFill/>
+        </p:spPr>
+        <p:txBody>
+          <a:bodyPr wrap="square" anchor="t" lIns="0" rIns="0" tIns="0" bIns="0"/>
+          <a:lstStyle/>
+          <a:p>
+            <a:pPr algn="l"/>
+            <a:r>
+              <a:rPr sz="2000" b="1" i="0">
+                <a:solidFill>
+                  <a:srgbClr val="FFFFFF"/>
+                </a:solidFill>
+                <a:latin typeface="Cambria"/>
+              </a:rPr>
+              <a:t>Engineering Core, Part 1</a:t>
+            </a:r>
+          </a:p>
+        </p:txBody>
+      </p:sp>
+      <p:sp>
+        <p:nvSpPr>
+          <p:cNvPr id="14" name="TextBox 13"/>
+          <p:cNvSpPr txBox="1"/>
+          <p:nvPr/>
+        </p:nvSpPr>
+        <p:spPr>
+          <a:xfrm>
+            <a:off x="548640" y="5669280"/>
+            <a:ext cx="11094415" cy="548640"/>
+          </a:xfrm>
+          <a:prstGeom prst="rect">
+            <a:avLst/>
+          </a:prstGeom>
+          <a:noFill/>
+        </p:spPr>
+        <p:txBody>
+          <a:bodyPr wrap="square" anchor="t" lIns="0" rIns="0" tIns="0" bIns="0"/>
+          <a:lstStyle/>
+          <a:p>
+            <a:pPr algn="l"/>
+            <a:r>
+              <a:rPr sz="1200" b="0" i="0">
+                <a:solidFill>
+                  <a:srgbClr val="A9C8F0"/>
+                </a:solidFill>
+                <a:latin typeface="Calibri"/>
+              </a:rPr>
+              <a:t>https://lana6478.github.io/T-level-Design-Development-Engineering-Manufacturing/#/01-core-component/01-engineering-core-part1.md</a:t>
+            </a:r>
+          </a:p>
+        </p:txBody>
+      </p:sp>
+    </p:spTree>
+  </p:cSld>
+  <p:clrMapOvr>
+    <a:masterClrMapping/>
+  </p:clrMapOvr>
+</p:sld>
+</file>
+
 <file path=ppt/slides/slide2.xml><?xml version="1.0" encoding="utf-8"?>
 <p:sld xmlns:a="http://schemas.openxmlformats.org/drawingml/2006/main" xmlns:p="http://schemas.openxmlformats.org/presentationml/2006/main" xmlns:r="http://schemas.openxmlformats.org/officeDocument/2006/relationships">
   <p:cSld>
@@ -5653,6 +8176,398 @@
                 <a:latin typeface="Calibri"/>
               </a:rPr>
               <a:t>4</a:t>
+            </a:r>
+          </a:p>
+        </p:txBody>
+      </p:sp>
+      <p:sp>
+        <p:nvSpPr>
+          <p:cNvPr id="6" name="TextBox 5"/>
+          <p:cNvSpPr txBox="1"/>
+          <p:nvPr/>
+        </p:nvSpPr>
+        <p:spPr>
+          <a:xfrm>
+            <a:off x="548640" y="1554480"/>
+            <a:ext cx="6720840" cy="4617720"/>
+          </a:xfrm>
+          <a:prstGeom prst="rect">
+            <a:avLst/>
+          </a:prstGeom>
+          <a:noFill/>
+        </p:spPr>
+        <p:txBody>
+          <a:bodyPr wrap="square" lIns="0" rIns="0" tIns="0" bIns="0">
+            <a:spAutoFit/>
+          </a:bodyPr>
+          <a:lstStyle/>
+          <a:p>
+            <a:pPr>
+              <a:spcAft>
+                <a:spcPts val="1260"/>
+              </a:spcAft>
+            </a:pPr>
+            <a:r>
+              <a:rPr sz="2100" b="0">
+                <a:solidFill>
+                  <a:srgbClr val="202122"/>
+                </a:solidFill>
+                <a:latin typeface="Calibri"/>
+              </a:rPr>
+              <a:t>Engineering has transformed how people live.</a:t>
+            </a:r>
+          </a:p>
+          <a:p>
+            <a:pPr>
+              <a:spcAft>
+                <a:spcPts val="1260"/>
+              </a:spcAft>
+            </a:pPr>
+            <a:r>
+              <a:rPr sz="2100" b="0">
+                <a:solidFill>
+                  <a:srgbClr val="202122"/>
+                </a:solidFill>
+                <a:latin typeface="Calibri"/>
+              </a:rPr>
+              <a:t>New materials, such as steel, made stronger structures possible. Electrical power and lighting transformed factories and homes. The internal combustion engine and electric motors made modern transport and machinery possible. Replaceable parts and mass production made goods cheap and repairable. Radio, television, computers and the internet changed communication and allowed automation.</a:t>
+            </a:r>
+          </a:p>
+          <a:p>
+            <a:pPr>
+              <a:spcAft>
+                <a:spcPts val="1260"/>
+              </a:spcAft>
+            </a:pPr>
+            <a:r>
+              <a:rPr sz="2100" b="0">
+                <a:solidFill>
+                  <a:srgbClr val="202122"/>
+                </a:solidFill>
+                <a:latin typeface="Calibri"/>
+              </a:rPr>
+              <a:t>These advances reshaped transport, healthcare, housing and employment, and now drive the push for sustainability.</a:t>
+            </a:r>
+          </a:p>
+        </p:txBody>
+      </p:sp>
+      <p:sp>
+        <p:nvSpPr>
+          <p:cNvPr id="7" name="Rounded Rectangle 6"/>
+          <p:cNvSpPr/>
+          <p:nvPr/>
+        </p:nvSpPr>
+        <p:spPr>
+          <a:xfrm>
+            <a:off x="7772400" y="1554480"/>
+            <a:ext cx="3867912" cy="4526280"/>
+          </a:xfrm>
+          <a:prstGeom prst="roundRect">
+            <a:avLst>
+              <a:gd name="adj" fmla="val 8000"/>
+            </a:avLst>
+          </a:prstGeom>
+          <a:solidFill>
+            <a:srgbClr val="03306E"/>
+          </a:solidFill>
+          <a:ln>
+            <a:noFill/>
+          </a:ln>
+          <a:effectLst/>
+        </p:spPr>
+        <p:style>
+          <a:lnRef idx="1">
+            <a:schemeClr val="accent1"/>
+          </a:lnRef>
+          <a:fillRef idx="3">
+            <a:schemeClr val="accent1"/>
+          </a:fillRef>
+          <a:effectRef idx="2">
+            <a:schemeClr val="accent1"/>
+          </a:effectRef>
+          <a:fontRef idx="minor">
+            <a:schemeClr val="lt1"/>
+          </a:fontRef>
+        </p:style>
+        <p:txBody>
+          <a:bodyPr rtlCol="0" anchor="ctr"/>
+          <a:lstStyle/>
+          <a:p/>
+        </p:txBody>
+      </p:sp>
+      <p:sp>
+        <p:nvSpPr>
+          <p:cNvPr id="8" name="Oval 7"/>
+          <p:cNvSpPr/>
+          <p:nvPr/>
+        </p:nvSpPr>
+        <p:spPr>
+          <a:xfrm>
+            <a:off x="8046720" y="1828800"/>
+            <a:ext cx="548640" cy="548640"/>
+          </a:xfrm>
+          <a:prstGeom prst="ellipse">
+            <a:avLst/>
+          </a:prstGeom>
+          <a:solidFill>
+            <a:srgbClr val="F2B705"/>
+          </a:solidFill>
+          <a:ln>
+            <a:noFill/>
+          </a:ln>
+          <a:effectLst/>
+        </p:spPr>
+        <p:style>
+          <a:lnRef idx="1">
+            <a:schemeClr val="accent1"/>
+          </a:lnRef>
+          <a:fillRef idx="3">
+            <a:schemeClr val="accent1"/>
+          </a:fillRef>
+          <a:effectRef idx="2">
+            <a:schemeClr val="accent1"/>
+          </a:effectRef>
+          <a:fontRef idx="minor">
+            <a:schemeClr val="lt1"/>
+          </a:fontRef>
+        </p:style>
+        <p:txBody>
+          <a:bodyPr rtlCol="0" anchor="ctr" lIns="0" rIns="0" tIns="0" bIns="0"/>
+          <a:lstStyle/>
+          <a:p>
+            <a:pPr algn="ctr"/>
+            <a:r>
+              <a:rPr sz="1300" b="1">
+                <a:solidFill>
+                  <a:srgbClr val="202122"/>
+                </a:solidFill>
+                <a:latin typeface="Calibri"/>
+              </a:rPr>
+              <a:t>e.g.</a:t>
+            </a:r>
+          </a:p>
+        </p:txBody>
+      </p:sp>
+      <p:sp>
+        <p:nvSpPr>
+          <p:cNvPr id="9" name="TextBox 8"/>
+          <p:cNvSpPr txBox="1"/>
+          <p:nvPr/>
+        </p:nvSpPr>
+        <p:spPr>
+          <a:xfrm>
+            <a:off x="8046720" y="2560320"/>
+            <a:ext cx="3291840" cy="365760"/>
+          </a:xfrm>
+          <a:prstGeom prst="rect">
+            <a:avLst/>
+          </a:prstGeom>
+          <a:noFill/>
+        </p:spPr>
+        <p:txBody>
+          <a:bodyPr wrap="square" anchor="t" lIns="0" rIns="0" tIns="0" bIns="0"/>
+          <a:lstStyle/>
+          <a:p>
+            <a:pPr algn="l"/>
+            <a:r>
+              <a:rPr sz="1300" b="1" i="0">
+                <a:solidFill>
+                  <a:srgbClr val="A9C8F0"/>
+                </a:solidFill>
+                <a:latin typeface="Calibri"/>
+              </a:rPr>
+              <a:t>EXAMPLE</a:t>
+            </a:r>
+          </a:p>
+        </p:txBody>
+      </p:sp>
+      <p:sp>
+        <p:nvSpPr>
+          <p:cNvPr id="10" name="TextBox 9"/>
+          <p:cNvSpPr txBox="1"/>
+          <p:nvPr/>
+        </p:nvSpPr>
+        <p:spPr>
+          <a:xfrm>
+            <a:off x="8046720" y="2971800"/>
+            <a:ext cx="3291840" cy="2971800"/>
+          </a:xfrm>
+          <a:prstGeom prst="rect">
+            <a:avLst/>
+          </a:prstGeom>
+          <a:noFill/>
+        </p:spPr>
+        <p:txBody>
+          <a:bodyPr wrap="square" anchor="t" lIns="0" rIns="0" tIns="0" bIns="0"/>
+          <a:lstStyle/>
+          <a:p>
+            <a:pPr algn="l"/>
+            <a:r>
+              <a:rPr sz="1900" b="0" i="0">
+                <a:solidFill>
+                  <a:srgbClr val="FFFFFF"/>
+                </a:solidFill>
+                <a:latin typeface="Cambria"/>
+              </a:rPr>
+              <a:t>Replaceable, standardised parts meant a broken rifle or car could be repaired with a new part instead of being hand-made again: the basis of mass production.</a:t>
+            </a:r>
+          </a:p>
+        </p:txBody>
+      </p:sp>
+    </p:spTree>
+  </p:cSld>
+  <p:clrMapOvr>
+    <a:masterClrMapping/>
+  </p:clrMapOvr>
+</p:sld>
+</file>
+
+<file path=ppt/slides/slide5.xml><?xml version="1.0" encoding="utf-8"?>
+<p:sld xmlns:a="http://schemas.openxmlformats.org/drawingml/2006/main" xmlns:p="http://schemas.openxmlformats.org/presentationml/2006/main" xmlns:r="http://schemas.openxmlformats.org/officeDocument/2006/relationships">
+  <p:cSld>
+    <p:bg>
+      <p:bgPr>
+        <a:solidFill>
+          <a:srgbClr val="FFFFFF"/>
+        </a:solidFill>
+        <a:effectLst/>
+      </p:bgPr>
+    </p:bg>
+    <p:spTree>
+      <p:nvGrpSpPr>
+        <p:cNvPr id="1" name=""/>
+        <p:cNvGrpSpPr/>
+        <p:nvPr/>
+      </p:nvGrpSpPr>
+      <p:grpSpPr/>
+      <p:sp>
+        <p:nvSpPr>
+          <p:cNvPr id="2" name="TextBox 1"/>
+          <p:cNvSpPr txBox="1"/>
+          <p:nvPr/>
+        </p:nvSpPr>
+        <p:spPr>
+          <a:xfrm>
+            <a:off x="548640" y="320040"/>
+            <a:ext cx="11094415" cy="274320"/>
+          </a:xfrm>
+          <a:prstGeom prst="rect">
+            <a:avLst/>
+          </a:prstGeom>
+          <a:noFill/>
+        </p:spPr>
+        <p:txBody>
+          <a:bodyPr wrap="square" anchor="t" lIns="0" rIns="0" tIns="0" bIns="0"/>
+          <a:lstStyle/>
+          <a:p>
+            <a:pPr algn="l"/>
+            <a:r>
+              <a:rPr sz="1100" b="1" i="0">
+                <a:solidFill>
+                  <a:srgbClr val="54595D"/>
+                </a:solidFill>
+                <a:latin typeface="Calibri"/>
+              </a:rPr>
+              <a:t>ENGINEERING CORE  ·  Core topic 2</a:t>
+            </a:r>
+          </a:p>
+        </p:txBody>
+      </p:sp>
+      <p:sp>
+        <p:nvSpPr>
+          <p:cNvPr id="3" name="TextBox 2"/>
+          <p:cNvSpPr txBox="1"/>
+          <p:nvPr/>
+        </p:nvSpPr>
+        <p:spPr>
+          <a:xfrm>
+            <a:off x="548640" y="566928"/>
+            <a:ext cx="11094415" cy="822960"/>
+          </a:xfrm>
+          <a:prstGeom prst="rect">
+            <a:avLst/>
+          </a:prstGeom>
+          <a:noFill/>
+        </p:spPr>
+        <p:txBody>
+          <a:bodyPr wrap="square" anchor="ctr" lIns="0" rIns="0" tIns="0" bIns="0"/>
+          <a:lstStyle/>
+          <a:p>
+            <a:pPr algn="l"/>
+            <a:r>
+              <a:rPr sz="3200" b="1" i="0">
+                <a:solidFill>
+                  <a:srgbClr val="03306E"/>
+                </a:solidFill>
+                <a:latin typeface="Cambria"/>
+              </a:rPr>
+              <a:t>Historical advances</a:t>
+            </a:r>
+          </a:p>
+        </p:txBody>
+      </p:sp>
+      <p:sp>
+        <p:nvSpPr>
+          <p:cNvPr id="4" name="TextBox 3"/>
+          <p:cNvSpPr txBox="1"/>
+          <p:nvPr/>
+        </p:nvSpPr>
+        <p:spPr>
+          <a:xfrm>
+            <a:off x="548640" y="6446520"/>
+            <a:ext cx="8229600" cy="274320"/>
+          </a:xfrm>
+          <a:prstGeom prst="rect">
+            <a:avLst/>
+          </a:prstGeom>
+          <a:noFill/>
+        </p:spPr>
+        <p:txBody>
+          <a:bodyPr wrap="square" anchor="t" lIns="0" rIns="0" tIns="0" bIns="0"/>
+          <a:lstStyle/>
+          <a:p>
+            <a:pPr algn="l"/>
+            <a:r>
+              <a:rPr sz="1000" b="0" i="0">
+                <a:solidFill>
+                  <a:srgbClr val="54595D"/>
+                </a:solidFill>
+                <a:latin typeface="Calibri"/>
+              </a:rPr>
+              <a:t>Design and Development for Engineering and Manufacturing T Level  ·  Engineering Past, Present and Future</a:t>
+            </a:r>
+          </a:p>
+        </p:txBody>
+      </p:sp>
+      <p:sp>
+        <p:nvSpPr>
+          <p:cNvPr id="5" name="TextBox 4"/>
+          <p:cNvSpPr txBox="1"/>
+          <p:nvPr/>
+        </p:nvSpPr>
+        <p:spPr>
+          <a:xfrm>
+            <a:off x="10728655" y="6446520"/>
+            <a:ext cx="914400" cy="274320"/>
+          </a:xfrm>
+          <a:prstGeom prst="rect">
+            <a:avLst/>
+          </a:prstGeom>
+          <a:noFill/>
+        </p:spPr>
+        <p:txBody>
+          <a:bodyPr wrap="square" anchor="t" lIns="0" rIns="0" tIns="0" bIns="0"/>
+          <a:lstStyle/>
+          <a:p>
+            <a:pPr algn="r"/>
+            <a:r>
+              <a:rPr sz="1000" b="0" i="0">
+                <a:solidFill>
+                  <a:srgbClr val="54595D"/>
+                </a:solidFill>
+                <a:latin typeface="Calibri"/>
+              </a:rPr>
+              <a:t>5</a:t>
             </a:r>
           </a:p>
         </p:txBody>
@@ -6000,979 +8915,6 @@
 </p:sld>
 </file>
 
-<file path=ppt/slides/slide5.xml><?xml version="1.0" encoding="utf-8"?>
-<p:sld xmlns:a="http://schemas.openxmlformats.org/drawingml/2006/main" xmlns:p="http://schemas.openxmlformats.org/presentationml/2006/main" xmlns:r="http://schemas.openxmlformats.org/officeDocument/2006/relationships">
-  <p:cSld>
-    <p:bg>
-      <p:bgPr>
-        <a:solidFill>
-          <a:srgbClr val="FFFFFF"/>
-        </a:solidFill>
-        <a:effectLst/>
-      </p:bgPr>
-    </p:bg>
-    <p:spTree>
-      <p:nvGrpSpPr>
-        <p:cNvPr id="1" name=""/>
-        <p:cNvGrpSpPr/>
-        <p:nvPr/>
-      </p:nvGrpSpPr>
-      <p:grpSpPr/>
-      <p:sp>
-        <p:nvSpPr>
-          <p:cNvPr id="2" name="TextBox 1"/>
-          <p:cNvSpPr txBox="1"/>
-          <p:nvPr/>
-        </p:nvSpPr>
-        <p:spPr>
-          <a:xfrm>
-            <a:off x="548640" y="320040"/>
-            <a:ext cx="11094415" cy="274320"/>
-          </a:xfrm>
-          <a:prstGeom prst="rect">
-            <a:avLst/>
-          </a:prstGeom>
-          <a:noFill/>
-        </p:spPr>
-        <p:txBody>
-          <a:bodyPr wrap="square" anchor="t" lIns="0" rIns="0" tIns="0" bIns="0"/>
-          <a:lstStyle/>
-          <a:p>
-            <a:pPr algn="l"/>
-            <a:r>
-              <a:rPr sz="1100" b="1" i="0">
-                <a:solidFill>
-                  <a:srgbClr val="54595D"/>
-                </a:solidFill>
-                <a:latin typeface="Calibri"/>
-              </a:rPr>
-              <a:t>ENGINEERING CORE  ·  Core topic 2</a:t>
-            </a:r>
-          </a:p>
-        </p:txBody>
-      </p:sp>
-      <p:sp>
-        <p:nvSpPr>
-          <p:cNvPr id="3" name="TextBox 2"/>
-          <p:cNvSpPr txBox="1"/>
-          <p:nvPr/>
-        </p:nvSpPr>
-        <p:spPr>
-          <a:xfrm>
-            <a:off x="548640" y="566928"/>
-            <a:ext cx="11094415" cy="822960"/>
-          </a:xfrm>
-          <a:prstGeom prst="rect">
-            <a:avLst/>
-          </a:prstGeom>
-          <a:noFill/>
-        </p:spPr>
-        <p:txBody>
-          <a:bodyPr wrap="square" anchor="ctr" lIns="0" rIns="0" tIns="0" bIns="0"/>
-          <a:lstStyle/>
-          <a:p>
-            <a:pPr algn="l"/>
-            <a:r>
-              <a:rPr sz="3200" b="1" i="0">
-                <a:solidFill>
-                  <a:srgbClr val="03306E"/>
-                </a:solidFill>
-                <a:latin typeface="Cambria"/>
-              </a:rPr>
-              <a:t>Emerging trends</a:t>
-            </a:r>
-          </a:p>
-        </p:txBody>
-      </p:sp>
-      <p:sp>
-        <p:nvSpPr>
-          <p:cNvPr id="4" name="TextBox 3"/>
-          <p:cNvSpPr txBox="1"/>
-          <p:nvPr/>
-        </p:nvSpPr>
-        <p:spPr>
-          <a:xfrm>
-            <a:off x="548640" y="6446520"/>
-            <a:ext cx="8229600" cy="274320"/>
-          </a:xfrm>
-          <a:prstGeom prst="rect">
-            <a:avLst/>
-          </a:prstGeom>
-          <a:noFill/>
-        </p:spPr>
-        <p:txBody>
-          <a:bodyPr wrap="square" anchor="t" lIns="0" rIns="0" tIns="0" bIns="0"/>
-          <a:lstStyle/>
-          <a:p>
-            <a:pPr algn="l"/>
-            <a:r>
-              <a:rPr sz="1000" b="0" i="0">
-                <a:solidFill>
-                  <a:srgbClr val="54595D"/>
-                </a:solidFill>
-                <a:latin typeface="Calibri"/>
-              </a:rPr>
-              <a:t>Design and Development for Engineering and Manufacturing T Level  ·  Engineering Past, Present and Future</a:t>
-            </a:r>
-          </a:p>
-        </p:txBody>
-      </p:sp>
-      <p:sp>
-        <p:nvSpPr>
-          <p:cNvPr id="5" name="TextBox 4"/>
-          <p:cNvSpPr txBox="1"/>
-          <p:nvPr/>
-        </p:nvSpPr>
-        <p:spPr>
-          <a:xfrm>
-            <a:off x="10728655" y="6446520"/>
-            <a:ext cx="914400" cy="274320"/>
-          </a:xfrm>
-          <a:prstGeom prst="rect">
-            <a:avLst/>
-          </a:prstGeom>
-          <a:noFill/>
-        </p:spPr>
-        <p:txBody>
-          <a:bodyPr wrap="square" anchor="t" lIns="0" rIns="0" tIns="0" bIns="0"/>
-          <a:lstStyle/>
-          <a:p>
-            <a:pPr algn="r"/>
-            <a:r>
-              <a:rPr sz="1000" b="0" i="0">
-                <a:solidFill>
-                  <a:srgbClr val="54595D"/>
-                </a:solidFill>
-                <a:latin typeface="Calibri"/>
-              </a:rPr>
-              <a:t>5</a:t>
-            </a:r>
-          </a:p>
-        </p:txBody>
-      </p:sp>
-      <p:sp>
-        <p:nvSpPr>
-          <p:cNvPr id="6" name="Rounded Rectangle 5"/>
-          <p:cNvSpPr/>
-          <p:nvPr/>
-        </p:nvSpPr>
-        <p:spPr>
-          <a:xfrm>
-            <a:off x="548640" y="1600200"/>
-            <a:ext cx="3515258" cy="2148840"/>
-          </a:xfrm>
-          <a:prstGeom prst="roundRect">
-            <a:avLst>
-              <a:gd name="adj" fmla="val 6000"/>
-            </a:avLst>
-          </a:prstGeom>
-          <a:solidFill>
-            <a:srgbClr val="EAF3FF"/>
-          </a:solidFill>
-          <a:ln>
-            <a:noFill/>
-          </a:ln>
-          <a:effectLst/>
-        </p:spPr>
-        <p:style>
-          <a:lnRef idx="1">
-            <a:schemeClr val="accent1"/>
-          </a:lnRef>
-          <a:fillRef idx="3">
-            <a:schemeClr val="accent1"/>
-          </a:fillRef>
-          <a:effectRef idx="2">
-            <a:schemeClr val="accent1"/>
-          </a:effectRef>
-          <a:fontRef idx="minor">
-            <a:schemeClr val="lt1"/>
-          </a:fontRef>
-        </p:style>
-        <p:txBody>
-          <a:bodyPr rtlCol="0" anchor="ctr"/>
-          <a:lstStyle/>
-          <a:p/>
-        </p:txBody>
-      </p:sp>
-      <p:sp>
-        <p:nvSpPr>
-          <p:cNvPr id="7" name="Oval 6"/>
-          <p:cNvSpPr/>
-          <p:nvPr/>
-        </p:nvSpPr>
-        <p:spPr>
-          <a:xfrm>
-            <a:off x="777240" y="1828800"/>
-            <a:ext cx="457200" cy="457200"/>
-          </a:xfrm>
-          <a:prstGeom prst="ellipse">
-            <a:avLst/>
-          </a:prstGeom>
-          <a:solidFill>
-            <a:srgbClr val="F2B705"/>
-          </a:solidFill>
-          <a:ln>
-            <a:noFill/>
-          </a:ln>
-          <a:effectLst/>
-        </p:spPr>
-        <p:style>
-          <a:lnRef idx="1">
-            <a:schemeClr val="accent1"/>
-          </a:lnRef>
-          <a:fillRef idx="3">
-            <a:schemeClr val="accent1"/>
-          </a:fillRef>
-          <a:effectRef idx="2">
-            <a:schemeClr val="accent1"/>
-          </a:effectRef>
-          <a:fontRef idx="minor">
-            <a:schemeClr val="lt1"/>
-          </a:fontRef>
-        </p:style>
-        <p:txBody>
-          <a:bodyPr rtlCol="0" anchor="ctr" lIns="0" rIns="0" tIns="0" bIns="0"/>
-          <a:lstStyle/>
-          <a:p>
-            <a:pPr algn="ctr"/>
-            <a:r>
-              <a:rPr sz="1500" b="1">
-                <a:solidFill>
-                  <a:srgbClr val="202122"/>
-                </a:solidFill>
-                <a:latin typeface="Calibri"/>
-              </a:rPr>
-              <a:t>1</a:t>
-            </a:r>
-          </a:p>
-        </p:txBody>
-      </p:sp>
-      <p:sp>
-        <p:nvSpPr>
-          <p:cNvPr id="8" name="TextBox 7"/>
-          <p:cNvSpPr txBox="1"/>
-          <p:nvPr/>
-        </p:nvSpPr>
-        <p:spPr>
-          <a:xfrm>
-            <a:off x="1371600" y="1801368"/>
-            <a:ext cx="2509418" cy="512064"/>
-          </a:xfrm>
-          <a:prstGeom prst="rect">
-            <a:avLst/>
-          </a:prstGeom>
-          <a:noFill/>
-        </p:spPr>
-        <p:txBody>
-          <a:bodyPr wrap="square" anchor="ctr" lIns="0" rIns="0" tIns="0" bIns="0"/>
-          <a:lstStyle/>
-          <a:p>
-            <a:pPr algn="l"/>
-            <a:r>
-              <a:rPr sz="1900" b="1" i="0">
-                <a:solidFill>
-                  <a:srgbClr val="03306E"/>
-                </a:solidFill>
-                <a:latin typeface="Calibri"/>
-              </a:rPr>
-              <a:t>Digital</a:t>
-            </a:r>
-          </a:p>
-        </p:txBody>
-      </p:sp>
-      <p:sp>
-        <p:nvSpPr>
-          <p:cNvPr id="9" name="TextBox 8"/>
-          <p:cNvSpPr txBox="1"/>
-          <p:nvPr/>
-        </p:nvSpPr>
-        <p:spPr>
-          <a:xfrm>
-            <a:off x="777240" y="2468880"/>
-            <a:ext cx="3058058" cy="1143000"/>
-          </a:xfrm>
-          <a:prstGeom prst="rect">
-            <a:avLst/>
-          </a:prstGeom>
-          <a:noFill/>
-        </p:spPr>
-        <p:txBody>
-          <a:bodyPr wrap="square" anchor="t" lIns="0" rIns="0" tIns="0" bIns="0"/>
-          <a:lstStyle/>
-          <a:p>
-            <a:pPr algn="l"/>
-            <a:r>
-              <a:rPr sz="2000" b="0" i="0">
-                <a:solidFill>
-                  <a:srgbClr val="202122"/>
-                </a:solidFill>
-                <a:latin typeface="Calibri"/>
-              </a:rPr>
-              <a:t>AI, digitalisation, IoT, cloud computing, cyber-physical systems.</a:t>
-            </a:r>
-          </a:p>
-        </p:txBody>
-      </p:sp>
-      <p:sp>
-        <p:nvSpPr>
-          <p:cNvPr id="10" name="Rounded Rectangle 9"/>
-          <p:cNvSpPr/>
-          <p:nvPr/>
-        </p:nvSpPr>
-        <p:spPr>
-          <a:xfrm>
-            <a:off x="4338218" y="1600200"/>
-            <a:ext cx="3515258" cy="2148840"/>
-          </a:xfrm>
-          <a:prstGeom prst="roundRect">
-            <a:avLst>
-              <a:gd name="adj" fmla="val 6000"/>
-            </a:avLst>
-          </a:prstGeom>
-          <a:solidFill>
-            <a:srgbClr val="EAF3FF"/>
-          </a:solidFill>
-          <a:ln>
-            <a:noFill/>
-          </a:ln>
-          <a:effectLst/>
-        </p:spPr>
-        <p:style>
-          <a:lnRef idx="1">
-            <a:schemeClr val="accent1"/>
-          </a:lnRef>
-          <a:fillRef idx="3">
-            <a:schemeClr val="accent1"/>
-          </a:fillRef>
-          <a:effectRef idx="2">
-            <a:schemeClr val="accent1"/>
-          </a:effectRef>
-          <a:fontRef idx="minor">
-            <a:schemeClr val="lt1"/>
-          </a:fontRef>
-        </p:style>
-        <p:txBody>
-          <a:bodyPr rtlCol="0" anchor="ctr"/>
-          <a:lstStyle/>
-          <a:p/>
-        </p:txBody>
-      </p:sp>
-      <p:sp>
-        <p:nvSpPr>
-          <p:cNvPr id="11" name="Oval 10"/>
-          <p:cNvSpPr/>
-          <p:nvPr/>
-        </p:nvSpPr>
-        <p:spPr>
-          <a:xfrm>
-            <a:off x="4566818" y="1828800"/>
-            <a:ext cx="457200" cy="457200"/>
-          </a:xfrm>
-          <a:prstGeom prst="ellipse">
-            <a:avLst/>
-          </a:prstGeom>
-          <a:solidFill>
-            <a:srgbClr val="F2B705"/>
-          </a:solidFill>
-          <a:ln>
-            <a:noFill/>
-          </a:ln>
-          <a:effectLst/>
-        </p:spPr>
-        <p:style>
-          <a:lnRef idx="1">
-            <a:schemeClr val="accent1"/>
-          </a:lnRef>
-          <a:fillRef idx="3">
-            <a:schemeClr val="accent1"/>
-          </a:fillRef>
-          <a:effectRef idx="2">
-            <a:schemeClr val="accent1"/>
-          </a:effectRef>
-          <a:fontRef idx="minor">
-            <a:schemeClr val="lt1"/>
-          </a:fontRef>
-        </p:style>
-        <p:txBody>
-          <a:bodyPr rtlCol="0" anchor="ctr" lIns="0" rIns="0" tIns="0" bIns="0"/>
-          <a:lstStyle/>
-          <a:p>
-            <a:pPr algn="ctr"/>
-            <a:r>
-              <a:rPr sz="1500" b="1">
-                <a:solidFill>
-                  <a:srgbClr val="202122"/>
-                </a:solidFill>
-                <a:latin typeface="Calibri"/>
-              </a:rPr>
-              <a:t>2</a:t>
-            </a:r>
-          </a:p>
-        </p:txBody>
-      </p:sp>
-      <p:sp>
-        <p:nvSpPr>
-          <p:cNvPr id="12" name="TextBox 11"/>
-          <p:cNvSpPr txBox="1"/>
-          <p:nvPr/>
-        </p:nvSpPr>
-        <p:spPr>
-          <a:xfrm>
-            <a:off x="5161178" y="1801368"/>
-            <a:ext cx="2509418" cy="512064"/>
-          </a:xfrm>
-          <a:prstGeom prst="rect">
-            <a:avLst/>
-          </a:prstGeom>
-          <a:noFill/>
-        </p:spPr>
-        <p:txBody>
-          <a:bodyPr wrap="square" anchor="ctr" lIns="0" rIns="0" tIns="0" bIns="0"/>
-          <a:lstStyle/>
-          <a:p>
-            <a:pPr algn="l"/>
-            <a:r>
-              <a:rPr sz="1900" b="1" i="0">
-                <a:solidFill>
-                  <a:srgbClr val="03306E"/>
-                </a:solidFill>
-                <a:latin typeface="Calibri"/>
-              </a:rPr>
-              <a:t>Automation</a:t>
-            </a:r>
-          </a:p>
-        </p:txBody>
-      </p:sp>
-      <p:sp>
-        <p:nvSpPr>
-          <p:cNvPr id="13" name="TextBox 12"/>
-          <p:cNvSpPr txBox="1"/>
-          <p:nvPr/>
-        </p:nvSpPr>
-        <p:spPr>
-          <a:xfrm>
-            <a:off x="4566818" y="2468880"/>
-            <a:ext cx="3058058" cy="1143000"/>
-          </a:xfrm>
-          <a:prstGeom prst="rect">
-            <a:avLst/>
-          </a:prstGeom>
-          <a:noFill/>
-        </p:spPr>
-        <p:txBody>
-          <a:bodyPr wrap="square" anchor="t" lIns="0" rIns="0" tIns="0" bIns="0"/>
-          <a:lstStyle/>
-          <a:p>
-            <a:pPr algn="l"/>
-            <a:r>
-              <a:rPr sz="2000" b="0" i="0">
-                <a:solidFill>
-                  <a:srgbClr val="202122"/>
-                </a:solidFill>
-                <a:latin typeface="Calibri"/>
-              </a:rPr>
-              <a:t>Robotics, drones, autonomous systems.</a:t>
-            </a:r>
-          </a:p>
-        </p:txBody>
-      </p:sp>
-      <p:sp>
-        <p:nvSpPr>
-          <p:cNvPr id="14" name="Rounded Rectangle 13"/>
-          <p:cNvSpPr/>
-          <p:nvPr/>
-        </p:nvSpPr>
-        <p:spPr>
-          <a:xfrm>
-            <a:off x="8127796" y="1600200"/>
-            <a:ext cx="3515258" cy="2148840"/>
-          </a:xfrm>
-          <a:prstGeom prst="roundRect">
-            <a:avLst>
-              <a:gd name="adj" fmla="val 6000"/>
-            </a:avLst>
-          </a:prstGeom>
-          <a:solidFill>
-            <a:srgbClr val="EAF3FF"/>
-          </a:solidFill>
-          <a:ln>
-            <a:noFill/>
-          </a:ln>
-          <a:effectLst/>
-        </p:spPr>
-        <p:style>
-          <a:lnRef idx="1">
-            <a:schemeClr val="accent1"/>
-          </a:lnRef>
-          <a:fillRef idx="3">
-            <a:schemeClr val="accent1"/>
-          </a:fillRef>
-          <a:effectRef idx="2">
-            <a:schemeClr val="accent1"/>
-          </a:effectRef>
-          <a:fontRef idx="minor">
-            <a:schemeClr val="lt1"/>
-          </a:fontRef>
-        </p:style>
-        <p:txBody>
-          <a:bodyPr rtlCol="0" anchor="ctr"/>
-          <a:lstStyle/>
-          <a:p/>
-        </p:txBody>
-      </p:sp>
-      <p:sp>
-        <p:nvSpPr>
-          <p:cNvPr id="15" name="Oval 14"/>
-          <p:cNvSpPr/>
-          <p:nvPr/>
-        </p:nvSpPr>
-        <p:spPr>
-          <a:xfrm>
-            <a:off x="8356396" y="1828800"/>
-            <a:ext cx="457200" cy="457200"/>
-          </a:xfrm>
-          <a:prstGeom prst="ellipse">
-            <a:avLst/>
-          </a:prstGeom>
-          <a:solidFill>
-            <a:srgbClr val="F2B705"/>
-          </a:solidFill>
-          <a:ln>
-            <a:noFill/>
-          </a:ln>
-          <a:effectLst/>
-        </p:spPr>
-        <p:style>
-          <a:lnRef idx="1">
-            <a:schemeClr val="accent1"/>
-          </a:lnRef>
-          <a:fillRef idx="3">
-            <a:schemeClr val="accent1"/>
-          </a:fillRef>
-          <a:effectRef idx="2">
-            <a:schemeClr val="accent1"/>
-          </a:effectRef>
-          <a:fontRef idx="minor">
-            <a:schemeClr val="lt1"/>
-          </a:fontRef>
-        </p:style>
-        <p:txBody>
-          <a:bodyPr rtlCol="0" anchor="ctr" lIns="0" rIns="0" tIns="0" bIns="0"/>
-          <a:lstStyle/>
-          <a:p>
-            <a:pPr algn="ctr"/>
-            <a:r>
-              <a:rPr sz="1500" b="1">
-                <a:solidFill>
-                  <a:srgbClr val="202122"/>
-                </a:solidFill>
-                <a:latin typeface="Calibri"/>
-              </a:rPr>
-              <a:t>3</a:t>
-            </a:r>
-          </a:p>
-        </p:txBody>
-      </p:sp>
-      <p:sp>
-        <p:nvSpPr>
-          <p:cNvPr id="16" name="TextBox 15"/>
-          <p:cNvSpPr txBox="1"/>
-          <p:nvPr/>
-        </p:nvSpPr>
-        <p:spPr>
-          <a:xfrm>
-            <a:off x="8950756" y="1801368"/>
-            <a:ext cx="2509418" cy="512064"/>
-          </a:xfrm>
-          <a:prstGeom prst="rect">
-            <a:avLst/>
-          </a:prstGeom>
-          <a:noFill/>
-        </p:spPr>
-        <p:txBody>
-          <a:bodyPr wrap="square" anchor="ctr" lIns="0" rIns="0" tIns="0" bIns="0"/>
-          <a:lstStyle/>
-          <a:p>
-            <a:pPr algn="l"/>
-            <a:r>
-              <a:rPr sz="1900" b="1" i="0">
-                <a:solidFill>
-                  <a:srgbClr val="03306E"/>
-                </a:solidFill>
-                <a:latin typeface="Calibri"/>
-              </a:rPr>
-              <a:t>Reality</a:t>
-            </a:r>
-          </a:p>
-        </p:txBody>
-      </p:sp>
-      <p:sp>
-        <p:nvSpPr>
-          <p:cNvPr id="17" name="TextBox 16"/>
-          <p:cNvSpPr txBox="1"/>
-          <p:nvPr/>
-        </p:nvSpPr>
-        <p:spPr>
-          <a:xfrm>
-            <a:off x="8356396" y="2468880"/>
-            <a:ext cx="3058058" cy="1143000"/>
-          </a:xfrm>
-          <a:prstGeom prst="rect">
-            <a:avLst/>
-          </a:prstGeom>
-          <a:noFill/>
-        </p:spPr>
-        <p:txBody>
-          <a:bodyPr wrap="square" anchor="t" lIns="0" rIns="0" tIns="0" bIns="0"/>
-          <a:lstStyle/>
-          <a:p>
-            <a:pPr algn="l"/>
-            <a:r>
-              <a:rPr sz="2000" b="0" i="0">
-                <a:solidFill>
-                  <a:srgbClr val="202122"/>
-                </a:solidFill>
-                <a:latin typeface="Calibri"/>
-              </a:rPr>
-              <a:t>Virtual and augmented reality for design and training.</a:t>
-            </a:r>
-          </a:p>
-        </p:txBody>
-      </p:sp>
-      <p:sp>
-        <p:nvSpPr>
-          <p:cNvPr id="18" name="Rounded Rectangle 17"/>
-          <p:cNvSpPr/>
-          <p:nvPr/>
-        </p:nvSpPr>
-        <p:spPr>
-          <a:xfrm>
-            <a:off x="548640" y="4023360"/>
-            <a:ext cx="3515258" cy="2148840"/>
-          </a:xfrm>
-          <a:prstGeom prst="roundRect">
-            <a:avLst>
-              <a:gd name="adj" fmla="val 6000"/>
-            </a:avLst>
-          </a:prstGeom>
-          <a:solidFill>
-            <a:srgbClr val="EAF3FF"/>
-          </a:solidFill>
-          <a:ln>
-            <a:noFill/>
-          </a:ln>
-          <a:effectLst/>
-        </p:spPr>
-        <p:style>
-          <a:lnRef idx="1">
-            <a:schemeClr val="accent1"/>
-          </a:lnRef>
-          <a:fillRef idx="3">
-            <a:schemeClr val="accent1"/>
-          </a:fillRef>
-          <a:effectRef idx="2">
-            <a:schemeClr val="accent1"/>
-          </a:effectRef>
-          <a:fontRef idx="minor">
-            <a:schemeClr val="lt1"/>
-          </a:fontRef>
-        </p:style>
-        <p:txBody>
-          <a:bodyPr rtlCol="0" anchor="ctr"/>
-          <a:lstStyle/>
-          <a:p/>
-        </p:txBody>
-      </p:sp>
-      <p:sp>
-        <p:nvSpPr>
-          <p:cNvPr id="19" name="Oval 18"/>
-          <p:cNvSpPr/>
-          <p:nvPr/>
-        </p:nvSpPr>
-        <p:spPr>
-          <a:xfrm>
-            <a:off x="777240" y="4251960"/>
-            <a:ext cx="457200" cy="457200"/>
-          </a:xfrm>
-          <a:prstGeom prst="ellipse">
-            <a:avLst/>
-          </a:prstGeom>
-          <a:solidFill>
-            <a:srgbClr val="F2B705"/>
-          </a:solidFill>
-          <a:ln>
-            <a:noFill/>
-          </a:ln>
-          <a:effectLst/>
-        </p:spPr>
-        <p:style>
-          <a:lnRef idx="1">
-            <a:schemeClr val="accent1"/>
-          </a:lnRef>
-          <a:fillRef idx="3">
-            <a:schemeClr val="accent1"/>
-          </a:fillRef>
-          <a:effectRef idx="2">
-            <a:schemeClr val="accent1"/>
-          </a:effectRef>
-          <a:fontRef idx="minor">
-            <a:schemeClr val="lt1"/>
-          </a:fontRef>
-        </p:style>
-        <p:txBody>
-          <a:bodyPr rtlCol="0" anchor="ctr" lIns="0" rIns="0" tIns="0" bIns="0"/>
-          <a:lstStyle/>
-          <a:p>
-            <a:pPr algn="ctr"/>
-            <a:r>
-              <a:rPr sz="1500" b="1">
-                <a:solidFill>
-                  <a:srgbClr val="202122"/>
-                </a:solidFill>
-                <a:latin typeface="Calibri"/>
-              </a:rPr>
-              <a:t>4</a:t>
-            </a:r>
-          </a:p>
-        </p:txBody>
-      </p:sp>
-      <p:sp>
-        <p:nvSpPr>
-          <p:cNvPr id="20" name="TextBox 19"/>
-          <p:cNvSpPr txBox="1"/>
-          <p:nvPr/>
-        </p:nvSpPr>
-        <p:spPr>
-          <a:xfrm>
-            <a:off x="1371600" y="4224528"/>
-            <a:ext cx="2509418" cy="512064"/>
-          </a:xfrm>
-          <a:prstGeom prst="rect">
-            <a:avLst/>
-          </a:prstGeom>
-          <a:noFill/>
-        </p:spPr>
-        <p:txBody>
-          <a:bodyPr wrap="square" anchor="ctr" lIns="0" rIns="0" tIns="0" bIns="0"/>
-          <a:lstStyle/>
-          <a:p>
-            <a:pPr algn="l"/>
-            <a:r>
-              <a:rPr sz="1900" b="1" i="0">
-                <a:solidFill>
-                  <a:srgbClr val="03306E"/>
-                </a:solidFill>
-                <a:latin typeface="Calibri"/>
-              </a:rPr>
-              <a:t>Energy</a:t>
-            </a:r>
-          </a:p>
-        </p:txBody>
-      </p:sp>
-      <p:sp>
-        <p:nvSpPr>
-          <p:cNvPr id="21" name="TextBox 20"/>
-          <p:cNvSpPr txBox="1"/>
-          <p:nvPr/>
-        </p:nvSpPr>
-        <p:spPr>
-          <a:xfrm>
-            <a:off x="777240" y="4892040"/>
-            <a:ext cx="3058058" cy="1143000"/>
-          </a:xfrm>
-          <a:prstGeom prst="rect">
-            <a:avLst/>
-          </a:prstGeom>
-          <a:noFill/>
-        </p:spPr>
-        <p:txBody>
-          <a:bodyPr wrap="square" anchor="t" lIns="0" rIns="0" tIns="0" bIns="0"/>
-          <a:lstStyle/>
-          <a:p>
-            <a:pPr algn="l"/>
-            <a:r>
-              <a:rPr sz="2000" b="0" i="0">
-                <a:solidFill>
-                  <a:srgbClr val="202122"/>
-                </a:solidFill>
-                <a:latin typeface="Calibri"/>
-              </a:rPr>
-              <a:t>Distributed energy and hybrid technologies.</a:t>
-            </a:r>
-          </a:p>
-        </p:txBody>
-      </p:sp>
-      <p:sp>
-        <p:nvSpPr>
-          <p:cNvPr id="22" name="Rounded Rectangle 21"/>
-          <p:cNvSpPr/>
-          <p:nvPr/>
-        </p:nvSpPr>
-        <p:spPr>
-          <a:xfrm>
-            <a:off x="4338218" y="4023360"/>
-            <a:ext cx="3515258" cy="2148840"/>
-          </a:xfrm>
-          <a:prstGeom prst="roundRect">
-            <a:avLst>
-              <a:gd name="adj" fmla="val 6000"/>
-            </a:avLst>
-          </a:prstGeom>
-          <a:solidFill>
-            <a:srgbClr val="EAF3FF"/>
-          </a:solidFill>
-          <a:ln>
-            <a:noFill/>
-          </a:ln>
-          <a:effectLst/>
-        </p:spPr>
-        <p:style>
-          <a:lnRef idx="1">
-            <a:schemeClr val="accent1"/>
-          </a:lnRef>
-          <a:fillRef idx="3">
-            <a:schemeClr val="accent1"/>
-          </a:fillRef>
-          <a:effectRef idx="2">
-            <a:schemeClr val="accent1"/>
-          </a:effectRef>
-          <a:fontRef idx="minor">
-            <a:schemeClr val="lt1"/>
-          </a:fontRef>
-        </p:style>
-        <p:txBody>
-          <a:bodyPr rtlCol="0" anchor="ctr"/>
-          <a:lstStyle/>
-          <a:p/>
-        </p:txBody>
-      </p:sp>
-      <p:sp>
-        <p:nvSpPr>
-          <p:cNvPr id="23" name="Oval 22"/>
-          <p:cNvSpPr/>
-          <p:nvPr/>
-        </p:nvSpPr>
-        <p:spPr>
-          <a:xfrm>
-            <a:off x="4566818" y="4251960"/>
-            <a:ext cx="457200" cy="457200"/>
-          </a:xfrm>
-          <a:prstGeom prst="ellipse">
-            <a:avLst/>
-          </a:prstGeom>
-          <a:solidFill>
-            <a:srgbClr val="F2B705"/>
-          </a:solidFill>
-          <a:ln>
-            <a:noFill/>
-          </a:ln>
-          <a:effectLst/>
-        </p:spPr>
-        <p:style>
-          <a:lnRef idx="1">
-            <a:schemeClr val="accent1"/>
-          </a:lnRef>
-          <a:fillRef idx="3">
-            <a:schemeClr val="accent1"/>
-          </a:fillRef>
-          <a:effectRef idx="2">
-            <a:schemeClr val="accent1"/>
-          </a:effectRef>
-          <a:fontRef idx="minor">
-            <a:schemeClr val="lt1"/>
-          </a:fontRef>
-        </p:style>
-        <p:txBody>
-          <a:bodyPr rtlCol="0" anchor="ctr" lIns="0" rIns="0" tIns="0" bIns="0"/>
-          <a:lstStyle/>
-          <a:p>
-            <a:pPr algn="ctr"/>
-            <a:r>
-              <a:rPr sz="1500" b="1">
-                <a:solidFill>
-                  <a:srgbClr val="202122"/>
-                </a:solidFill>
-                <a:latin typeface="Calibri"/>
-              </a:rPr>
-              <a:t>5</a:t>
-            </a:r>
-          </a:p>
-        </p:txBody>
-      </p:sp>
-      <p:sp>
-        <p:nvSpPr>
-          <p:cNvPr id="24" name="TextBox 23"/>
-          <p:cNvSpPr txBox="1"/>
-          <p:nvPr/>
-        </p:nvSpPr>
-        <p:spPr>
-          <a:xfrm>
-            <a:off x="5161178" y="4224528"/>
-            <a:ext cx="2509418" cy="512064"/>
-          </a:xfrm>
-          <a:prstGeom prst="rect">
-            <a:avLst/>
-          </a:prstGeom>
-          <a:noFill/>
-        </p:spPr>
-        <p:txBody>
-          <a:bodyPr wrap="square" anchor="ctr" lIns="0" rIns="0" tIns="0" bIns="0"/>
-          <a:lstStyle/>
-          <a:p>
-            <a:pPr algn="l"/>
-            <a:r>
-              <a:rPr sz="1900" b="1" i="0">
-                <a:solidFill>
-                  <a:srgbClr val="03306E"/>
-                </a:solidFill>
-                <a:latin typeface="Calibri"/>
-              </a:rPr>
-              <a:t>Sustainability</a:t>
-            </a:r>
-          </a:p>
-        </p:txBody>
-      </p:sp>
-      <p:sp>
-        <p:nvSpPr>
-          <p:cNvPr id="25" name="TextBox 24"/>
-          <p:cNvSpPr txBox="1"/>
-          <p:nvPr/>
-        </p:nvSpPr>
-        <p:spPr>
-          <a:xfrm>
-            <a:off x="4566818" y="4892040"/>
-            <a:ext cx="3058058" cy="1143000"/>
-          </a:xfrm>
-          <a:prstGeom prst="rect">
-            <a:avLst/>
-          </a:prstGeom>
-          <a:noFill/>
-        </p:spPr>
-        <p:txBody>
-          <a:bodyPr wrap="square" anchor="t" lIns="0" rIns="0" tIns="0" bIns="0"/>
-          <a:lstStyle/>
-          <a:p>
-            <a:pPr algn="l"/>
-            <a:r>
-              <a:rPr sz="2000" b="0" i="0">
-                <a:solidFill>
-                  <a:srgbClr val="202122"/>
-                </a:solidFill>
-                <a:latin typeface="Calibri"/>
-              </a:rPr>
-              <a:t>The circular economy.</a:t>
-            </a:r>
-          </a:p>
-        </p:txBody>
-      </p:sp>
-    </p:spTree>
-  </p:cSld>
-  <p:clrMapOvr>
-    <a:masterClrMapping/>
-  </p:clrMapOvr>
-</p:sld>
-</file>
-
 <file path=ppt/slides/slide6.xml><?xml version="1.0" encoding="utf-8"?>
 <p:sld xmlns:a="http://schemas.openxmlformats.org/drawingml/2006/main" xmlns:p="http://schemas.openxmlformats.org/presentationml/2006/main" xmlns:r="http://schemas.openxmlformats.org/officeDocument/2006/relationships">
   <p:cSld>
@@ -7052,7 +8994,7 @@
                 </a:solidFill>
                 <a:latin typeface="Cambria"/>
               </a:rPr>
-              <a:t>Check your understanding</a:t>
+              <a:t>Quick check: Historical advances</a:t>
             </a:r>
           </a:p>
         </p:txBody>
@@ -7131,8 +9073,8 @@
         </p:nvSpPr>
         <p:spPr>
           <a:xfrm>
-            <a:off x="548640" y="1618488"/>
-            <a:ext cx="411480" cy="411480"/>
+            <a:off x="548640" y="1691640"/>
+            <a:ext cx="502920" cy="502920"/>
           </a:xfrm>
           <a:prstGeom prst="ellipse">
             <a:avLst/>
@@ -7165,7 +9107,7 @@
           <a:p>
             <a:pPr algn="ctr"/>
             <a:r>
-              <a:rPr sz="1400" b="1">
+              <a:rPr sz="1600" b="1">
                 <a:solidFill>
                   <a:srgbClr val="202122"/>
                 </a:solidFill>
@@ -7184,8 +9126,8 @@
         </p:nvSpPr>
         <p:spPr>
           <a:xfrm>
-            <a:off x="1234440" y="1600200"/>
-            <a:ext cx="10408615" cy="1030986"/>
+            <a:off x="1371600" y="1645920"/>
+            <a:ext cx="10271455" cy="1188720"/>
           </a:xfrm>
           <a:prstGeom prst="rect">
             <a:avLst/>
@@ -7198,13 +9140,13 @@
           <a:p>
             <a:pPr algn="l"/>
             <a:r>
-              <a:rPr sz="2200" b="0" i="0">
+              <a:rPr sz="2400" b="0" i="0">
                 <a:solidFill>
                   <a:srgbClr val="202122"/>
                 </a:solidFill>
                 <a:latin typeface="Calibri"/>
               </a:rPr>
-              <a:t>Name three engineering sectors.</a:t>
+              <a:t>Why were replaceable parts important?</a:t>
             </a:r>
           </a:p>
         </p:txBody>
@@ -7217,8 +9159,8 @@
         </p:nvSpPr>
         <p:spPr>
           <a:xfrm>
-            <a:off x="548640" y="2814066"/>
-            <a:ext cx="411480" cy="411480"/>
+            <a:off x="548640" y="3108960"/>
+            <a:ext cx="502920" cy="502920"/>
           </a:xfrm>
           <a:prstGeom prst="ellipse">
             <a:avLst/>
@@ -7251,7 +9193,7 @@
           <a:p>
             <a:pPr algn="ctr"/>
             <a:r>
-              <a:rPr sz="1400" b="1">
+              <a:rPr sz="1600" b="1">
                 <a:solidFill>
                   <a:srgbClr val="202122"/>
                 </a:solidFill>
@@ -7270,8 +9212,8 @@
         </p:nvSpPr>
         <p:spPr>
           <a:xfrm>
-            <a:off x="1234440" y="2795778"/>
-            <a:ext cx="10408615" cy="1030986"/>
+            <a:off x="1371600" y="3063240"/>
+            <a:ext cx="10271455" cy="1188720"/>
           </a:xfrm>
           <a:prstGeom prst="rect">
             <a:avLst/>
@@ -7284,13 +9226,13 @@
           <a:p>
             <a:pPr algn="l"/>
             <a:r>
-              <a:rPr sz="2200" b="0" i="0">
+              <a:rPr sz="2400" b="0" i="0">
                 <a:solidFill>
                   <a:srgbClr val="202122"/>
                 </a:solidFill>
                 <a:latin typeface="Calibri"/>
               </a:rPr>
-              <a:t>How did replaceable parts change manufacturing?</a:t>
+              <a:t>Name two advances that changed transport.</a:t>
             </a:r>
           </a:p>
         </p:txBody>
@@ -7303,8 +9245,8 @@
         </p:nvSpPr>
         <p:spPr>
           <a:xfrm>
-            <a:off x="548640" y="4009644"/>
-            <a:ext cx="411480" cy="411480"/>
+            <a:off x="548640" y="4526280"/>
+            <a:ext cx="502920" cy="502920"/>
           </a:xfrm>
           <a:prstGeom prst="ellipse">
             <a:avLst/>
@@ -7337,7 +9279,7 @@
           <a:p>
             <a:pPr algn="ctr"/>
             <a:r>
-              <a:rPr sz="1400" b="1">
+              <a:rPr sz="1600" b="1">
                 <a:solidFill>
                   <a:srgbClr val="202122"/>
                 </a:solidFill>
@@ -7356,8 +9298,8 @@
         </p:nvSpPr>
         <p:spPr>
           <a:xfrm>
-            <a:off x="1234440" y="3991356"/>
-            <a:ext cx="10408615" cy="1030986"/>
+            <a:off x="1371600" y="4480560"/>
+            <a:ext cx="10271455" cy="1188720"/>
           </a:xfrm>
           <a:prstGeom prst="rect">
             <a:avLst/>
@@ -7370,80 +9312,27 @@
           <a:p>
             <a:pPr algn="l"/>
             <a:r>
-              <a:rPr sz="2200" b="0" i="0">
+              <a:rPr sz="2400" b="0" i="0">
                 <a:solidFill>
                   <a:srgbClr val="202122"/>
                 </a:solidFill>
                 <a:latin typeface="Calibri"/>
               </a:rPr>
-              <a:t>What is a cyber-physical system?</a:t>
-            </a:r>
-          </a:p>
-        </p:txBody>
-      </p:sp>
-      <p:sp>
-        <p:nvSpPr>
-          <p:cNvPr id="12" name="Oval 11"/>
-          <p:cNvSpPr/>
-          <p:nvPr/>
-        </p:nvSpPr>
-        <p:spPr>
-          <a:xfrm>
-            <a:off x="548640" y="5205221"/>
-            <a:ext cx="411480" cy="411480"/>
-          </a:xfrm>
-          <a:prstGeom prst="ellipse">
-            <a:avLst/>
-          </a:prstGeom>
-          <a:solidFill>
-            <a:srgbClr val="F2B705"/>
-          </a:solidFill>
-          <a:ln>
-            <a:noFill/>
-          </a:ln>
-          <a:effectLst/>
-        </p:spPr>
-        <p:style>
-          <a:lnRef idx="1">
-            <a:schemeClr val="accent1"/>
-          </a:lnRef>
-          <a:fillRef idx="3">
-            <a:schemeClr val="accent1"/>
-          </a:fillRef>
-          <a:effectRef idx="2">
-            <a:schemeClr val="accent1"/>
-          </a:effectRef>
-          <a:fontRef idx="minor">
-            <a:schemeClr val="lt1"/>
-          </a:fontRef>
-        </p:style>
-        <p:txBody>
-          <a:bodyPr rtlCol="0" anchor="ctr" lIns="0" rIns="0" tIns="0" bIns="0"/>
-          <a:lstStyle/>
-          <a:p>
-            <a:pPr algn="ctr"/>
-            <a:r>
-              <a:rPr sz="1400" b="1">
-                <a:solidFill>
-                  <a:srgbClr val="202122"/>
-                </a:solidFill>
-                <a:latin typeface="Calibri"/>
-              </a:rPr>
-              <a:t>4</a:t>
-            </a:r>
-          </a:p>
-        </p:txBody>
-      </p:sp>
-      <p:sp>
-        <p:nvSpPr>
-          <p:cNvPr id="13" name="TextBox 12"/>
+              <a:t>How did computers change manufacturing?</a:t>
+            </a:r>
+          </a:p>
+        </p:txBody>
+      </p:sp>
+      <p:sp>
+        <p:nvSpPr>
+          <p:cNvPr id="12" name="TextBox 11"/>
           <p:cNvSpPr txBox="1"/>
           <p:nvPr/>
         </p:nvSpPr>
         <p:spPr>
           <a:xfrm>
-            <a:off x="1234440" y="5186933"/>
-            <a:ext cx="10408615" cy="1030986"/>
+            <a:off x="548640" y="5852160"/>
+            <a:ext cx="11094415" cy="365760"/>
           </a:xfrm>
           <a:prstGeom prst="rect">
             <a:avLst/>
@@ -7456,13 +9345,13 @@
           <a:p>
             <a:pPr algn="l"/>
             <a:r>
-              <a:rPr sz="2200" b="0" i="0">
-                <a:solidFill>
-                  <a:srgbClr val="202122"/>
-                </a:solidFill>
-                <a:latin typeface="Calibri"/>
-              </a:rPr>
-              <a:t>What is the circular economy?</a:t>
+              <a:rPr sz="1300" b="0" i="1">
+                <a:solidFill>
+                  <a:srgbClr val="54595D"/>
+                </a:solidFill>
+                <a:latin typeface="Calibri"/>
+              </a:rPr>
+              <a:t>Answer on mini whiteboards or in your book. Answers are in the speaker notes.</a:t>
             </a:r>
           </a:p>
         </p:txBody>
@@ -7554,7 +9443,7 @@
                 </a:solidFill>
                 <a:latin typeface="Cambria"/>
               </a:rPr>
-              <a:t>Answers</a:t>
+              <a:t>Emerging trends</a:t>
             </a:r>
           </a:p>
         </p:txBody>
@@ -7627,14 +9516,113 @@
       </p:sp>
       <p:sp>
         <p:nvSpPr>
-          <p:cNvPr id="6" name="Oval 5"/>
+          <p:cNvPr id="6" name="TextBox 5"/>
+          <p:cNvSpPr txBox="1"/>
+          <p:nvPr/>
+        </p:nvSpPr>
+        <p:spPr>
+          <a:xfrm>
+            <a:off x="548640" y="1554480"/>
+            <a:ext cx="6720840" cy="4617720"/>
+          </a:xfrm>
+          <a:prstGeom prst="rect">
+            <a:avLst/>
+          </a:prstGeom>
+          <a:noFill/>
+        </p:spPr>
+        <p:txBody>
+          <a:bodyPr wrap="square" lIns="0" rIns="0" tIns="0" bIns="0">
+            <a:spAutoFit/>
+          </a:bodyPr>
+          <a:lstStyle/>
+          <a:p>
+            <a:pPr>
+              <a:spcAft>
+                <a:spcPts val="1320"/>
+              </a:spcAft>
+            </a:pPr>
+            <a:r>
+              <a:rPr sz="2200" b="0">
+                <a:solidFill>
+                  <a:srgbClr val="202122"/>
+                </a:solidFill>
+                <a:latin typeface="Calibri"/>
+              </a:rPr>
+              <a:t>Several trends are reshaping engineering.</a:t>
+            </a:r>
+          </a:p>
+          <a:p>
+            <a:pPr>
+              <a:spcAft>
+                <a:spcPts val="1320"/>
+              </a:spcAft>
+            </a:pPr>
+            <a:r>
+              <a:rPr sz="2200" b="0">
+                <a:solidFill>
+                  <a:srgbClr val="202122"/>
+                </a:solidFill>
+                <a:latin typeface="Calibri"/>
+              </a:rPr>
+              <a:t>Digitalisation, the Internet of Things and cloud computing connect machines and data. Cyber-physical systems tightly link physical equipment with software control. AI analyses data and optimises processes. Robotics, drones and autonomous systems take on repetitive or dangerous work. Virtual and augmented reality help with design and training. Distributed energy and hybrid technologies change how power is made and used. The circular economy keeps materials in use through reuse, repair and recycling.</a:t>
+            </a:r>
+          </a:p>
+        </p:txBody>
+      </p:sp>
+      <p:sp>
+        <p:nvSpPr>
+          <p:cNvPr id="7" name="Rounded Rectangle 6"/>
           <p:cNvSpPr/>
           <p:nvPr/>
         </p:nvSpPr>
         <p:spPr>
           <a:xfrm>
-            <a:off x="548640" y="1618488"/>
-            <a:ext cx="411480" cy="411480"/>
+            <a:off x="7772400" y="1554480"/>
+            <a:ext cx="3867912" cy="4526280"/>
+          </a:xfrm>
+          <a:prstGeom prst="roundRect">
+            <a:avLst>
+              <a:gd name="adj" fmla="val 8000"/>
+            </a:avLst>
+          </a:prstGeom>
+          <a:solidFill>
+            <a:srgbClr val="03306E"/>
+          </a:solidFill>
+          <a:ln>
+            <a:noFill/>
+          </a:ln>
+          <a:effectLst/>
+        </p:spPr>
+        <p:style>
+          <a:lnRef idx="1">
+            <a:schemeClr val="accent1"/>
+          </a:lnRef>
+          <a:fillRef idx="3">
+            <a:schemeClr val="accent1"/>
+          </a:fillRef>
+          <a:effectRef idx="2">
+            <a:schemeClr val="accent1"/>
+          </a:effectRef>
+          <a:fontRef idx="minor">
+            <a:schemeClr val="lt1"/>
+          </a:fontRef>
+        </p:style>
+        <p:txBody>
+          <a:bodyPr rtlCol="0" anchor="ctr"/>
+          <a:lstStyle/>
+          <a:p/>
+        </p:txBody>
+      </p:sp>
+      <p:sp>
+        <p:nvSpPr>
+          <p:cNvPr id="8" name="Oval 7"/>
+          <p:cNvSpPr/>
+          <p:nvPr/>
+        </p:nvSpPr>
+        <p:spPr>
+          <a:xfrm>
+            <a:off x="8046720" y="1828800"/>
+            <a:ext cx="548640" cy="548640"/>
           </a:xfrm>
           <a:prstGeom prst="ellipse">
             <a:avLst/>
@@ -7667,110 +9655,13 @@
           <a:p>
             <a:pPr algn="ctr"/>
             <a:r>
-              <a:rPr sz="1400" b="1">
+              <a:rPr sz="1300" b="1">
                 <a:solidFill>
                   <a:srgbClr val="202122"/>
                 </a:solidFill>
                 <a:latin typeface="Calibri"/>
               </a:rPr>
-              <a:t>1</a:t>
-            </a:r>
-          </a:p>
-        </p:txBody>
-      </p:sp>
-      <p:sp>
-        <p:nvSpPr>
-          <p:cNvPr id="7" name="TextBox 6"/>
-          <p:cNvSpPr txBox="1"/>
-          <p:nvPr/>
-        </p:nvSpPr>
-        <p:spPr>
-          <a:xfrm>
-            <a:off x="1234440" y="1600200"/>
-            <a:ext cx="10408615" cy="1030986"/>
-          </a:xfrm>
-          <a:prstGeom prst="rect">
-            <a:avLst/>
-          </a:prstGeom>
-          <a:noFill/>
-        </p:spPr>
-        <p:txBody>
-          <a:bodyPr wrap="square" anchor="t" lIns="0" rIns="0" tIns="0" bIns="0"/>
-          <a:lstStyle/>
-          <a:p>
-            <a:pPr algn="l"/>
-            <a:r>
-              <a:rPr sz="1800" b="0" i="0">
-                <a:solidFill>
-                  <a:srgbClr val="54595D"/>
-                </a:solidFill>
-                <a:latin typeface="Calibri"/>
-              </a:rPr>
-              <a:t>Name three engineering sectors.</a:t>
-            </a:r>
-          </a:p>
-          <a:p>
-            <a:r>
-              <a:rPr sz="1800" b="1">
-                <a:solidFill>
-                  <a:srgbClr val="03306E"/>
-                </a:solidFill>
-                <a:latin typeface="Calibri"/>
-              </a:rPr>
-              <a:t>Any three, e.g. aerospace, automotive, marine.</a:t>
-            </a:r>
-          </a:p>
-        </p:txBody>
-      </p:sp>
-      <p:sp>
-        <p:nvSpPr>
-          <p:cNvPr id="8" name="Oval 7"/>
-          <p:cNvSpPr/>
-          <p:nvPr/>
-        </p:nvSpPr>
-        <p:spPr>
-          <a:xfrm>
-            <a:off x="548640" y="2814066"/>
-            <a:ext cx="411480" cy="411480"/>
-          </a:xfrm>
-          <a:prstGeom prst="ellipse">
-            <a:avLst/>
-          </a:prstGeom>
-          <a:solidFill>
-            <a:srgbClr val="F2B705"/>
-          </a:solidFill>
-          <a:ln>
-            <a:noFill/>
-          </a:ln>
-          <a:effectLst/>
-        </p:spPr>
-        <p:style>
-          <a:lnRef idx="1">
-            <a:schemeClr val="accent1"/>
-          </a:lnRef>
-          <a:fillRef idx="3">
-            <a:schemeClr val="accent1"/>
-          </a:fillRef>
-          <a:effectRef idx="2">
-            <a:schemeClr val="accent1"/>
-          </a:effectRef>
-          <a:fontRef idx="minor">
-            <a:schemeClr val="lt1"/>
-          </a:fontRef>
-        </p:style>
-        <p:txBody>
-          <a:bodyPr rtlCol="0" anchor="ctr" lIns="0" rIns="0" tIns="0" bIns="0"/>
-          <a:lstStyle/>
-          <a:p>
-            <a:pPr algn="ctr"/>
-            <a:r>
-              <a:rPr sz="1400" b="1">
-                <a:solidFill>
-                  <a:srgbClr val="202122"/>
-                </a:solidFill>
-                <a:latin typeface="Calibri"/>
-              </a:rPr>
-              <a:t>2</a:t>
+              <a:t>e.g.</a:t>
             </a:r>
           </a:p>
         </p:txBody>
@@ -7783,8 +9674,8 @@
         </p:nvSpPr>
         <p:spPr>
           <a:xfrm>
-            <a:off x="1234440" y="2795778"/>
-            <a:ext cx="10408615" cy="1030986"/>
+            <a:off x="8046720" y="2560320"/>
+            <a:ext cx="3291840" cy="365760"/>
           </a:xfrm>
           <a:prstGeom prst="rect">
             <a:avLst/>
@@ -7797,91 +9688,27 @@
           <a:p>
             <a:pPr algn="l"/>
             <a:r>
-              <a:rPr sz="1800" b="0" i="0">
-                <a:solidFill>
-                  <a:srgbClr val="54595D"/>
-                </a:solidFill>
-                <a:latin typeface="Calibri"/>
-              </a:rPr>
-              <a:t>How did replaceable parts change manufacturing?</a:t>
-            </a:r>
-          </a:p>
-          <a:p>
-            <a:r>
-              <a:rPr sz="1800" b="1">
-                <a:solidFill>
-                  <a:srgbClr val="03306E"/>
-                </a:solidFill>
-                <a:latin typeface="Calibri"/>
-              </a:rPr>
-              <a:t>They enabled mass production and easy repair.</a:t>
-            </a:r>
-          </a:p>
-        </p:txBody>
-      </p:sp>
-      <p:sp>
-        <p:nvSpPr>
-          <p:cNvPr id="10" name="Oval 9"/>
-          <p:cNvSpPr/>
-          <p:nvPr/>
-        </p:nvSpPr>
-        <p:spPr>
-          <a:xfrm>
-            <a:off x="548640" y="4009644"/>
-            <a:ext cx="411480" cy="411480"/>
-          </a:xfrm>
-          <a:prstGeom prst="ellipse">
-            <a:avLst/>
-          </a:prstGeom>
-          <a:solidFill>
-            <a:srgbClr val="F2B705"/>
-          </a:solidFill>
-          <a:ln>
-            <a:noFill/>
-          </a:ln>
-          <a:effectLst/>
-        </p:spPr>
-        <p:style>
-          <a:lnRef idx="1">
-            <a:schemeClr val="accent1"/>
-          </a:lnRef>
-          <a:fillRef idx="3">
-            <a:schemeClr val="accent1"/>
-          </a:fillRef>
-          <a:effectRef idx="2">
-            <a:schemeClr val="accent1"/>
-          </a:effectRef>
-          <a:fontRef idx="minor">
-            <a:schemeClr val="lt1"/>
-          </a:fontRef>
-        </p:style>
-        <p:txBody>
-          <a:bodyPr rtlCol="0" anchor="ctr" lIns="0" rIns="0" tIns="0" bIns="0"/>
-          <a:lstStyle/>
-          <a:p>
-            <a:pPr algn="ctr"/>
-            <a:r>
-              <a:rPr sz="1400" b="1">
-                <a:solidFill>
-                  <a:srgbClr val="202122"/>
-                </a:solidFill>
-                <a:latin typeface="Calibri"/>
-              </a:rPr>
-              <a:t>3</a:t>
-            </a:r>
-          </a:p>
-        </p:txBody>
-      </p:sp>
-      <p:sp>
-        <p:nvSpPr>
-          <p:cNvPr id="11" name="TextBox 10"/>
+              <a:rPr sz="1300" b="1" i="0">
+                <a:solidFill>
+                  <a:srgbClr val="A9C8F0"/>
+                </a:solidFill>
+                <a:latin typeface="Calibri"/>
+              </a:rPr>
+              <a:t>EXAMPLE</a:t>
+            </a:r>
+          </a:p>
+        </p:txBody>
+      </p:sp>
+      <p:sp>
+        <p:nvSpPr>
+          <p:cNvPr id="10" name="TextBox 9"/>
           <p:cNvSpPr txBox="1"/>
           <p:nvPr/>
         </p:nvSpPr>
         <p:spPr>
           <a:xfrm>
-            <a:off x="1234440" y="3991356"/>
-            <a:ext cx="10408615" cy="1030986"/>
+            <a:off x="8046720" y="2971800"/>
+            <a:ext cx="3291840" cy="2971800"/>
           </a:xfrm>
           <a:prstGeom prst="rect">
             <a:avLst/>
@@ -7894,121 +9721,13 @@
           <a:p>
             <a:pPr algn="l"/>
             <a:r>
-              <a:rPr sz="1800" b="0" i="0">
-                <a:solidFill>
-                  <a:srgbClr val="54595D"/>
-                </a:solidFill>
-                <a:latin typeface="Calibri"/>
-              </a:rPr>
-              <a:t>What is a cyber-physical system?</a:t>
-            </a:r>
-          </a:p>
-          <a:p>
-            <a:r>
-              <a:rPr sz="1800" b="1">
-                <a:solidFill>
-                  <a:srgbClr val="03306E"/>
-                </a:solidFill>
-                <a:latin typeface="Calibri"/>
-              </a:rPr>
-              <a:t>Physical machinery tightly controlled by software and networks.</a:t>
-            </a:r>
-          </a:p>
-        </p:txBody>
-      </p:sp>
-      <p:sp>
-        <p:nvSpPr>
-          <p:cNvPr id="12" name="Oval 11"/>
-          <p:cNvSpPr/>
-          <p:nvPr/>
-        </p:nvSpPr>
-        <p:spPr>
-          <a:xfrm>
-            <a:off x="548640" y="5205221"/>
-            <a:ext cx="411480" cy="411480"/>
-          </a:xfrm>
-          <a:prstGeom prst="ellipse">
-            <a:avLst/>
-          </a:prstGeom>
-          <a:solidFill>
-            <a:srgbClr val="F2B705"/>
-          </a:solidFill>
-          <a:ln>
-            <a:noFill/>
-          </a:ln>
-          <a:effectLst/>
-        </p:spPr>
-        <p:style>
-          <a:lnRef idx="1">
-            <a:schemeClr val="accent1"/>
-          </a:lnRef>
-          <a:fillRef idx="3">
-            <a:schemeClr val="accent1"/>
-          </a:fillRef>
-          <a:effectRef idx="2">
-            <a:schemeClr val="accent1"/>
-          </a:effectRef>
-          <a:fontRef idx="minor">
-            <a:schemeClr val="lt1"/>
-          </a:fontRef>
-        </p:style>
-        <p:txBody>
-          <a:bodyPr rtlCol="0" anchor="ctr" lIns="0" rIns="0" tIns="0" bIns="0"/>
-          <a:lstStyle/>
-          <a:p>
-            <a:pPr algn="ctr"/>
-            <a:r>
-              <a:rPr sz="1400" b="1">
-                <a:solidFill>
-                  <a:srgbClr val="202122"/>
-                </a:solidFill>
-                <a:latin typeface="Calibri"/>
-              </a:rPr>
-              <a:t>4</a:t>
-            </a:r>
-          </a:p>
-        </p:txBody>
-      </p:sp>
-      <p:sp>
-        <p:nvSpPr>
-          <p:cNvPr id="13" name="TextBox 12"/>
-          <p:cNvSpPr txBox="1"/>
-          <p:nvPr/>
-        </p:nvSpPr>
-        <p:spPr>
-          <a:xfrm>
-            <a:off x="1234440" y="5186933"/>
-            <a:ext cx="10408615" cy="1030986"/>
-          </a:xfrm>
-          <a:prstGeom prst="rect">
-            <a:avLst/>
-          </a:prstGeom>
-          <a:noFill/>
-        </p:spPr>
-        <p:txBody>
-          <a:bodyPr wrap="square" anchor="t" lIns="0" rIns="0" tIns="0" bIns="0"/>
-          <a:lstStyle/>
-          <a:p>
-            <a:pPr algn="l"/>
-            <a:r>
-              <a:rPr sz="1800" b="0" i="0">
-                <a:solidFill>
-                  <a:srgbClr val="54595D"/>
-                </a:solidFill>
-                <a:latin typeface="Calibri"/>
-              </a:rPr>
-              <a:t>What is the circular economy?</a:t>
-            </a:r>
-          </a:p>
-          <a:p>
-            <a:r>
-              <a:rPr sz="1800" b="1">
-                <a:solidFill>
-                  <a:srgbClr val="03306E"/>
-                </a:solidFill>
-                <a:latin typeface="Calibri"/>
-              </a:rPr>
-              <a:t>Keeping materials in use through reuse, repair and recycling.</a:t>
+              <a:rPr sz="1900" b="0" i="0">
+                <a:solidFill>
+                  <a:srgbClr val="FFFFFF"/>
+                </a:solidFill>
+                <a:latin typeface="Cambria"/>
+              </a:rPr>
+              <a:t>A 'smart factory' uses IoT sensors on every machine, AI to predict breakdowns, and robots for assembly, all monitored from the cloud.</a:t>
             </a:r>
           </a:p>
         </p:txBody>
@@ -8100,7 +9819,7 @@
                 </a:solidFill>
                 <a:latin typeface="Cambria"/>
               </a:rPr>
-              <a:t>Activity: Timeline and forecast</a:t>
+              <a:t>Emerging trends</a:t>
             </a:r>
           </a:p>
         </p:txBody>
@@ -8179,13 +9898,55 @@
         </p:nvSpPr>
         <p:spPr>
           <a:xfrm>
-            <a:off x="548640" y="1508760"/>
-            <a:ext cx="2011680" cy="457200"/>
+            <a:off x="548640" y="1600200"/>
+            <a:ext cx="3515258" cy="2148840"/>
           </a:xfrm>
           <a:prstGeom prst="roundRect">
             <a:avLst>
-              <a:gd name="adj" fmla="val 50000"/>
+              <a:gd name="adj" fmla="val 6000"/>
             </a:avLst>
+          </a:prstGeom>
+          <a:solidFill>
+            <a:srgbClr val="EAF3FF"/>
+          </a:solidFill>
+          <a:ln>
+            <a:noFill/>
+          </a:ln>
+          <a:effectLst/>
+        </p:spPr>
+        <p:style>
+          <a:lnRef idx="1">
+            <a:schemeClr val="accent1"/>
+          </a:lnRef>
+          <a:fillRef idx="3">
+            <a:schemeClr val="accent1"/>
+          </a:fillRef>
+          <a:effectRef idx="2">
+            <a:schemeClr val="accent1"/>
+          </a:effectRef>
+          <a:fontRef idx="minor">
+            <a:schemeClr val="lt1"/>
+          </a:fontRef>
+        </p:style>
+        <p:txBody>
+          <a:bodyPr rtlCol="0" anchor="ctr"/>
+          <a:lstStyle/>
+          <a:p/>
+        </p:txBody>
+      </p:sp>
+      <p:sp>
+        <p:nvSpPr>
+          <p:cNvPr id="7" name="Oval 6"/>
+          <p:cNvSpPr/>
+          <p:nvPr/>
+        </p:nvSpPr>
+        <p:spPr>
+          <a:xfrm>
+            <a:off x="777240" y="1828800"/>
+            <a:ext cx="457200" cy="457200"/>
+          </a:xfrm>
+          <a:prstGeom prst="ellipse">
+            <a:avLst/>
           </a:prstGeom>
           <a:solidFill>
             <a:srgbClr val="F2B705"/>
@@ -8210,40 +9971,18 @@
           </a:fontRef>
         </p:style>
         <p:txBody>
-          <a:bodyPr rtlCol="0" anchor="ctr"/>
-          <a:lstStyle/>
-          <a:p/>
-        </p:txBody>
-      </p:sp>
-      <p:sp>
-        <p:nvSpPr>
-          <p:cNvPr id="7" name="TextBox 6"/>
-          <p:cNvSpPr txBox="1"/>
-          <p:nvPr/>
-        </p:nvSpPr>
-        <p:spPr>
-          <a:xfrm>
-            <a:off x="548640" y="1508760"/>
-            <a:ext cx="2011680" cy="457200"/>
-          </a:xfrm>
-          <a:prstGeom prst="rect">
-            <a:avLst/>
-          </a:prstGeom>
-          <a:noFill/>
-        </p:spPr>
-        <p:txBody>
-          <a:bodyPr wrap="square" anchor="ctr" lIns="0" rIns="0" tIns="0" bIns="0"/>
+          <a:bodyPr rtlCol="0" anchor="ctr" lIns="0" rIns="0" tIns="0" bIns="0"/>
           <a:lstStyle/>
           <a:p>
             <a:pPr algn="ctr"/>
             <a:r>
-              <a:rPr sz="1400" b="1" i="0">
+              <a:rPr sz="1500" b="1">
                 <a:solidFill>
                   <a:srgbClr val="202122"/>
                 </a:solidFill>
                 <a:latin typeface="Calibri"/>
               </a:rPr>
-              <a:t>25 minutes</a:t>
+              <a:t>1</a:t>
             </a:r>
           </a:p>
         </p:txBody>
@@ -8256,8 +9995,8 @@
         </p:nvSpPr>
         <p:spPr>
           <a:xfrm>
-            <a:off x="2743200" y="1508760"/>
-            <a:ext cx="4754880" cy="457200"/>
+            <a:off x="1371600" y="1801368"/>
+            <a:ext cx="2509418" cy="512064"/>
           </a:xfrm>
           <a:prstGeom prst="rect">
             <a:avLst/>
@@ -8270,375 +10009,64 @@
           <a:p>
             <a:pPr algn="l"/>
             <a:r>
-              <a:rPr sz="1400" b="0" i="1">
-                <a:solidFill>
-                  <a:srgbClr val="54595D"/>
-                </a:solidFill>
-                <a:latin typeface="Calibri"/>
-              </a:rPr>
-              <a:t>Small groups</a:t>
-            </a:r>
-          </a:p>
-        </p:txBody>
-      </p:sp>
-      <p:sp>
-        <p:nvSpPr>
-          <p:cNvPr id="9" name="Oval 8"/>
+              <a:rPr sz="1900" b="1" i="0">
+                <a:solidFill>
+                  <a:srgbClr val="03306E"/>
+                </a:solidFill>
+                <a:latin typeface="Calibri"/>
+              </a:rPr>
+              <a:t>Digital</a:t>
+            </a:r>
+          </a:p>
+        </p:txBody>
+      </p:sp>
+      <p:sp>
+        <p:nvSpPr>
+          <p:cNvPr id="9" name="TextBox 8"/>
+          <p:cNvSpPr txBox="1"/>
+          <p:nvPr/>
+        </p:nvSpPr>
+        <p:spPr>
+          <a:xfrm>
+            <a:off x="777240" y="2468880"/>
+            <a:ext cx="3058058" cy="1143000"/>
+          </a:xfrm>
+          <a:prstGeom prst="rect">
+            <a:avLst/>
+          </a:prstGeom>
+          <a:noFill/>
+        </p:spPr>
+        <p:txBody>
+          <a:bodyPr wrap="square" anchor="t" lIns="0" rIns="0" tIns="0" bIns="0"/>
+          <a:lstStyle/>
+          <a:p>
+            <a:pPr algn="l"/>
+            <a:r>
+              <a:rPr sz="2000" b="0" i="0">
+                <a:solidFill>
+                  <a:srgbClr val="202122"/>
+                </a:solidFill>
+                <a:latin typeface="Calibri"/>
+              </a:rPr>
+              <a:t>AI, digitalisation, IoT, cloud computing, cyber-physical systems.</a:t>
+            </a:r>
+          </a:p>
+        </p:txBody>
+      </p:sp>
+      <p:sp>
+        <p:nvSpPr>
+          <p:cNvPr id="10" name="Rounded Rectangle 9"/>
           <p:cNvSpPr/>
           <p:nvPr/>
         </p:nvSpPr>
         <p:spPr>
           <a:xfrm>
-            <a:off x="548640" y="2482596"/>
-            <a:ext cx="384048" cy="384048"/>
-          </a:xfrm>
-          <a:prstGeom prst="ellipse">
-            <a:avLst/>
-          </a:prstGeom>
-          <a:solidFill>
-            <a:srgbClr val="0645AD"/>
-          </a:solidFill>
-          <a:ln>
-            <a:noFill/>
-          </a:ln>
-          <a:effectLst/>
-        </p:spPr>
-        <p:style>
-          <a:lnRef idx="1">
-            <a:schemeClr val="accent1"/>
-          </a:lnRef>
-          <a:fillRef idx="3">
-            <a:schemeClr val="accent1"/>
-          </a:fillRef>
-          <a:effectRef idx="2">
-            <a:schemeClr val="accent1"/>
-          </a:effectRef>
-          <a:fontRef idx="minor">
-            <a:schemeClr val="lt1"/>
-          </a:fontRef>
-        </p:style>
-        <p:txBody>
-          <a:bodyPr rtlCol="0" anchor="ctr" lIns="0" rIns="0" tIns="0" bIns="0"/>
-          <a:lstStyle/>
-          <a:p>
-            <a:pPr algn="ctr"/>
-            <a:r>
-              <a:rPr sz="1300" b="1">
-                <a:solidFill>
-                  <a:srgbClr val="FFFFFF"/>
-                </a:solidFill>
-                <a:latin typeface="Calibri"/>
-              </a:rPr>
-              <a:t>1</a:t>
-            </a:r>
-          </a:p>
-        </p:txBody>
-      </p:sp>
-      <p:sp>
-        <p:nvSpPr>
-          <p:cNvPr id="10" name="TextBox 9"/>
-          <p:cNvSpPr txBox="1"/>
-          <p:nvPr/>
-        </p:nvSpPr>
-        <p:spPr>
-          <a:xfrm>
-            <a:off x="1143000" y="2240280"/>
-            <a:ext cx="5943600" cy="868680"/>
-          </a:xfrm>
-          <a:prstGeom prst="rect">
-            <a:avLst/>
-          </a:prstGeom>
-          <a:noFill/>
-        </p:spPr>
-        <p:txBody>
-          <a:bodyPr wrap="square" anchor="ctr" lIns="0" rIns="0" tIns="0" bIns="0"/>
-          <a:lstStyle/>
-          <a:p>
-            <a:pPr algn="l"/>
-            <a:r>
-              <a:rPr sz="1700" b="0" i="0">
-                <a:solidFill>
-                  <a:srgbClr val="202122"/>
-                </a:solidFill>
-                <a:latin typeface="Calibri"/>
-              </a:rPr>
-              <a:t>Pick one sector.</a:t>
-            </a:r>
-          </a:p>
-        </p:txBody>
-      </p:sp>
-      <p:sp>
-        <p:nvSpPr>
-          <p:cNvPr id="11" name="Oval 10"/>
-          <p:cNvSpPr/>
-          <p:nvPr/>
-        </p:nvSpPr>
-        <p:spPr>
-          <a:xfrm>
-            <a:off x="548640" y="3461004"/>
-            <a:ext cx="384048" cy="384048"/>
-          </a:xfrm>
-          <a:prstGeom prst="ellipse">
-            <a:avLst/>
-          </a:prstGeom>
-          <a:solidFill>
-            <a:srgbClr val="0645AD"/>
-          </a:solidFill>
-          <a:ln>
-            <a:noFill/>
-          </a:ln>
-          <a:effectLst/>
-        </p:spPr>
-        <p:style>
-          <a:lnRef idx="1">
-            <a:schemeClr val="accent1"/>
-          </a:lnRef>
-          <a:fillRef idx="3">
-            <a:schemeClr val="accent1"/>
-          </a:fillRef>
-          <a:effectRef idx="2">
-            <a:schemeClr val="accent1"/>
-          </a:effectRef>
-          <a:fontRef idx="minor">
-            <a:schemeClr val="lt1"/>
-          </a:fontRef>
-        </p:style>
-        <p:txBody>
-          <a:bodyPr rtlCol="0" anchor="ctr" lIns="0" rIns="0" tIns="0" bIns="0"/>
-          <a:lstStyle/>
-          <a:p>
-            <a:pPr algn="ctr"/>
-            <a:r>
-              <a:rPr sz="1300" b="1">
-                <a:solidFill>
-                  <a:srgbClr val="FFFFFF"/>
-                </a:solidFill>
-                <a:latin typeface="Calibri"/>
-              </a:rPr>
-              <a:t>2</a:t>
-            </a:r>
-          </a:p>
-        </p:txBody>
-      </p:sp>
-      <p:sp>
-        <p:nvSpPr>
-          <p:cNvPr id="12" name="TextBox 11"/>
-          <p:cNvSpPr txBox="1"/>
-          <p:nvPr/>
-        </p:nvSpPr>
-        <p:spPr>
-          <a:xfrm>
-            <a:off x="1143000" y="3218688"/>
-            <a:ext cx="5943600" cy="868680"/>
-          </a:xfrm>
-          <a:prstGeom prst="rect">
-            <a:avLst/>
-          </a:prstGeom>
-          <a:noFill/>
-        </p:spPr>
-        <p:txBody>
-          <a:bodyPr wrap="square" anchor="ctr" lIns="0" rIns="0" tIns="0" bIns="0"/>
-          <a:lstStyle/>
-          <a:p>
-            <a:pPr algn="l"/>
-            <a:r>
-              <a:rPr sz="1700" b="0" i="0">
-                <a:solidFill>
-                  <a:srgbClr val="202122"/>
-                </a:solidFill>
-                <a:latin typeface="Calibri"/>
-              </a:rPr>
-              <a:t>Build a timeline of four key advances in that sector.</a:t>
-            </a:r>
-          </a:p>
-        </p:txBody>
-      </p:sp>
-      <p:sp>
-        <p:nvSpPr>
-          <p:cNvPr id="13" name="Oval 12"/>
-          <p:cNvSpPr/>
-          <p:nvPr/>
-        </p:nvSpPr>
-        <p:spPr>
-          <a:xfrm>
-            <a:off x="548640" y="4439412"/>
-            <a:ext cx="384048" cy="384048"/>
-          </a:xfrm>
-          <a:prstGeom prst="ellipse">
-            <a:avLst/>
-          </a:prstGeom>
-          <a:solidFill>
-            <a:srgbClr val="0645AD"/>
-          </a:solidFill>
-          <a:ln>
-            <a:noFill/>
-          </a:ln>
-          <a:effectLst/>
-        </p:spPr>
-        <p:style>
-          <a:lnRef idx="1">
-            <a:schemeClr val="accent1"/>
-          </a:lnRef>
-          <a:fillRef idx="3">
-            <a:schemeClr val="accent1"/>
-          </a:fillRef>
-          <a:effectRef idx="2">
-            <a:schemeClr val="accent1"/>
-          </a:effectRef>
-          <a:fontRef idx="minor">
-            <a:schemeClr val="lt1"/>
-          </a:fontRef>
-        </p:style>
-        <p:txBody>
-          <a:bodyPr rtlCol="0" anchor="ctr" lIns="0" rIns="0" tIns="0" bIns="0"/>
-          <a:lstStyle/>
-          <a:p>
-            <a:pPr algn="ctr"/>
-            <a:r>
-              <a:rPr sz="1300" b="1">
-                <a:solidFill>
-                  <a:srgbClr val="FFFFFF"/>
-                </a:solidFill>
-                <a:latin typeface="Calibri"/>
-              </a:rPr>
-              <a:t>3</a:t>
-            </a:r>
-          </a:p>
-        </p:txBody>
-      </p:sp>
-      <p:sp>
-        <p:nvSpPr>
-          <p:cNvPr id="14" name="TextBox 13"/>
-          <p:cNvSpPr txBox="1"/>
-          <p:nvPr/>
-        </p:nvSpPr>
-        <p:spPr>
-          <a:xfrm>
-            <a:off x="1143000" y="4197096"/>
-            <a:ext cx="5943600" cy="868680"/>
-          </a:xfrm>
-          <a:prstGeom prst="rect">
-            <a:avLst/>
-          </a:prstGeom>
-          <a:noFill/>
-        </p:spPr>
-        <p:txBody>
-          <a:bodyPr wrap="square" anchor="ctr" lIns="0" rIns="0" tIns="0" bIns="0"/>
-          <a:lstStyle/>
-          <a:p>
-            <a:pPr algn="l"/>
-            <a:r>
-              <a:rPr sz="1700" b="0" i="0">
-                <a:solidFill>
-                  <a:srgbClr val="202122"/>
-                </a:solidFill>
-                <a:latin typeface="Calibri"/>
-              </a:rPr>
-              <a:t>Predict how two emerging technologies will change it by 2040.</a:t>
-            </a:r>
-          </a:p>
-        </p:txBody>
-      </p:sp>
-      <p:sp>
-        <p:nvSpPr>
-          <p:cNvPr id="15" name="Oval 14"/>
-          <p:cNvSpPr/>
-          <p:nvPr/>
-        </p:nvSpPr>
-        <p:spPr>
-          <a:xfrm>
-            <a:off x="548640" y="5417820"/>
-            <a:ext cx="384048" cy="384048"/>
-          </a:xfrm>
-          <a:prstGeom prst="ellipse">
-            <a:avLst/>
-          </a:prstGeom>
-          <a:solidFill>
-            <a:srgbClr val="0645AD"/>
-          </a:solidFill>
-          <a:ln>
-            <a:noFill/>
-          </a:ln>
-          <a:effectLst/>
-        </p:spPr>
-        <p:style>
-          <a:lnRef idx="1">
-            <a:schemeClr val="accent1"/>
-          </a:lnRef>
-          <a:fillRef idx="3">
-            <a:schemeClr val="accent1"/>
-          </a:fillRef>
-          <a:effectRef idx="2">
-            <a:schemeClr val="accent1"/>
-          </a:effectRef>
-          <a:fontRef idx="minor">
-            <a:schemeClr val="lt1"/>
-          </a:fontRef>
-        </p:style>
-        <p:txBody>
-          <a:bodyPr rtlCol="0" anchor="ctr" lIns="0" rIns="0" tIns="0" bIns="0"/>
-          <a:lstStyle/>
-          <a:p>
-            <a:pPr algn="ctr"/>
-            <a:r>
-              <a:rPr sz="1300" b="1">
-                <a:solidFill>
-                  <a:srgbClr val="FFFFFF"/>
-                </a:solidFill>
-                <a:latin typeface="Calibri"/>
-              </a:rPr>
-              <a:t>4</a:t>
-            </a:r>
-          </a:p>
-        </p:txBody>
-      </p:sp>
-      <p:sp>
-        <p:nvSpPr>
-          <p:cNvPr id="16" name="TextBox 15"/>
-          <p:cNvSpPr txBox="1"/>
-          <p:nvPr/>
-        </p:nvSpPr>
-        <p:spPr>
-          <a:xfrm>
-            <a:off x="1143000" y="5175504"/>
-            <a:ext cx="5943600" cy="868680"/>
-          </a:xfrm>
-          <a:prstGeom prst="rect">
-            <a:avLst/>
-          </a:prstGeom>
-          <a:noFill/>
-        </p:spPr>
-        <p:txBody>
-          <a:bodyPr wrap="square" anchor="ctr" lIns="0" rIns="0" tIns="0" bIns="0"/>
-          <a:lstStyle/>
-          <a:p>
-            <a:pPr algn="l"/>
-            <a:r>
-              <a:rPr sz="1700" b="0" i="0">
-                <a:solidFill>
-                  <a:srgbClr val="202122"/>
-                </a:solidFill>
-                <a:latin typeface="Calibri"/>
-              </a:rPr>
-              <a:t>Present your forecast in two minutes.</a:t>
-            </a:r>
-          </a:p>
-        </p:txBody>
-      </p:sp>
-      <p:sp>
-        <p:nvSpPr>
-          <p:cNvPr id="17" name="Rounded Rectangle 16"/>
-          <p:cNvSpPr/>
-          <p:nvPr/>
-        </p:nvSpPr>
-        <p:spPr>
-          <a:xfrm>
-            <a:off x="7772400" y="1508760"/>
-            <a:ext cx="3867912" cy="4572000"/>
+            <a:off x="4338218" y="1600200"/>
+            <a:ext cx="3515258" cy="2148840"/>
           </a:xfrm>
           <a:prstGeom prst="roundRect">
             <a:avLst>
-              <a:gd name="adj" fmla="val 8000"/>
+              <a:gd name="adj" fmla="val 6000"/>
             </a:avLst>
           </a:prstGeom>
           <a:solidFill>
@@ -8671,14 +10099,67 @@
       </p:sp>
       <p:sp>
         <p:nvSpPr>
-          <p:cNvPr id="18" name="TextBox 17"/>
+          <p:cNvPr id="11" name="Oval 10"/>
+          <p:cNvSpPr/>
+          <p:nvPr/>
+        </p:nvSpPr>
+        <p:spPr>
+          <a:xfrm>
+            <a:off x="4566818" y="1828800"/>
+            <a:ext cx="457200" cy="457200"/>
+          </a:xfrm>
+          <a:prstGeom prst="ellipse">
+            <a:avLst/>
+          </a:prstGeom>
+          <a:solidFill>
+            <a:srgbClr val="F2B705"/>
+          </a:solidFill>
+          <a:ln>
+            <a:noFill/>
+          </a:ln>
+          <a:effectLst/>
+        </p:spPr>
+        <p:style>
+          <a:lnRef idx="1">
+            <a:schemeClr val="accent1"/>
+          </a:lnRef>
+          <a:fillRef idx="3">
+            <a:schemeClr val="accent1"/>
+          </a:fillRef>
+          <a:effectRef idx="2">
+            <a:schemeClr val="accent1"/>
+          </a:effectRef>
+          <a:fontRef idx="minor">
+            <a:schemeClr val="lt1"/>
+          </a:fontRef>
+        </p:style>
+        <p:txBody>
+          <a:bodyPr rtlCol="0" anchor="ctr" lIns="0" rIns="0" tIns="0" bIns="0"/>
+          <a:lstStyle/>
+          <a:p>
+            <a:pPr algn="ctr"/>
+            <a:r>
+              <a:rPr sz="1500" b="1">
+                <a:solidFill>
+                  <a:srgbClr val="202122"/>
+                </a:solidFill>
+                <a:latin typeface="Calibri"/>
+              </a:rPr>
+              <a:t>2</a:t>
+            </a:r>
+          </a:p>
+        </p:txBody>
+      </p:sp>
+      <p:sp>
+        <p:nvSpPr>
+          <p:cNvPr id="12" name="TextBox 11"/>
           <p:cNvSpPr txBox="1"/>
           <p:nvPr/>
         </p:nvSpPr>
         <p:spPr>
           <a:xfrm>
-            <a:off x="8046720" y="1737360"/>
-            <a:ext cx="3291840" cy="365760"/>
+            <a:off x="5161178" y="1801368"/>
+            <a:ext cx="2509418" cy="512064"/>
           </a:xfrm>
           <a:prstGeom prst="rect">
             <a:avLst/>
@@ -8686,32 +10167,162 @@
           <a:noFill/>
         </p:spPr>
         <p:txBody>
+          <a:bodyPr wrap="square" anchor="ctr" lIns="0" rIns="0" tIns="0" bIns="0"/>
+          <a:lstStyle/>
+          <a:p>
+            <a:pPr algn="l"/>
+            <a:r>
+              <a:rPr sz="1900" b="1" i="0">
+                <a:solidFill>
+                  <a:srgbClr val="03306E"/>
+                </a:solidFill>
+                <a:latin typeface="Calibri"/>
+              </a:rPr>
+              <a:t>Automation</a:t>
+            </a:r>
+          </a:p>
+        </p:txBody>
+      </p:sp>
+      <p:sp>
+        <p:nvSpPr>
+          <p:cNvPr id="13" name="TextBox 12"/>
+          <p:cNvSpPr txBox="1"/>
+          <p:nvPr/>
+        </p:nvSpPr>
+        <p:spPr>
+          <a:xfrm>
+            <a:off x="4566818" y="2468880"/>
+            <a:ext cx="3058058" cy="1143000"/>
+          </a:xfrm>
+          <a:prstGeom prst="rect">
+            <a:avLst/>
+          </a:prstGeom>
+          <a:noFill/>
+        </p:spPr>
+        <p:txBody>
           <a:bodyPr wrap="square" anchor="t" lIns="0" rIns="0" tIns="0" bIns="0"/>
           <a:lstStyle/>
           <a:p>
             <a:pPr algn="l"/>
             <a:r>
-              <a:rPr sz="1300" b="1" i="0">
-                <a:solidFill>
-                  <a:srgbClr val="0645AD"/>
-                </a:solidFill>
-                <a:latin typeface="Calibri"/>
-              </a:rPr>
-              <a:t>SUCCESS CRITERIA</a:t>
-            </a:r>
-          </a:p>
-        </p:txBody>
-      </p:sp>
-      <p:sp>
-        <p:nvSpPr>
-          <p:cNvPr id="19" name="TextBox 18"/>
+              <a:rPr sz="2000" b="0" i="0">
+                <a:solidFill>
+                  <a:srgbClr val="202122"/>
+                </a:solidFill>
+                <a:latin typeface="Calibri"/>
+              </a:rPr>
+              <a:t>Robotics, drones, autonomous systems.</a:t>
+            </a:r>
+          </a:p>
+        </p:txBody>
+      </p:sp>
+      <p:sp>
+        <p:nvSpPr>
+          <p:cNvPr id="14" name="Rounded Rectangle 13"/>
+          <p:cNvSpPr/>
+          <p:nvPr/>
+        </p:nvSpPr>
+        <p:spPr>
+          <a:xfrm>
+            <a:off x="8127796" y="1600200"/>
+            <a:ext cx="3515258" cy="2148840"/>
+          </a:xfrm>
+          <a:prstGeom prst="roundRect">
+            <a:avLst>
+              <a:gd name="adj" fmla="val 6000"/>
+            </a:avLst>
+          </a:prstGeom>
+          <a:solidFill>
+            <a:srgbClr val="EAF3FF"/>
+          </a:solidFill>
+          <a:ln>
+            <a:noFill/>
+          </a:ln>
+          <a:effectLst/>
+        </p:spPr>
+        <p:style>
+          <a:lnRef idx="1">
+            <a:schemeClr val="accent1"/>
+          </a:lnRef>
+          <a:fillRef idx="3">
+            <a:schemeClr val="accent1"/>
+          </a:fillRef>
+          <a:effectRef idx="2">
+            <a:schemeClr val="accent1"/>
+          </a:effectRef>
+          <a:fontRef idx="minor">
+            <a:schemeClr val="lt1"/>
+          </a:fontRef>
+        </p:style>
+        <p:txBody>
+          <a:bodyPr rtlCol="0" anchor="ctr"/>
+          <a:lstStyle/>
+          <a:p/>
+        </p:txBody>
+      </p:sp>
+      <p:sp>
+        <p:nvSpPr>
+          <p:cNvPr id="15" name="Oval 14"/>
+          <p:cNvSpPr/>
+          <p:nvPr/>
+        </p:nvSpPr>
+        <p:spPr>
+          <a:xfrm>
+            <a:off x="8356396" y="1828800"/>
+            <a:ext cx="457200" cy="457200"/>
+          </a:xfrm>
+          <a:prstGeom prst="ellipse">
+            <a:avLst/>
+          </a:prstGeom>
+          <a:solidFill>
+            <a:srgbClr val="F2B705"/>
+          </a:solidFill>
+          <a:ln>
+            <a:noFill/>
+          </a:ln>
+          <a:effectLst/>
+        </p:spPr>
+        <p:style>
+          <a:lnRef idx="1">
+            <a:schemeClr val="accent1"/>
+          </a:lnRef>
+          <a:fillRef idx="3">
+            <a:schemeClr val="accent1"/>
+          </a:fillRef>
+          <a:effectRef idx="2">
+            <a:schemeClr val="accent1"/>
+          </a:effectRef>
+          <a:fontRef idx="minor">
+            <a:schemeClr val="lt1"/>
+          </a:fontRef>
+        </p:style>
+        <p:txBody>
+          <a:bodyPr rtlCol="0" anchor="ctr" lIns="0" rIns="0" tIns="0" bIns="0"/>
+          <a:lstStyle/>
+          <a:p>
+            <a:pPr algn="ctr"/>
+            <a:r>
+              <a:rPr sz="1500" b="1">
+                <a:solidFill>
+                  <a:srgbClr val="202122"/>
+                </a:solidFill>
+                <a:latin typeface="Calibri"/>
+              </a:rPr>
+              <a:t>3</a:t>
+            </a:r>
+          </a:p>
+        </p:txBody>
+      </p:sp>
+      <p:sp>
+        <p:nvSpPr>
+          <p:cNvPr id="16" name="TextBox 15"/>
           <p:cNvSpPr txBox="1"/>
           <p:nvPr/>
         </p:nvSpPr>
         <p:spPr>
           <a:xfrm>
-            <a:off x="8046720" y="2240280"/>
-            <a:ext cx="3337560" cy="3657600"/>
+            <a:off x="8950756" y="1801368"/>
+            <a:ext cx="2509418" cy="512064"/>
           </a:xfrm>
           <a:prstGeom prst="rect">
             <a:avLst/>
@@ -8719,71 +10330,377 @@
           <a:noFill/>
         </p:spPr>
         <p:txBody>
-          <a:bodyPr wrap="square" lIns="0" rIns="0" tIns="0" bIns="0">
-            <a:spAutoFit/>
-          </a:bodyPr>
-          <a:lstStyle/>
-          <a:p>
-            <a:pPr marL="274320" indent="-274320">
-              <a:spcAft>
-                <a:spcPts val="810"/>
-              </a:spcAft>
-              <a:buClr>
-                <a:srgbClr val="0645AD"/>
-              </a:buClr>
-              <a:buFont typeface="Arial"/>
-              <a:buChar char="•"/>
-            </a:pPr>
-            <a:r>
-              <a:rPr sz="1800" b="0">
+          <a:bodyPr wrap="square" anchor="ctr" lIns="0" rIns="0" tIns="0" bIns="0"/>
+          <a:lstStyle/>
+          <a:p>
+            <a:pPr algn="l"/>
+            <a:r>
+              <a:rPr sz="1900" b="1" i="0">
+                <a:solidFill>
+                  <a:srgbClr val="03306E"/>
+                </a:solidFill>
+                <a:latin typeface="Calibri"/>
+              </a:rPr>
+              <a:t>Reality</a:t>
+            </a:r>
+          </a:p>
+        </p:txBody>
+      </p:sp>
+      <p:sp>
+        <p:nvSpPr>
+          <p:cNvPr id="17" name="TextBox 16"/>
+          <p:cNvSpPr txBox="1"/>
+          <p:nvPr/>
+        </p:nvSpPr>
+        <p:spPr>
+          <a:xfrm>
+            <a:off x="8356396" y="2468880"/>
+            <a:ext cx="3058058" cy="1143000"/>
+          </a:xfrm>
+          <a:prstGeom prst="rect">
+            <a:avLst/>
+          </a:prstGeom>
+          <a:noFill/>
+        </p:spPr>
+        <p:txBody>
+          <a:bodyPr wrap="square" anchor="t" lIns="0" rIns="0" tIns="0" bIns="0"/>
+          <a:lstStyle/>
+          <a:p>
+            <a:pPr algn="l"/>
+            <a:r>
+              <a:rPr sz="2000" b="0" i="0">
                 <a:solidFill>
                   <a:srgbClr val="202122"/>
                 </a:solidFill>
                 <a:latin typeface="Calibri"/>
               </a:rPr>
-              <a:t>Advances in correct order</a:t>
-            </a:r>
-          </a:p>
-          <a:p>
-            <a:pPr marL="274320" indent="-274320">
-              <a:spcAft>
-                <a:spcPts val="810"/>
-              </a:spcAft>
-              <a:buClr>
-                <a:srgbClr val="0645AD"/>
-              </a:buClr>
-              <a:buFont typeface="Arial"/>
-              <a:buChar char="•"/>
-            </a:pPr>
-            <a:r>
-              <a:rPr sz="1800" b="0">
+              <a:t>Virtual and augmented reality for design and training.</a:t>
+            </a:r>
+          </a:p>
+        </p:txBody>
+      </p:sp>
+      <p:sp>
+        <p:nvSpPr>
+          <p:cNvPr id="18" name="Rounded Rectangle 17"/>
+          <p:cNvSpPr/>
+          <p:nvPr/>
+        </p:nvSpPr>
+        <p:spPr>
+          <a:xfrm>
+            <a:off x="548640" y="4023360"/>
+            <a:ext cx="3515258" cy="2148840"/>
+          </a:xfrm>
+          <a:prstGeom prst="roundRect">
+            <a:avLst>
+              <a:gd name="adj" fmla="val 6000"/>
+            </a:avLst>
+          </a:prstGeom>
+          <a:solidFill>
+            <a:srgbClr val="EAF3FF"/>
+          </a:solidFill>
+          <a:ln>
+            <a:noFill/>
+          </a:ln>
+          <a:effectLst/>
+        </p:spPr>
+        <p:style>
+          <a:lnRef idx="1">
+            <a:schemeClr val="accent1"/>
+          </a:lnRef>
+          <a:fillRef idx="3">
+            <a:schemeClr val="accent1"/>
+          </a:fillRef>
+          <a:effectRef idx="2">
+            <a:schemeClr val="accent1"/>
+          </a:effectRef>
+          <a:fontRef idx="minor">
+            <a:schemeClr val="lt1"/>
+          </a:fontRef>
+        </p:style>
+        <p:txBody>
+          <a:bodyPr rtlCol="0" anchor="ctr"/>
+          <a:lstStyle/>
+          <a:p/>
+        </p:txBody>
+      </p:sp>
+      <p:sp>
+        <p:nvSpPr>
+          <p:cNvPr id="19" name="Oval 18"/>
+          <p:cNvSpPr/>
+          <p:nvPr/>
+        </p:nvSpPr>
+        <p:spPr>
+          <a:xfrm>
+            <a:off x="777240" y="4251960"/>
+            <a:ext cx="457200" cy="457200"/>
+          </a:xfrm>
+          <a:prstGeom prst="ellipse">
+            <a:avLst/>
+          </a:prstGeom>
+          <a:solidFill>
+            <a:srgbClr val="F2B705"/>
+          </a:solidFill>
+          <a:ln>
+            <a:noFill/>
+          </a:ln>
+          <a:effectLst/>
+        </p:spPr>
+        <p:style>
+          <a:lnRef idx="1">
+            <a:schemeClr val="accent1"/>
+          </a:lnRef>
+          <a:fillRef idx="3">
+            <a:schemeClr val="accent1"/>
+          </a:fillRef>
+          <a:effectRef idx="2">
+            <a:schemeClr val="accent1"/>
+          </a:effectRef>
+          <a:fontRef idx="minor">
+            <a:schemeClr val="lt1"/>
+          </a:fontRef>
+        </p:style>
+        <p:txBody>
+          <a:bodyPr rtlCol="0" anchor="ctr" lIns="0" rIns="0" tIns="0" bIns="0"/>
+          <a:lstStyle/>
+          <a:p>
+            <a:pPr algn="ctr"/>
+            <a:r>
+              <a:rPr sz="1500" b="1">
                 <a:solidFill>
                   <a:srgbClr val="202122"/>
                 </a:solidFill>
                 <a:latin typeface="Calibri"/>
               </a:rPr>
-              <a:t>Social and economic effects explained</a:t>
-            </a:r>
-          </a:p>
-          <a:p>
-            <a:pPr marL="274320" indent="-274320">
-              <a:spcAft>
-                <a:spcPts val="810"/>
-              </a:spcAft>
-              <a:buClr>
-                <a:srgbClr val="0645AD"/>
-              </a:buClr>
-              <a:buFont typeface="Arial"/>
-              <a:buChar char="•"/>
-            </a:pPr>
-            <a:r>
-              <a:rPr sz="1800" b="0">
+              <a:t>4</a:t>
+            </a:r>
+          </a:p>
+        </p:txBody>
+      </p:sp>
+      <p:sp>
+        <p:nvSpPr>
+          <p:cNvPr id="20" name="TextBox 19"/>
+          <p:cNvSpPr txBox="1"/>
+          <p:nvPr/>
+        </p:nvSpPr>
+        <p:spPr>
+          <a:xfrm>
+            <a:off x="1371600" y="4224528"/>
+            <a:ext cx="2509418" cy="512064"/>
+          </a:xfrm>
+          <a:prstGeom prst="rect">
+            <a:avLst/>
+          </a:prstGeom>
+          <a:noFill/>
+        </p:spPr>
+        <p:txBody>
+          <a:bodyPr wrap="square" anchor="ctr" lIns="0" rIns="0" tIns="0" bIns="0"/>
+          <a:lstStyle/>
+          <a:p>
+            <a:pPr algn="l"/>
+            <a:r>
+              <a:rPr sz="1900" b="1" i="0">
+                <a:solidFill>
+                  <a:srgbClr val="03306E"/>
+                </a:solidFill>
+                <a:latin typeface="Calibri"/>
+              </a:rPr>
+              <a:t>Energy</a:t>
+            </a:r>
+          </a:p>
+        </p:txBody>
+      </p:sp>
+      <p:sp>
+        <p:nvSpPr>
+          <p:cNvPr id="21" name="TextBox 20"/>
+          <p:cNvSpPr txBox="1"/>
+          <p:nvPr/>
+        </p:nvSpPr>
+        <p:spPr>
+          <a:xfrm>
+            <a:off x="777240" y="4892040"/>
+            <a:ext cx="3058058" cy="1143000"/>
+          </a:xfrm>
+          <a:prstGeom prst="rect">
+            <a:avLst/>
+          </a:prstGeom>
+          <a:noFill/>
+        </p:spPr>
+        <p:txBody>
+          <a:bodyPr wrap="square" anchor="t" lIns="0" rIns="0" tIns="0" bIns="0"/>
+          <a:lstStyle/>
+          <a:p>
+            <a:pPr algn="l"/>
+            <a:r>
+              <a:rPr sz="2000" b="0" i="0">
                 <a:solidFill>
                   <a:srgbClr val="202122"/>
                 </a:solidFill>
                 <a:latin typeface="Calibri"/>
               </a:rPr>
-              <a:t>Forecast is reasoned</a:t>
+              <a:t>Distributed energy and hybrid technologies.</a:t>
+            </a:r>
+          </a:p>
+        </p:txBody>
+      </p:sp>
+      <p:sp>
+        <p:nvSpPr>
+          <p:cNvPr id="22" name="Rounded Rectangle 21"/>
+          <p:cNvSpPr/>
+          <p:nvPr/>
+        </p:nvSpPr>
+        <p:spPr>
+          <a:xfrm>
+            <a:off x="4338218" y="4023360"/>
+            <a:ext cx="3515258" cy="2148840"/>
+          </a:xfrm>
+          <a:prstGeom prst="roundRect">
+            <a:avLst>
+              <a:gd name="adj" fmla="val 6000"/>
+            </a:avLst>
+          </a:prstGeom>
+          <a:solidFill>
+            <a:srgbClr val="EAF3FF"/>
+          </a:solidFill>
+          <a:ln>
+            <a:noFill/>
+          </a:ln>
+          <a:effectLst/>
+        </p:spPr>
+        <p:style>
+          <a:lnRef idx="1">
+            <a:schemeClr val="accent1"/>
+          </a:lnRef>
+          <a:fillRef idx="3">
+            <a:schemeClr val="accent1"/>
+          </a:fillRef>
+          <a:effectRef idx="2">
+            <a:schemeClr val="accent1"/>
+          </a:effectRef>
+          <a:fontRef idx="minor">
+            <a:schemeClr val="lt1"/>
+          </a:fontRef>
+        </p:style>
+        <p:txBody>
+          <a:bodyPr rtlCol="0" anchor="ctr"/>
+          <a:lstStyle/>
+          <a:p/>
+        </p:txBody>
+      </p:sp>
+      <p:sp>
+        <p:nvSpPr>
+          <p:cNvPr id="23" name="Oval 22"/>
+          <p:cNvSpPr/>
+          <p:nvPr/>
+        </p:nvSpPr>
+        <p:spPr>
+          <a:xfrm>
+            <a:off x="4566818" y="4251960"/>
+            <a:ext cx="457200" cy="457200"/>
+          </a:xfrm>
+          <a:prstGeom prst="ellipse">
+            <a:avLst/>
+          </a:prstGeom>
+          <a:solidFill>
+            <a:srgbClr val="F2B705"/>
+          </a:solidFill>
+          <a:ln>
+            <a:noFill/>
+          </a:ln>
+          <a:effectLst/>
+        </p:spPr>
+        <p:style>
+          <a:lnRef idx="1">
+            <a:schemeClr val="accent1"/>
+          </a:lnRef>
+          <a:fillRef idx="3">
+            <a:schemeClr val="accent1"/>
+          </a:fillRef>
+          <a:effectRef idx="2">
+            <a:schemeClr val="accent1"/>
+          </a:effectRef>
+          <a:fontRef idx="minor">
+            <a:schemeClr val="lt1"/>
+          </a:fontRef>
+        </p:style>
+        <p:txBody>
+          <a:bodyPr rtlCol="0" anchor="ctr" lIns="0" rIns="0" tIns="0" bIns="0"/>
+          <a:lstStyle/>
+          <a:p>
+            <a:pPr algn="ctr"/>
+            <a:r>
+              <a:rPr sz="1500" b="1">
+                <a:solidFill>
+                  <a:srgbClr val="202122"/>
+                </a:solidFill>
+                <a:latin typeface="Calibri"/>
+              </a:rPr>
+              <a:t>5</a:t>
+            </a:r>
+          </a:p>
+        </p:txBody>
+      </p:sp>
+      <p:sp>
+        <p:nvSpPr>
+          <p:cNvPr id="24" name="TextBox 23"/>
+          <p:cNvSpPr txBox="1"/>
+          <p:nvPr/>
+        </p:nvSpPr>
+        <p:spPr>
+          <a:xfrm>
+            <a:off x="5161178" y="4224528"/>
+            <a:ext cx="2509418" cy="512064"/>
+          </a:xfrm>
+          <a:prstGeom prst="rect">
+            <a:avLst/>
+          </a:prstGeom>
+          <a:noFill/>
+        </p:spPr>
+        <p:txBody>
+          <a:bodyPr wrap="square" anchor="ctr" lIns="0" rIns="0" tIns="0" bIns="0"/>
+          <a:lstStyle/>
+          <a:p>
+            <a:pPr algn="l"/>
+            <a:r>
+              <a:rPr sz="1900" b="1" i="0">
+                <a:solidFill>
+                  <a:srgbClr val="03306E"/>
+                </a:solidFill>
+                <a:latin typeface="Calibri"/>
+              </a:rPr>
+              <a:t>Sustainability</a:t>
+            </a:r>
+          </a:p>
+        </p:txBody>
+      </p:sp>
+      <p:sp>
+        <p:nvSpPr>
+          <p:cNvPr id="25" name="TextBox 24"/>
+          <p:cNvSpPr txBox="1"/>
+          <p:nvPr/>
+        </p:nvSpPr>
+        <p:spPr>
+          <a:xfrm>
+            <a:off x="4566818" y="4892040"/>
+            <a:ext cx="3058058" cy="1143000"/>
+          </a:xfrm>
+          <a:prstGeom prst="rect">
+            <a:avLst/>
+          </a:prstGeom>
+          <a:noFill/>
+        </p:spPr>
+        <p:txBody>
+          <a:bodyPr wrap="square" anchor="t" lIns="0" rIns="0" tIns="0" bIns="0"/>
+          <a:lstStyle/>
+          <a:p>
+            <a:pPr algn="l"/>
+            <a:r>
+              <a:rPr sz="2000" b="0" i="0">
+                <a:solidFill>
+                  <a:srgbClr val="202122"/>
+                </a:solidFill>
+                <a:latin typeface="Calibri"/>
+              </a:rPr>
+              <a:t>The circular economy.</a:t>
             </a:r>
           </a:p>
         </p:txBody>
@@ -8802,7 +10719,7 @@
     <p:bg>
       <p:bgPr>
         <a:solidFill>
-          <a:srgbClr val="03306E"/>
+          <a:srgbClr val="FFFFFF"/>
         </a:solidFill>
         <a:effectLst/>
       </p:bgPr>
@@ -8838,7 +10755,7 @@
             <a:r>
               <a:rPr sz="1100" b="1" i="0">
                 <a:solidFill>
-                  <a:srgbClr val="A9C8F0"/>
+                  <a:srgbClr val="54595D"/>
                 </a:solidFill>
                 <a:latin typeface="Calibri"/>
               </a:rPr>
@@ -8871,24 +10788,90 @@
             <a:r>
               <a:rPr sz="3200" b="1" i="0">
                 <a:solidFill>
-                  <a:srgbClr val="FFFFFF"/>
+                  <a:srgbClr val="03306E"/>
                 </a:solidFill>
                 <a:latin typeface="Cambria"/>
               </a:rPr>
-              <a:t>Exit ticket</a:t>
-            </a:r>
-          </a:p>
-        </p:txBody>
-      </p:sp>
-      <p:sp>
-        <p:nvSpPr>
-          <p:cNvPr id="4" name="Oval 3"/>
+              <a:t>Quick check: Emerging trends</a:t>
+            </a:r>
+          </a:p>
+        </p:txBody>
+      </p:sp>
+      <p:sp>
+        <p:nvSpPr>
+          <p:cNvPr id="4" name="TextBox 3"/>
+          <p:cNvSpPr txBox="1"/>
+          <p:nvPr/>
+        </p:nvSpPr>
+        <p:spPr>
+          <a:xfrm>
+            <a:off x="548640" y="6446520"/>
+            <a:ext cx="8229600" cy="274320"/>
+          </a:xfrm>
+          <a:prstGeom prst="rect">
+            <a:avLst/>
+          </a:prstGeom>
+          <a:noFill/>
+        </p:spPr>
+        <p:txBody>
+          <a:bodyPr wrap="square" anchor="t" lIns="0" rIns="0" tIns="0" bIns="0"/>
+          <a:lstStyle/>
+          <a:p>
+            <a:pPr algn="l"/>
+            <a:r>
+              <a:rPr sz="1000" b="0" i="0">
+                <a:solidFill>
+                  <a:srgbClr val="54595D"/>
+                </a:solidFill>
+                <a:latin typeface="Calibri"/>
+              </a:rPr>
+              <a:t>Design and Development for Engineering and Manufacturing T Level  ·  Engineering Past, Present and Future</a:t>
+            </a:r>
+          </a:p>
+        </p:txBody>
+      </p:sp>
+      <p:sp>
+        <p:nvSpPr>
+          <p:cNvPr id="5" name="TextBox 4"/>
+          <p:cNvSpPr txBox="1"/>
+          <p:nvPr/>
+        </p:nvSpPr>
+        <p:spPr>
+          <a:xfrm>
+            <a:off x="10728655" y="6446520"/>
+            <a:ext cx="914400" cy="274320"/>
+          </a:xfrm>
+          <a:prstGeom prst="rect">
+            <a:avLst/>
+          </a:prstGeom>
+          <a:noFill/>
+        </p:spPr>
+        <p:txBody>
+          <a:bodyPr wrap="square" anchor="t" lIns="0" rIns="0" tIns="0" bIns="0"/>
+          <a:lstStyle/>
+          <a:p>
+            <a:pPr algn="r"/>
+            <a:r>
+              <a:rPr sz="1000" b="0" i="0">
+                <a:solidFill>
+                  <a:srgbClr val="54595D"/>
+                </a:solidFill>
+                <a:latin typeface="Calibri"/>
+              </a:rPr>
+              <a:t>9</a:t>
+            </a:r>
+          </a:p>
+        </p:txBody>
+      </p:sp>
+      <p:sp>
+        <p:nvSpPr>
+          <p:cNvPr id="6" name="Oval 5"/>
           <p:cNvSpPr/>
           <p:nvPr/>
         </p:nvSpPr>
         <p:spPr>
           <a:xfrm>
-            <a:off x="548640" y="1737360"/>
+            <a:off x="548640" y="1691640"/>
             <a:ext cx="502920" cy="502920"/>
           </a:xfrm>
           <a:prstGeom prst="ellipse">
@@ -8922,7 +10905,7 @@
           <a:p>
             <a:pPr algn="ctr"/>
             <a:r>
-              <a:rPr sz="1700" b="1">
+              <a:rPr sz="1600" b="1">
                 <a:solidFill>
                   <a:srgbClr val="202122"/>
                 </a:solidFill>
@@ -8935,14 +10918,14 @@
       </p:sp>
       <p:sp>
         <p:nvSpPr>
-          <p:cNvPr id="5" name="TextBox 4"/>
+          <p:cNvPr id="7" name="TextBox 6"/>
           <p:cNvSpPr txBox="1"/>
           <p:nvPr/>
         </p:nvSpPr>
         <p:spPr>
           <a:xfrm>
-            <a:off x="1325880" y="1645920"/>
-            <a:ext cx="6583680" cy="822960"/>
+            <a:off x="1371600" y="1645920"/>
+            <a:ext cx="10271455" cy="1188720"/>
           </a:xfrm>
           <a:prstGeom prst="rect">
             <a:avLst/>
@@ -8950,31 +10933,31 @@
           <a:noFill/>
         </p:spPr>
         <p:txBody>
-          <a:bodyPr wrap="square" anchor="ctr" lIns="0" rIns="0" tIns="0" bIns="0"/>
+          <a:bodyPr wrap="square" anchor="t" lIns="0" rIns="0" tIns="0" bIns="0"/>
           <a:lstStyle/>
           <a:p>
             <a:pPr algn="l"/>
             <a:r>
-              <a:rPr sz="2000" b="0" i="0">
-                <a:solidFill>
-                  <a:srgbClr val="FFFFFF"/>
-                </a:solidFill>
-                <a:latin typeface="Calibri"/>
-              </a:rPr>
-              <a:t>Which sector would you most like to work in?</a:t>
-            </a:r>
-          </a:p>
-        </p:txBody>
-      </p:sp>
-      <p:sp>
-        <p:nvSpPr>
-          <p:cNvPr id="6" name="Oval 5"/>
+              <a:rPr sz="2400" b="0" i="0">
+                <a:solidFill>
+                  <a:srgbClr val="202122"/>
+                </a:solidFill>
+                <a:latin typeface="Calibri"/>
+              </a:rPr>
+              <a:t>What is a cyber-physical system?</a:t>
+            </a:r>
+          </a:p>
+        </p:txBody>
+      </p:sp>
+      <p:sp>
+        <p:nvSpPr>
+          <p:cNvPr id="8" name="Oval 7"/>
           <p:cNvSpPr/>
           <p:nvPr/>
         </p:nvSpPr>
         <p:spPr>
           <a:xfrm>
-            <a:off x="548640" y="2697480"/>
+            <a:off x="548640" y="3108960"/>
             <a:ext cx="502920" cy="502920"/>
           </a:xfrm>
           <a:prstGeom prst="ellipse">
@@ -9008,7 +10991,7 @@
           <a:p>
             <a:pPr algn="ctr"/>
             <a:r>
-              <a:rPr sz="1700" b="1">
+              <a:rPr sz="1600" b="1">
                 <a:solidFill>
                   <a:srgbClr val="202122"/>
                 </a:solidFill>
@@ -9021,14 +11004,14 @@
       </p:sp>
       <p:sp>
         <p:nvSpPr>
-          <p:cNvPr id="7" name="TextBox 6"/>
+          <p:cNvPr id="9" name="TextBox 8"/>
           <p:cNvSpPr txBox="1"/>
           <p:nvPr/>
         </p:nvSpPr>
         <p:spPr>
           <a:xfrm>
-            <a:off x="1325880" y="2606040"/>
-            <a:ext cx="6583680" cy="822960"/>
+            <a:off x="1371600" y="3063240"/>
+            <a:ext cx="10271455" cy="1188720"/>
           </a:xfrm>
           <a:prstGeom prst="rect">
             <a:avLst/>
@@ -9036,31 +11019,31 @@
           <a:noFill/>
         </p:spPr>
         <p:txBody>
-          <a:bodyPr wrap="square" anchor="ctr" lIns="0" rIns="0" tIns="0" bIns="0"/>
+          <a:bodyPr wrap="square" anchor="t" lIns="0" rIns="0" tIns="0" bIns="0"/>
           <a:lstStyle/>
           <a:p>
             <a:pPr algn="l"/>
             <a:r>
-              <a:rPr sz="2000" b="0" i="0">
-                <a:solidFill>
-                  <a:srgbClr val="FFFFFF"/>
-                </a:solidFill>
-                <a:latin typeface="Calibri"/>
-              </a:rPr>
-              <a:t>How did computers change manufacturing?</a:t>
-            </a:r>
-          </a:p>
-        </p:txBody>
-      </p:sp>
-      <p:sp>
-        <p:nvSpPr>
-          <p:cNvPr id="8" name="Oval 7"/>
+              <a:rPr sz="2400" b="0" i="0">
+                <a:solidFill>
+                  <a:srgbClr val="202122"/>
+                </a:solidFill>
+                <a:latin typeface="Calibri"/>
+              </a:rPr>
+              <a:t>What is the circular economy?</a:t>
+            </a:r>
+          </a:p>
+        </p:txBody>
+      </p:sp>
+      <p:sp>
+        <p:nvSpPr>
+          <p:cNvPr id="10" name="Oval 9"/>
           <p:cNvSpPr/>
           <p:nvPr/>
         </p:nvSpPr>
         <p:spPr>
           <a:xfrm>
-            <a:off x="548640" y="3657600"/>
+            <a:off x="548640" y="4526280"/>
             <a:ext cx="502920" cy="502920"/>
           </a:xfrm>
           <a:prstGeom prst="ellipse">
@@ -9094,7 +11077,7 @@
           <a:p>
             <a:pPr algn="ctr"/>
             <a:r>
-              <a:rPr sz="1700" b="1">
+              <a:rPr sz="1600" b="1">
                 <a:solidFill>
                   <a:srgbClr val="202122"/>
                 </a:solidFill>
@@ -9103,83 +11086,6 @@
               <a:t>3</a:t>
             </a:r>
           </a:p>
-        </p:txBody>
-      </p:sp>
-      <p:sp>
-        <p:nvSpPr>
-          <p:cNvPr id="9" name="TextBox 8"/>
-          <p:cNvSpPr txBox="1"/>
-          <p:nvPr/>
-        </p:nvSpPr>
-        <p:spPr>
-          <a:xfrm>
-            <a:off x="1325880" y="3566160"/>
-            <a:ext cx="6583680" cy="822960"/>
-          </a:xfrm>
-          <a:prstGeom prst="rect">
-            <a:avLst/>
-          </a:prstGeom>
-          <a:noFill/>
-        </p:spPr>
-        <p:txBody>
-          <a:bodyPr wrap="square" anchor="ctr" lIns="0" rIns="0" tIns="0" bIns="0"/>
-          <a:lstStyle/>
-          <a:p>
-            <a:pPr algn="l"/>
-            <a:r>
-              <a:rPr sz="2000" b="0" i="0">
-                <a:solidFill>
-                  <a:srgbClr val="FFFFFF"/>
-                </a:solidFill>
-                <a:latin typeface="Calibri"/>
-              </a:rPr>
-              <a:t>Which emerging trend will affect engineering jobs most?</a:t>
-            </a:r>
-          </a:p>
-        </p:txBody>
-      </p:sp>
-      <p:sp>
-        <p:nvSpPr>
-          <p:cNvPr id="10" name="Rounded Rectangle 9"/>
-          <p:cNvSpPr/>
-          <p:nvPr/>
-        </p:nvSpPr>
-        <p:spPr>
-          <a:xfrm>
-            <a:off x="8229600" y="1645920"/>
-            <a:ext cx="3410712" cy="2926080"/>
-          </a:xfrm>
-          <a:prstGeom prst="roundRect">
-            <a:avLst>
-              <a:gd name="adj" fmla="val 8000"/>
-            </a:avLst>
-          </a:prstGeom>
-          <a:solidFill>
-            <a:srgbClr val="0645AD"/>
-          </a:solidFill>
-          <a:ln>
-            <a:noFill/>
-          </a:ln>
-          <a:effectLst/>
-        </p:spPr>
-        <p:style>
-          <a:lnRef idx="1">
-            <a:schemeClr val="accent1"/>
-          </a:lnRef>
-          <a:fillRef idx="3">
-            <a:schemeClr val="accent1"/>
-          </a:fillRef>
-          <a:effectRef idx="2">
-            <a:schemeClr val="accent1"/>
-          </a:effectRef>
-          <a:fontRef idx="minor">
-            <a:schemeClr val="lt1"/>
-          </a:fontRef>
-        </p:style>
-        <p:txBody>
-          <a:bodyPr rtlCol="0" anchor="ctr"/>
-          <a:lstStyle/>
-          <a:p/>
         </p:txBody>
       </p:sp>
       <p:sp>
@@ -9190,8 +11096,8 @@
         </p:nvSpPr>
         <p:spPr>
           <a:xfrm>
-            <a:off x="8503920" y="1874519"/>
-            <a:ext cx="2926080" cy="365760"/>
+            <a:off x="1371600" y="4480560"/>
+            <a:ext cx="10271455" cy="1188720"/>
           </a:xfrm>
           <a:prstGeom prst="rect">
             <a:avLst/>
@@ -9204,13 +11110,13 @@
           <a:p>
             <a:pPr algn="l"/>
             <a:r>
-              <a:rPr sz="1300" b="1" i="0">
-                <a:solidFill>
-                  <a:srgbClr val="A9C8F0"/>
-                </a:solidFill>
-                <a:latin typeface="Calibri"/>
-              </a:rPr>
-              <a:t>REVISE THIS TOPIC</a:t>
+              <a:rPr sz="2400" b="0" i="0">
+                <a:solidFill>
+                  <a:srgbClr val="202122"/>
+                </a:solidFill>
+                <a:latin typeface="Calibri"/>
+              </a:rPr>
+              <a:t>How can AR help engineers?</a:t>
             </a:r>
           </a:p>
         </p:txBody>
@@ -9223,8 +11129,8 @@
         </p:nvSpPr>
         <p:spPr>
           <a:xfrm>
-            <a:off x="8503920" y="2286000"/>
-            <a:ext cx="2926080" cy="548640"/>
+            <a:off x="548640" y="5852160"/>
+            <a:ext cx="11094415" cy="365760"/>
           </a:xfrm>
           <a:prstGeom prst="rect">
             <a:avLst/>
@@ -9237,79 +11143,13 @@
           <a:p>
             <a:pPr algn="l"/>
             <a:r>
-              <a:rPr sz="1400" b="0" i="0">
-                <a:solidFill>
-                  <a:srgbClr val="FFFFFF"/>
-                </a:solidFill>
-                <a:latin typeface="Calibri"/>
-              </a:rPr>
-              <a:t>Revision notes for this lesson are on the study wiki:</a:t>
-            </a:r>
-          </a:p>
-        </p:txBody>
-      </p:sp>
-      <p:sp>
-        <p:nvSpPr>
-          <p:cNvPr id="13" name="TextBox 12"/>
-          <p:cNvSpPr txBox="1"/>
-          <p:nvPr/>
-        </p:nvSpPr>
-        <p:spPr>
-          <a:xfrm>
-            <a:off x="8503920" y="2926080"/>
-            <a:ext cx="2926080" cy="1463040"/>
-          </a:xfrm>
-          <a:prstGeom prst="rect">
-            <a:avLst/>
-          </a:prstGeom>
-          <a:noFill/>
-        </p:spPr>
-        <p:txBody>
-          <a:bodyPr wrap="square" anchor="t" lIns="0" rIns="0" tIns="0" bIns="0"/>
-          <a:lstStyle/>
-          <a:p>
-            <a:pPr algn="l"/>
-            <a:r>
-              <a:rPr sz="2000" b="1" i="0">
-                <a:solidFill>
-                  <a:srgbClr val="FFFFFF"/>
-                </a:solidFill>
-                <a:latin typeface="Cambria"/>
-              </a:rPr>
-              <a:t>Engineering Core, Part 1</a:t>
-            </a:r>
-          </a:p>
-        </p:txBody>
-      </p:sp>
-      <p:sp>
-        <p:nvSpPr>
-          <p:cNvPr id="14" name="TextBox 13"/>
-          <p:cNvSpPr txBox="1"/>
-          <p:nvPr/>
-        </p:nvSpPr>
-        <p:spPr>
-          <a:xfrm>
-            <a:off x="548640" y="5669280"/>
-            <a:ext cx="11094415" cy="548640"/>
-          </a:xfrm>
-          <a:prstGeom prst="rect">
-            <a:avLst/>
-          </a:prstGeom>
-          <a:noFill/>
-        </p:spPr>
-        <p:txBody>
-          <a:bodyPr wrap="square" anchor="t" lIns="0" rIns="0" tIns="0" bIns="0"/>
-          <a:lstStyle/>
-          <a:p>
-            <a:pPr algn="l"/>
-            <a:r>
-              <a:rPr sz="1200" b="0" i="0">
-                <a:solidFill>
-                  <a:srgbClr val="A9C8F0"/>
-                </a:solidFill>
-                <a:latin typeface="Calibri"/>
-              </a:rPr>
-              <a:t>https://lana6478.github.io/T-level-Design-Development-Engineering-Manufacturing/#/01-core-component/01-engineering-core-part1.md</a:t>
+              <a:rPr sz="1300" b="0" i="1">
+                <a:solidFill>
+                  <a:srgbClr val="54595D"/>
+                </a:solidFill>
+                <a:latin typeface="Calibri"/>
+              </a:rPr>
+              <a:t>Answer on mini whiteboards or in your book. Answers are in the speaker notes.</a:t>
             </a:r>
           </a:p>
         </p:txBody>
